--- a/9_misc/handouts/source/TIP4PATLIBS_1_Workshop_v4.pptx
+++ b/9_misc/handouts/source/TIP4PATLIBS_1_Workshop_v4.pptx
@@ -11,6 +11,7 @@
     <p:sldId id="256" r:id="rId2"/>
     <p:sldId id="257" r:id="rId3"/>
     <p:sldId id="258" r:id="rId4"/>
+    <p:sldId id="275" r:id="rId26"/>
     <p:sldId id="259" r:id="rId5"/>
     <p:sldId id="260" r:id="rId6"/>
     <p:sldId id="261" r:id="rId7"/>
@@ -2612,7 +2613,7 @@
                 <a:ea typeface="Calibri" pitchFamily="34" charset="-122"/>
                 <a:cs typeface="Calibri" pitchFamily="34" charset="-120"/>
               </a:rPr>
-              <a:t>TIP4PATLIBS  ·  1 / 19</a:t>
+              <a:t>TIP4PATLIBS  ·  1 / 20</a:t>
             </a:r>
             <a:endParaRPr lang="en-US" sz="900" dirty="0"/>
           </a:p>
@@ -3170,7 +3171,7 @@
                 <a:ea typeface="Calibri" pitchFamily="34" charset="-122"/>
                 <a:cs typeface="Calibri" pitchFamily="34" charset="-120"/>
               </a:rPr>
-              <a:t>TIP4PATLIBS  ·  10 / 19</a:t>
+              <a:t>TIP4PATLIBS  ·  11 / 20</a:t>
             </a:r>
             <a:endParaRPr lang="en-US" sz="900" dirty="0"/>
           </a:p>
@@ -3911,7 +3912,7 @@
                 <a:ea typeface="Calibri" pitchFamily="34" charset="-122"/>
                 <a:cs typeface="Calibri" pitchFamily="34" charset="-120"/>
               </a:rPr>
-              <a:t>TIP4PATLIBS  ·  11 / 19</a:t>
+              <a:t>TIP4PATLIBS  ·  12 / 20</a:t>
             </a:r>
             <a:endParaRPr lang="en-US" sz="900" dirty="0"/>
           </a:p>
@@ -4469,7 +4470,7 @@
                 <a:ea typeface="Calibri" pitchFamily="34" charset="-122"/>
                 <a:cs typeface="Calibri" pitchFamily="34" charset="-120"/>
               </a:rPr>
-              <a:t>TIP4PATLIBS  ·  12 / 19</a:t>
+              <a:t>TIP4PATLIBS  ·  13 / 20</a:t>
             </a:r>
             <a:endParaRPr lang="en-US" sz="900" dirty="0"/>
           </a:p>
@@ -5210,7 +5211,7 @@
                 <a:ea typeface="Calibri" pitchFamily="34" charset="-122"/>
                 <a:cs typeface="Calibri" pitchFamily="34" charset="-120"/>
               </a:rPr>
-              <a:t>TIP4PATLIBS  ·  13 / 19</a:t>
+              <a:t>TIP4PATLIBS  ·  14 / 20</a:t>
             </a:r>
             <a:endParaRPr lang="en-US" sz="900" dirty="0"/>
           </a:p>
@@ -5768,7 +5769,7 @@
                 <a:ea typeface="Calibri" pitchFamily="34" charset="-122"/>
                 <a:cs typeface="Calibri" pitchFamily="34" charset="-120"/>
               </a:rPr>
-              <a:t>TIP4PATLIBS  ·  14 / 19</a:t>
+              <a:t>TIP4PATLIBS  ·  15 / 20</a:t>
             </a:r>
             <a:endParaRPr lang="en-US" sz="900" dirty="0"/>
           </a:p>
@@ -6548,7 +6549,7 @@
                 <a:ea typeface="Calibri" pitchFamily="34" charset="-122"/>
                 <a:cs typeface="Calibri" pitchFamily="34" charset="-120"/>
               </a:rPr>
-              <a:t>TIP4PATLIBS  ·  15 / 19</a:t>
+              <a:t>TIP4PATLIBS  ·  16 / 20</a:t>
             </a:r>
             <a:endParaRPr lang="en-US" sz="900" dirty="0"/>
           </a:p>
@@ -7106,7 +7107,7 @@
                 <a:ea typeface="Calibri" pitchFamily="34" charset="-122"/>
                 <a:cs typeface="Calibri" pitchFamily="34" charset="-120"/>
               </a:rPr>
-              <a:t>TIP4PATLIBS  ·  16 / 19</a:t>
+              <a:t>TIP4PATLIBS  ·  17 / 20</a:t>
             </a:r>
             <a:endParaRPr lang="en-US" sz="900" dirty="0"/>
           </a:p>
@@ -7886,7 +7887,7 @@
                 <a:ea typeface="Calibri" pitchFamily="34" charset="-122"/>
                 <a:cs typeface="Calibri" pitchFamily="34" charset="-120"/>
               </a:rPr>
-              <a:t>TIP4PATLIBS  ·  17 / 19</a:t>
+              <a:t>TIP4PATLIBS  ·  18 / 20</a:t>
             </a:r>
             <a:endParaRPr lang="en-US" sz="900" dirty="0"/>
           </a:p>
@@ -8444,7 +8445,7 @@
                 <a:ea typeface="Calibri" pitchFamily="34" charset="-122"/>
                 <a:cs typeface="Calibri" pitchFamily="34" charset="-120"/>
               </a:rPr>
-              <a:t>TIP4PATLIBS  ·  18 / 19</a:t>
+              <a:t>TIP4PATLIBS  ·  19 / 20</a:t>
             </a:r>
             <a:endParaRPr lang="en-US" sz="900" dirty="0"/>
           </a:p>
@@ -8675,7 +8676,7 @@
         <p:spPr>
           <a:xfrm>
             <a:off x="1188720" y="1636776"/>
-            <a:ext cx="10241280" cy="292608"/>
+            <a:ext cx="8055864" cy="292608"/>
           </a:xfrm>
           <a:prstGeom prst="rect">
             <a:avLst/>
@@ -8714,7 +8715,7 @@
         <p:spPr>
           <a:xfrm>
             <a:off x="1188720" y="1947672"/>
-            <a:ext cx="10241280" cy="292608"/>
+            <a:ext cx="8055864" cy="292608"/>
           </a:xfrm>
           <a:prstGeom prst="rect">
             <a:avLst/>
@@ -8824,7 +8825,7 @@
         <p:spPr>
           <a:xfrm>
             <a:off x="1188720" y="2478024"/>
-            <a:ext cx="10241280" cy="292608"/>
+            <a:ext cx="8055864" cy="292608"/>
           </a:xfrm>
           <a:prstGeom prst="rect">
             <a:avLst/>
@@ -8863,7 +8864,7 @@
         <p:spPr>
           <a:xfrm>
             <a:off x="1188720" y="2788920"/>
-            <a:ext cx="10241280" cy="292608"/>
+            <a:ext cx="8055864" cy="292608"/>
           </a:xfrm>
           <a:prstGeom prst="rect">
             <a:avLst/>
@@ -8973,7 +8974,7 @@
         <p:spPr>
           <a:xfrm>
             <a:off x="1188720" y="3319272"/>
-            <a:ext cx="10241280" cy="292608"/>
+            <a:ext cx="8055864" cy="292608"/>
           </a:xfrm>
           <a:prstGeom prst="rect">
             <a:avLst/>
@@ -9012,7 +9013,7 @@
         <p:spPr>
           <a:xfrm>
             <a:off x="1188720" y="3630168"/>
-            <a:ext cx="10241280" cy="292608"/>
+            <a:ext cx="8055864" cy="292608"/>
           </a:xfrm>
           <a:prstGeom prst="rect">
             <a:avLst/>
@@ -9122,7 +9123,7 @@
         <p:spPr>
           <a:xfrm>
             <a:off x="1188720" y="4160520"/>
-            <a:ext cx="10241280" cy="292608"/>
+            <a:ext cx="8055864" cy="292608"/>
           </a:xfrm>
           <a:prstGeom prst="rect">
             <a:avLst/>
@@ -9161,7 +9162,7 @@
         <p:spPr>
           <a:xfrm>
             <a:off x="1188720" y="4471416"/>
-            <a:ext cx="10241280" cy="292608"/>
+            <a:ext cx="8055864" cy="292608"/>
           </a:xfrm>
           <a:prstGeom prst="rect">
             <a:avLst/>
@@ -9374,9 +9375,66 @@
                 <a:ea typeface="Calibri" pitchFamily="34" charset="-122"/>
                 <a:cs typeface="Calibri" pitchFamily="34" charset="-120"/>
               </a:rPr>
-              <a:t>TIP4PATLIBS  ·  19 / 19</a:t>
+              <a:t>TIP4PATLIBS  ·  20 / 20</a:t>
             </a:r>
             <a:endParaRPr lang="en-US" sz="900" dirty="0"/>
+          </a:p>
+        </p:txBody>
+      </p:sp>
+      <p:pic>
+        <p:nvPicPr>
+          <p:cNvPr id="26" name="LinkedIn QR" descr="QR code: linkedin.com/in/herrkrueger"/>
+          <p:cNvPicPr>
+            <a:picLocks noChangeAspect="1"/>
+          </p:cNvPicPr>
+          <p:nvPr/>
+        </p:nvPicPr>
+        <p:blipFill>
+          <a:blip r:embed="rId3"/>
+          <a:stretch>
+            <a:fillRect/>
+          </a:stretch>
+        </p:blipFill>
+        <p:spPr>
+          <a:xfrm>
+            <a:off x="9518904" y="1691640"/>
+            <a:ext cx="2103120" cy="2103120"/>
+          </a:xfrm>
+          <a:prstGeom prst="rect">
+            <a:avLst/>
+          </a:prstGeom>
+        </p:spPr>
+      </p:pic>
+      <p:sp>
+        <p:nvSpPr>
+          <p:cNvPr id="27" name="LinkedIn caption"/>
+          <p:cNvSpPr txBox="1"/>
+          <p:nvPr/>
+        </p:nvSpPr>
+        <p:spPr>
+          <a:xfrm>
+            <a:off x="9518904" y="3886200"/>
+            <a:ext cx="2103120" cy="274320"/>
+          </a:xfrm>
+          <a:prstGeom prst="rect">
+            <a:avLst/>
+          </a:prstGeom>
+          <a:noFill/>
+        </p:spPr>
+        <p:txBody>
+          <a:bodyPr wrap="square" lIns="0" tIns="0" rIns="0" bIns="0" rtlCol="0" anchor="t"/>
+          <a:lstStyle/>
+          <a:p>
+            <a:pPr algn="ctr"/>
+            <a:r>
+              <a:rPr lang="en-US" sz="1100" dirty="0">
+                <a:solidFill>
+                  <a:srgbClr val="9EC7E3"/>
+                </a:solidFill>
+                <a:latin typeface="Calibri"/>
+              </a:rPr>
+              <a:t>Arne Krüger on LinkedIn</a:t>
+            </a:r>
           </a:p>
         </p:txBody>
       </p:sp>
@@ -10050,9 +10108,661 @@
                 <a:ea typeface="Calibri" pitchFamily="34" charset="-122"/>
                 <a:cs typeface="Calibri" pitchFamily="34" charset="-120"/>
               </a:rPr>
-              <a:t>TIP4PATLIBS  ·  2 / 19</a:t>
+              <a:t>TIP4PATLIBS  ·  2 / 20</a:t>
             </a:r>
             <a:endParaRPr lang="en-US" sz="900" dirty="0"/>
+          </a:p>
+        </p:txBody>
+      </p:sp>
+    </p:spTree>
+  </p:cSld>
+  <p:clrMapOvr>
+    <a:masterClrMapping/>
+  </p:clrMapOvr>
+</p:sld>
+</file>
+
+<file path=ppt/slides/slide20.xml><?xml version="1.0" encoding="utf-8"?>
+<p:sld xmlns:a="http://schemas.openxmlformats.org/drawingml/2006/main" xmlns:r="http://schemas.openxmlformats.org/officeDocument/2006/relationships" xmlns:p="http://schemas.openxmlformats.org/presentationml/2006/main">
+  <p:cSld name="Slide 3">
+    <p:bg>
+      <p:bgPr>
+        <a:solidFill>
+          <a:srgbClr val="FFFFFF"/>
+        </a:solidFill>
+        <a:effectLst/>
+      </p:bgPr>
+    </p:bg>
+    <p:spTree>
+      <p:nvGrpSpPr>
+        <p:cNvPr id="1" name=""/>
+        <p:cNvGrpSpPr/>
+        <p:nvPr/>
+      </p:nvGrpSpPr>
+      <p:grpSpPr>
+        <a:xfrm>
+          <a:off x="0" y="0"/>
+          <a:ext cx="0" cy="0"/>
+          <a:chOff x="0" y="0"/>
+          <a:chExt cx="0" cy="0"/>
+        </a:xfrm>
+      </p:grpSpPr>
+      <p:sp>
+        <p:nvSpPr>
+          <p:cNvPr id="2" name="Text 0"/>
+          <p:cNvSpPr txBox="1"/>
+          <p:nvPr/>
+        </p:nvSpPr>
+        <p:spPr>
+          <a:xfrm>
+            <a:off x="566928" y="384048"/>
+            <a:ext cx="11057839" cy="256032"/>
+          </a:xfrm>
+          <a:prstGeom prst="rect">
+            <a:avLst/>
+          </a:prstGeom>
+          <a:noFill/>
+          <a:ln/>
+        </p:spPr>
+        <p:txBody>
+          <a:bodyPr wrap="square" lIns="0" tIns="0" rIns="0" bIns="0" rtlCol="0" anchor="ctr"/>
+          <a:lstStyle/>
+          <a:p>
+            <a:pPr marL="0" indent="0">
+              <a:buNone/>
+            </a:pPr>
+            <a:r>
+              <a:rPr lang="en-US" sz="1050" b="1" kern="0" spc="220" dirty="0">
+                <a:solidFill>
+                  <a:srgbClr val="C62828"/>
+                </a:solidFill>
+                <a:latin typeface="Calibri" pitchFamily="34" charset="0"/>
+                <a:ea typeface="Calibri" pitchFamily="34" charset="-122"/>
+                <a:cs typeface="Calibri" pitchFamily="34" charset="-120"/>
+              </a:rPr>
+              <a:t>BRING IT INTO YOUR OWN TIP</a:t>
+            </a:r>
+          </a:p>
+        </p:txBody>
+      </p:sp>
+      <p:sp>
+        <p:nvSpPr>
+          <p:cNvPr id="3" name="Text 1"/>
+          <p:cNvSpPr txBox="1"/>
+          <p:nvPr/>
+        </p:nvSpPr>
+        <p:spPr>
+          <a:xfrm>
+            <a:off x="566928" y="777240"/>
+            <a:ext cx="8778240" cy="1143000"/>
+          </a:xfrm>
+          <a:prstGeom prst="rect">
+            <a:avLst/>
+          </a:prstGeom>
+          <a:noFill/>
+          <a:ln/>
+        </p:spPr>
+        <p:txBody>
+          <a:bodyPr wrap="square" lIns="0" tIns="0" rIns="0" bIns="0" rtlCol="0" anchor="ctr"/>
+          <a:lstStyle/>
+          <a:p>
+            <a:pPr marL="0" indent="0">
+              <a:lnSpc>
+                <a:spcPts val="4000"/>
+              </a:lnSpc>
+              <a:buNone/>
+            </a:pPr>
+            <a:r>
+              <a:rPr lang="en-US" sz="3200" dirty="0">
+                <a:solidFill>
+                  <a:srgbClr val="003366"/>
+                </a:solidFill>
+                <a:latin typeface="Calibri" pitchFamily="34" charset="0"/>
+                <a:ea typeface="Calibri" pitchFamily="34" charset="-122"/>
+                <a:cs typeface="Calibri" pitchFamily="34" charset="-120"/>
+              </a:rPr>
+              <a:t>One command.</a:t>
+            </a:r>
+          </a:p>
+          <a:p>
+            <a:pPr marL="0" indent="0">
+              <a:lnSpc>
+                <a:spcPts val="4000"/>
+              </a:lnSpc>
+              <a:buNone/>
+            </a:pPr>
+            <a:r>
+              <a:rPr lang="en-US" sz="3200" dirty="0">
+                <a:solidFill>
+                  <a:srgbClr val="003366"/>
+                </a:solidFill>
+                <a:latin typeface="Calibri" pitchFamily="34" charset="0"/>
+                <a:ea typeface="Calibri" pitchFamily="34" charset="-122"/>
+                <a:cs typeface="Calibri" pitchFamily="34" charset="-120"/>
+              </a:rPr>
+              <a:t>Then you have everything.</a:t>
+            </a:r>
+          </a:p>
+        </p:txBody>
+      </p:sp>
+      <p:sp>
+        <p:nvSpPr>
+          <p:cNvPr id="4" name="Text 2"/>
+          <p:cNvSpPr txBox="1"/>
+          <p:nvPr/>
+        </p:nvSpPr>
+        <p:spPr>
+          <a:xfrm>
+            <a:off x="566928" y="2029968"/>
+            <a:ext cx="9509760" cy="411480"/>
+          </a:xfrm>
+          <a:prstGeom prst="rect">
+            <a:avLst/>
+          </a:prstGeom>
+          <a:noFill/>
+          <a:ln/>
+        </p:spPr>
+        <p:txBody>
+          <a:bodyPr wrap="square" lIns="0" tIns="0" rIns="0" bIns="0" rtlCol="0" anchor="ctr"/>
+          <a:lstStyle/>
+          <a:p>
+            <a:pPr marL="0" indent="0">
+              <a:lnSpc>
+                <a:spcPts val="2300"/>
+              </a:lnSpc>
+              <a:buNone/>
+            </a:pPr>
+            <a:r>
+              <a:rPr lang="en-US" sz="1500" dirty="0">
+                <a:solidFill>
+                  <a:srgbClr val="3D4451"/>
+                </a:solidFill>
+                <a:latin typeface="Calibri" pitchFamily="34" charset="0"/>
+                <a:ea typeface="Calibri" pitchFamily="34" charset="-122"/>
+                <a:cs typeface="Calibri" pitchFamily="34" charset="-120"/>
+              </a:rPr>
+              <a:t>Open TIP, start a terminal (File → New → Terminal) and run this one line:</a:t>
+            </a:r>
+          </a:p>
+        </p:txBody>
+      </p:sp>
+      <p:sp>
+        <p:nvSpPr>
+          <p:cNvPr id="5" name="Shape 3"/>
+          <p:cNvSpPr/>
+          <p:nvPr/>
+        </p:nvSpPr>
+        <p:spPr>
+          <a:xfrm>
+            <a:off x="566927" y="3977640"/>
+            <a:ext cx="3472586" cy="1975104"/>
+          </a:xfrm>
+          <a:prstGeom prst="roundRect">
+            <a:avLst>
+              <a:gd name="adj" fmla="val 1838"/>
+            </a:avLst>
+          </a:prstGeom>
+          <a:solidFill>
+            <a:srgbClr val="EEF2F7"/>
+          </a:solidFill>
+          <a:ln w="12700">
+            <a:solidFill>
+              <a:srgbClr val="DCE3EB"/>
+            </a:solidFill>
+            <a:prstDash val="solid"/>
+          </a:ln>
+        </p:spPr>
+        <p:txBody>
+          <a:bodyPr/>
+          <a:lstStyle/>
+          <a:p>
+            <a:endParaRPr lang="en-US"/>
+          </a:p>
+        </p:txBody>
+      </p:sp>
+      <p:sp>
+        <p:nvSpPr>
+          <p:cNvPr id="6" name="Text 4"/>
+          <p:cNvSpPr txBox="1"/>
+          <p:nvPr/>
+        </p:nvSpPr>
+        <p:spPr>
+          <a:xfrm>
+            <a:off x="841248" y="4123944"/>
+            <a:ext cx="2923946" cy="548640"/>
+          </a:xfrm>
+          <a:prstGeom prst="rect">
+            <a:avLst/>
+          </a:prstGeom>
+          <a:noFill/>
+          <a:ln/>
+        </p:spPr>
+        <p:txBody>
+          <a:bodyPr wrap="square" lIns="0" tIns="0" rIns="0" bIns="0" rtlCol="0" anchor="ctr"/>
+          <a:lstStyle/>
+          <a:p>
+            <a:pPr marL="0" indent="0">
+              <a:lnSpc>
+                <a:spcPts val="2000"/>
+              </a:lnSpc>
+              <a:buNone/>
+            </a:pPr>
+            <a:r>
+              <a:rPr lang="en-US" sz="1500" b="1" dirty="0">
+                <a:solidFill>
+                  <a:srgbClr val="003366"/>
+                </a:solidFill>
+                <a:latin typeface="Calibri" pitchFamily="34" charset="0"/>
+                <a:ea typeface="Calibri" pitchFamily="34" charset="-122"/>
+                <a:cs typeface="Calibri" pitchFamily="34" charset="-120"/>
+              </a:rPr>
+              <a:t>The five modules</a:t>
+            </a:r>
+          </a:p>
+        </p:txBody>
+      </p:sp>
+      <p:sp>
+        <p:nvSpPr>
+          <p:cNvPr id="7" name="Text 5"/>
+          <p:cNvSpPr txBox="1"/>
+          <p:nvPr/>
+        </p:nvSpPr>
+        <p:spPr>
+          <a:xfrm>
+            <a:off x="841248" y="4526280"/>
+            <a:ext cx="2923946" cy="1280160"/>
+          </a:xfrm>
+          <a:prstGeom prst="rect">
+            <a:avLst/>
+          </a:prstGeom>
+          <a:noFill/>
+          <a:ln/>
+        </p:spPr>
+        <p:txBody>
+          <a:bodyPr wrap="square" lIns="0" tIns="0" rIns="0" bIns="0" rtlCol="0" anchor="ctr"/>
+          <a:lstStyle/>
+          <a:p>
+            <a:pPr marL="0" indent="0">
+              <a:lnSpc>
+                <a:spcPts val="1800"/>
+              </a:lnSpc>
+              <a:buNone/>
+            </a:pPr>
+            <a:r>
+              <a:rPr lang="en-US" sz="1250" dirty="0">
+                <a:solidFill>
+                  <a:srgbClr val="3D4451"/>
+                </a:solidFill>
+                <a:latin typeface="Calibri" pitchFamily="34" charset="0"/>
+                <a:ea typeface="Calibri" pitchFamily="34" charset="-122"/>
+                <a:cs typeface="Calibri" pitchFamily="34" charset="-120"/>
+              </a:rPr>
+              <a:t>Cloned into ~/epo-tip4patlibs, executed, with the code folded away. Open a folder and read.</a:t>
+            </a:r>
+          </a:p>
+        </p:txBody>
+      </p:sp>
+      <p:sp>
+        <p:nvSpPr>
+          <p:cNvPr id="8" name="Shape 6"/>
+          <p:cNvSpPr/>
+          <p:nvPr/>
+        </p:nvSpPr>
+        <p:spPr>
+          <a:xfrm>
+            <a:off x="4359554" y="3977640"/>
+            <a:ext cx="3472586" cy="1975104"/>
+          </a:xfrm>
+          <a:prstGeom prst="roundRect">
+            <a:avLst>
+              <a:gd name="adj" fmla="val 1838"/>
+            </a:avLst>
+          </a:prstGeom>
+          <a:solidFill>
+            <a:srgbClr val="EEF2F7"/>
+          </a:solidFill>
+          <a:ln w="12700">
+            <a:solidFill>
+              <a:srgbClr val="DCE3EB"/>
+            </a:solidFill>
+            <a:prstDash val="solid"/>
+          </a:ln>
+        </p:spPr>
+        <p:txBody>
+          <a:bodyPr/>
+          <a:lstStyle/>
+          <a:p>
+            <a:endParaRPr lang="en-US"/>
+          </a:p>
+        </p:txBody>
+      </p:sp>
+      <p:sp>
+        <p:nvSpPr>
+          <p:cNvPr id="9" name="Text 7"/>
+          <p:cNvSpPr txBox="1"/>
+          <p:nvPr/>
+        </p:nvSpPr>
+        <p:spPr>
+          <a:xfrm>
+            <a:off x="4636008" y="4123944"/>
+            <a:ext cx="2923946" cy="548640"/>
+          </a:xfrm>
+          <a:prstGeom prst="rect">
+            <a:avLst/>
+          </a:prstGeom>
+          <a:noFill/>
+          <a:ln/>
+        </p:spPr>
+        <p:txBody>
+          <a:bodyPr wrap="square" lIns="0" tIns="0" rIns="0" bIns="0" rtlCol="0" anchor="ctr"/>
+          <a:lstStyle/>
+          <a:p>
+            <a:pPr marL="0" indent="0">
+              <a:lnSpc>
+                <a:spcPts val="2000"/>
+              </a:lnSpc>
+              <a:buNone/>
+            </a:pPr>
+            <a:r>
+              <a:rPr lang="en-US" sz="1500" b="1" dirty="0">
+                <a:solidFill>
+                  <a:srgbClr val="003366"/>
+                </a:solidFill>
+                <a:latin typeface="Calibri" pitchFamily="34" charset="0"/>
+                <a:ea typeface="Calibri" pitchFamily="34" charset="-122"/>
+                <a:cs typeface="Calibri" pitchFamily="34" charset="-120"/>
+              </a:rPr>
+              <a:t>An assistant on standby</a:t>
+            </a:r>
+          </a:p>
+        </p:txBody>
+      </p:sp>
+      <p:sp>
+        <p:nvSpPr>
+          <p:cNvPr id="10" name="Text 8"/>
+          <p:cNvSpPr txBox="1"/>
+          <p:nvPr/>
+        </p:nvSpPr>
+        <p:spPr>
+          <a:xfrm>
+            <a:off x="4636008" y="4526280"/>
+            <a:ext cx="2923946" cy="1280160"/>
+          </a:xfrm>
+          <a:prstGeom prst="rect">
+            <a:avLst/>
+          </a:prstGeom>
+          <a:noFill/>
+          <a:ln/>
+        </p:spPr>
+        <p:txBody>
+          <a:bodyPr wrap="square" lIns="0" tIns="0" rIns="0" bIns="0" rtlCol="0" anchor="ctr"/>
+          <a:lstStyle/>
+          <a:p>
+            <a:pPr marL="0" indent="0">
+              <a:lnSpc>
+                <a:spcPts val="1800"/>
+              </a:lnSpc>
+              <a:buNone/>
+            </a:pPr>
+            <a:r>
+              <a:rPr lang="en-US" sz="1250" dirty="0">
+                <a:solidFill>
+                  <a:srgbClr val="3D4451"/>
+                </a:solidFill>
+                <a:latin typeface="Calibri" pitchFamily="34" charset="0"/>
+                <a:ea typeface="Calibri" pitchFamily="34" charset="-122"/>
+                <a:cs typeface="Calibri" pitchFamily="34" charset="-120"/>
+              </a:rPr>
+              <a:t>Installed and waiting. Sign in only when you want to change a notebook or build your own analysis.</a:t>
+            </a:r>
+          </a:p>
+        </p:txBody>
+      </p:sp>
+      <p:sp>
+        <p:nvSpPr>
+          <p:cNvPr id="11" name="Shape 9"/>
+          <p:cNvSpPr/>
+          <p:nvPr/>
+        </p:nvSpPr>
+        <p:spPr>
+          <a:xfrm>
+            <a:off x="8152181" y="3977640"/>
+            <a:ext cx="3472586" cy="1975104"/>
+          </a:xfrm>
+          <a:prstGeom prst="roundRect">
+            <a:avLst>
+              <a:gd name="adj" fmla="val 1838"/>
+            </a:avLst>
+          </a:prstGeom>
+          <a:solidFill>
+            <a:srgbClr val="EEF2F7"/>
+          </a:solidFill>
+          <a:ln w="12700">
+            <a:solidFill>
+              <a:srgbClr val="DCE3EB"/>
+            </a:solidFill>
+            <a:prstDash val="solid"/>
+          </a:ln>
+        </p:spPr>
+        <p:txBody>
+          <a:bodyPr/>
+          <a:lstStyle/>
+          <a:p>
+            <a:endParaRPr lang="en-US"/>
+          </a:p>
+        </p:txBody>
+      </p:sp>
+      <p:sp>
+        <p:nvSpPr>
+          <p:cNvPr id="12" name="Text 10"/>
+          <p:cNvSpPr txBox="1"/>
+          <p:nvPr/>
+        </p:nvSpPr>
+        <p:spPr>
+          <a:xfrm>
+            <a:off x="8430768" y="4123944"/>
+            <a:ext cx="2923946" cy="548640"/>
+          </a:xfrm>
+          <a:prstGeom prst="rect">
+            <a:avLst/>
+          </a:prstGeom>
+          <a:noFill/>
+          <a:ln/>
+        </p:spPr>
+        <p:txBody>
+          <a:bodyPr wrap="square" lIns="0" tIns="0" rIns="0" bIns="0" rtlCol="0" anchor="ctr"/>
+          <a:lstStyle/>
+          <a:p>
+            <a:pPr marL="0" indent="0">
+              <a:lnSpc>
+                <a:spcPts val="2000"/>
+              </a:lnSpc>
+              <a:buNone/>
+            </a:pPr>
+            <a:r>
+              <a:rPr lang="en-US" sz="1500" b="1" dirty="0">
+                <a:solidFill>
+                  <a:srgbClr val="003366"/>
+                </a:solidFill>
+                <a:latin typeface="Calibri" pitchFamily="34" charset="0"/>
+                <a:ea typeface="Calibri" pitchFamily="34" charset="-122"/>
+                <a:cs typeface="Calibri" pitchFamily="34" charset="-120"/>
+              </a:rPr>
+              <a:t>It survives the rebuild</a:t>
+            </a:r>
+          </a:p>
+        </p:txBody>
+      </p:sp>
+      <p:sp>
+        <p:nvSpPr>
+          <p:cNvPr id="13" name="Text 11"/>
+          <p:cNvSpPr txBox="1"/>
+          <p:nvPr/>
+        </p:nvSpPr>
+        <p:spPr>
+          <a:xfrm>
+            <a:off x="8430768" y="4526280"/>
+            <a:ext cx="2923946" cy="1280160"/>
+          </a:xfrm>
+          <a:prstGeom prst="rect">
+            <a:avLst/>
+          </a:prstGeom>
+          <a:noFill/>
+          <a:ln/>
+        </p:spPr>
+        <p:txBody>
+          <a:bodyPr wrap="square" lIns="0" tIns="0" rIns="0" bIns="0" rtlCol="0" anchor="ctr"/>
+          <a:lstStyle/>
+          <a:p>
+            <a:pPr marL="0" indent="0">
+              <a:lnSpc>
+                <a:spcPts val="1800"/>
+              </a:lnSpc>
+              <a:buNone/>
+            </a:pPr>
+            <a:r>
+              <a:rPr lang="en-US" sz="1250" dirty="0">
+                <a:solidFill>
+                  <a:srgbClr val="3D4451"/>
+                </a:solidFill>
+                <a:latin typeface="Calibri" pitchFamily="34" charset="0"/>
+                <a:ea typeface="Calibri" pitchFamily="34" charset="-122"/>
+                <a:cs typeface="Calibri" pitchFamily="34" charset="-120"/>
+              </a:rPr>
+              <a:t>TIP rebuilds your machine without warning. Run the same line again: it repairs the setup and updates the material.</a:t>
+            </a:r>
+          </a:p>
+        </p:txBody>
+      </p:sp>
+      <p:sp>
+        <p:nvSpPr>
+          <p:cNvPr id="15" name="Text 12"/>
+          <p:cNvSpPr txBox="1"/>
+          <p:nvPr/>
+        </p:nvSpPr>
+        <p:spPr>
+          <a:xfrm>
+            <a:off x="566928" y="6382512"/>
+            <a:ext cx="5486400" cy="274320"/>
+          </a:xfrm>
+          <a:prstGeom prst="rect">
+            <a:avLst/>
+          </a:prstGeom>
+          <a:noFill/>
+          <a:ln/>
+        </p:spPr>
+        <p:txBody>
+          <a:bodyPr wrap="square" lIns="0" tIns="0" rIns="0" bIns="0" rtlCol="0" anchor="ctr"/>
+          <a:lstStyle/>
+          <a:p>
+            <a:pPr marL="0" indent="0">
+              <a:buNone/>
+            </a:pPr>
+            <a:r>
+              <a:rPr lang="en-US" sz="900" kern="0" spc="100" dirty="0">
+                <a:solidFill>
+                  <a:srgbClr val="6B7280"/>
+                </a:solidFill>
+                <a:latin typeface="Calibri" pitchFamily="34" charset="0"/>
+                <a:ea typeface="Calibri" pitchFamily="34" charset="-122"/>
+                <a:cs typeface="Calibri" pitchFamily="34" charset="-120"/>
+              </a:rPr>
+              <a:t>TIP4PATLIBS  ·  4 / 20</a:t>
+            </a:r>
+            <a:endParaRPr lang="en-US" sz="900" dirty="0"/>
+          </a:p>
+        </p:txBody>
+      </p:sp>
+      <p:sp>
+        <p:nvSpPr>
+          <p:cNvPr id="14" name="Shape 3">
+            <a:extLst>
+              <a:ext uri="{FF2B5EF4-FFF2-40B4-BE49-F238E27FC236}">
+                <a16:creationId xmlns:a16="http://schemas.microsoft.com/office/drawing/2014/main" id="{A0AACD00-ADAE-9FDE-77F7-AA4FDB75AC10}"/>
+              </a:ext>
+            </a:extLst>
+          </p:cNvPr>
+          <p:cNvSpPr/>
+          <p:nvPr/>
+        </p:nvSpPr>
+        <p:spPr>
+          <a:xfrm>
+            <a:off x="566927" y="2606040"/>
+            <a:ext cx="11057840" cy="1051560"/>
+          </a:xfrm>
+          <a:prstGeom prst="roundRect">
+            <a:avLst>
+              <a:gd name="adj" fmla="val 1838"/>
+            </a:avLst>
+          </a:prstGeom>
+          <a:solidFill>
+            <a:srgbClr val="0A1628"/>
+          </a:solidFill>
+          <a:ln>
+            <a:noFill/>
+          </a:ln>
+        </p:spPr>
+        <p:txBody>
+          <a:bodyPr/>
+          <a:lstStyle/>
+          <a:p>
+            <a:endParaRPr lang="en-US"/>
+          </a:p>
+        </p:txBody>
+      </p:sp>
+      <p:sp>
+        <p:nvSpPr>
+          <p:cNvPr id="16" name="Text 7">
+            <a:extLst>
+              <a:ext uri="{FF2B5EF4-FFF2-40B4-BE49-F238E27FC236}">
+                <a16:creationId xmlns:a16="http://schemas.microsoft.com/office/drawing/2014/main" id="{92091D59-A65C-7302-1B22-A8FA32AF57A5}"/>
+              </a:ext>
+            </a:extLst>
+          </p:cNvPr>
+          <p:cNvSpPr txBox="1"/>
+          <p:nvPr/>
+        </p:nvSpPr>
+        <p:spPr>
+          <a:xfrm>
+            <a:off x="841248" y="2697480"/>
+            <a:ext cx="10506456" cy="868680"/>
+          </a:xfrm>
+          <a:prstGeom prst="rect">
+            <a:avLst/>
+          </a:prstGeom>
+          <a:noFill/>
+          <a:ln/>
+        </p:spPr>
+        <p:txBody>
+          <a:bodyPr wrap="square" lIns="0" tIns="0" rIns="0" bIns="0" rtlCol="0" anchor="ctr"/>
+          <a:lstStyle/>
+          <a:p>
+            <a:r>
+              <a:rPr lang="en-US" sz="1050" b="1" kern="0" spc="220" dirty="0">
+                <a:solidFill>
+                  <a:srgbClr val="9EC7E3"/>
+                </a:solidFill>
+                <a:latin typeface="Calibri"/>
+              </a:rPr>
+              <a:t>TIP TERMINAL</a:t>
+            </a:r>
+          </a:p>
+          <a:p>
+            <a:pPr>
+              <a:spcBef>
+                <a:spcPts val="900"/>
+              </a:spcBef>
+            </a:pPr>
+            <a:r>
+              <a:rPr lang="en-US" sz="1400" dirty="0">
+                <a:solidFill>
+                  <a:srgbClr val="FFFFFF"/>
+                </a:solidFill>
+                <a:latin typeface="Courier New"/>
+                <a:cs typeface="Courier New"/>
+              </a:rPr>
+              <a:t>curl -fsSL https://raw.githubusercontent.com/mtcberlin/epo-tip4patlibs/main/install.sh | bash</a:t>
+            </a:r>
           </a:p>
         </p:txBody>
       </p:sp>
@@ -10164,7 +10874,29 @@
                 <a:ea typeface="Calibri" pitchFamily="34" charset="-122"/>
                 <a:cs typeface="Calibri" pitchFamily="34" charset="-120"/>
               </a:rPr>
-              <a:t>Nobody handed us a course.
+              <a:t>EPO handed us python and </a:t>
+            </a:r>
+            <a:r>
+              <a:rPr lang="en-US" sz="3200" dirty="0" err="1">
+                <a:solidFill>
+                  <a:srgbClr val="003366"/>
+                </a:solidFill>
+                <a:latin typeface="Calibri" pitchFamily="34" charset="0"/>
+                <a:ea typeface="Calibri" pitchFamily="34" charset="-122"/>
+                <a:cs typeface="Calibri" pitchFamily="34" charset="-120"/>
+              </a:rPr>
+              <a:t>sql</a:t>
+            </a:r>
+            <a:r>
+              <a:rPr lang="en-US" sz="3200" dirty="0">
+                <a:solidFill>
+                  <a:srgbClr val="003366"/>
+                </a:solidFill>
+                <a:latin typeface="Calibri" pitchFamily="34" charset="0"/>
+                <a:ea typeface="Calibri" pitchFamily="34" charset="-122"/>
+                <a:cs typeface="Calibri" pitchFamily="34" charset="-120"/>
+              </a:rPr>
+              <a:t> courses.
 </a:t>
             </a:r>
             <a:r>
@@ -10176,7 +10908,7 @@
                 <a:ea typeface="Calibri" pitchFamily="34" charset="-122"/>
                 <a:cs typeface="Calibri" pitchFamily="34" charset="-120"/>
               </a:rPr>
-              <a:t>We walked into TIP together.</a:t>
+              <a:t>Then we walked into TIP together.</a:t>
             </a:r>
             <a:endParaRPr lang="en-US" sz="3200" dirty="0"/>
           </a:p>
@@ -10530,7 +11262,7 @@
                 <a:ea typeface="Calibri" pitchFamily="34" charset="-122"/>
                 <a:cs typeface="Calibri" pitchFamily="34" charset="-120"/>
               </a:rPr>
-              <a:t>Six modules, one repository</a:t>
+              <a:t>Five modules, one repository</a:t>
             </a:r>
             <a:endParaRPr lang="en-US" sz="1500" dirty="0"/>
           </a:p>
@@ -10611,7 +11343,7 @@
                 <a:ea typeface="Calibri" pitchFamily="34" charset="-122"/>
                 <a:cs typeface="Calibri" pitchFamily="34" charset="-120"/>
               </a:rPr>
-              <a:t>TIP4PATLIBS  ·  3 / 19</a:t>
+              <a:t>TIP4PATLIBS  ·  3 / 20</a:t>
             </a:r>
             <a:endParaRPr lang="en-US" sz="900" dirty="0"/>
           </a:p>
@@ -11520,7 +12252,7 @@
                 <a:ea typeface="Calibri" pitchFamily="34" charset="-122"/>
                 <a:cs typeface="Calibri" pitchFamily="34" charset="-120"/>
               </a:rPr>
-              <a:t>TIP4PATLIBS  ·  4 / 19</a:t>
+              <a:t>TIP4PATLIBS  ·  5 / 20</a:t>
             </a:r>
             <a:endParaRPr lang="en-US" sz="900" dirty="0"/>
           </a:p>
@@ -12137,7 +12869,7 @@
                 <a:ea typeface="Calibri" pitchFamily="34" charset="-122"/>
                 <a:cs typeface="Calibri" pitchFamily="34" charset="-120"/>
               </a:rPr>
-              <a:t>TIP4PATLIBS  ·  5 / 19</a:t>
+              <a:t>TIP4PATLIBS  ·  6 / 20</a:t>
             </a:r>
             <a:endParaRPr lang="en-US" sz="900" dirty="0"/>
           </a:p>
@@ -13489,7 +14221,7 @@
                 <a:ea typeface="Calibri" pitchFamily="34" charset="-122"/>
                 <a:cs typeface="Calibri" pitchFamily="34" charset="-120"/>
               </a:rPr>
-              <a:t>TIP4PATLIBS  ·  6 / 19</a:t>
+              <a:t>TIP4PATLIBS  ·  7 / 20</a:t>
             </a:r>
             <a:endParaRPr lang="en-US" sz="900" dirty="0"/>
           </a:p>
@@ -14163,8 +14895,8 @@
         </p:nvSpPr>
         <p:spPr>
           <a:xfrm>
-            <a:off x="2350008" y="5303520"/>
-            <a:ext cx="8908999" cy="749808"/>
+            <a:off x="1988501" y="5303520"/>
+            <a:ext cx="9441499" cy="749808"/>
           </a:xfrm>
           <a:prstGeom prst="rect">
             <a:avLst/>
@@ -14230,7 +14962,7 @@
                 <a:ea typeface="Calibri" pitchFamily="34" charset="-122"/>
                 <a:cs typeface="Calibri" pitchFamily="34" charset="-120"/>
               </a:rPr>
-              <a:t>TIP4PATLIBS  ·  7 / 19</a:t>
+              <a:t>TIP4PATLIBS  ·  8 / 20</a:t>
             </a:r>
             <a:endParaRPr lang="en-US" sz="900" dirty="0"/>
           </a:p>
@@ -14810,7 +15542,7 @@
                 <a:ea typeface="Calibri" pitchFamily="34" charset="-122"/>
                 <a:cs typeface="Calibri" pitchFamily="34" charset="-120"/>
               </a:rPr>
-              <a:t>TIP4PATLIBS  ·  8 / 19</a:t>
+              <a:t>TIP4PATLIBS  ·  9 / 20</a:t>
             </a:r>
             <a:endParaRPr lang="en-US" sz="900" dirty="0"/>
           </a:p>
@@ -15551,7 +16283,7 @@
                 <a:ea typeface="Calibri" pitchFamily="34" charset="-122"/>
                 <a:cs typeface="Calibri" pitchFamily="34" charset="-120"/>
               </a:rPr>
-              <a:t>TIP4PATLIBS  ·  9 / 19</a:t>
+              <a:t>TIP4PATLIBS  ·  10 / 20</a:t>
             </a:r>
             <a:endParaRPr lang="en-US" sz="900" dirty="0"/>
           </a:p>

--- a/9_misc/handouts/source/TIP4PATLIBS_1_Workshop_v4.pptx
+++ b/9_misc/handouts/source/TIP4PATLIBS_1_Workshop_v4.pptx
@@ -5,29 +5,29 @@
     <p:sldMasterId id="2147483648" r:id="rId1"/>
   </p:sldMasterIdLst>
   <p:notesMasterIdLst>
-    <p:notesMasterId r:id="rId21"/>
+    <p:notesMasterId r:id="rId22"/>
   </p:notesMasterIdLst>
   <p:sldIdLst>
     <p:sldId id="256" r:id="rId2"/>
     <p:sldId id="257" r:id="rId3"/>
     <p:sldId id="258" r:id="rId4"/>
-    <p:sldId id="275" r:id="rId26"/>
-    <p:sldId id="259" r:id="rId5"/>
-    <p:sldId id="260" r:id="rId6"/>
-    <p:sldId id="261" r:id="rId7"/>
-    <p:sldId id="262" r:id="rId8"/>
-    <p:sldId id="263" r:id="rId9"/>
-    <p:sldId id="264" r:id="rId10"/>
-    <p:sldId id="265" r:id="rId11"/>
-    <p:sldId id="266" r:id="rId12"/>
-    <p:sldId id="267" r:id="rId13"/>
-    <p:sldId id="268" r:id="rId14"/>
-    <p:sldId id="269" r:id="rId15"/>
-    <p:sldId id="270" r:id="rId16"/>
-    <p:sldId id="271" r:id="rId17"/>
-    <p:sldId id="272" r:id="rId18"/>
-    <p:sldId id="273" r:id="rId19"/>
-    <p:sldId id="274" r:id="rId20"/>
+    <p:sldId id="275" r:id="rId5"/>
+    <p:sldId id="259" r:id="rId6"/>
+    <p:sldId id="260" r:id="rId7"/>
+    <p:sldId id="261" r:id="rId8"/>
+    <p:sldId id="262" r:id="rId9"/>
+    <p:sldId id="263" r:id="rId10"/>
+    <p:sldId id="264" r:id="rId11"/>
+    <p:sldId id="265" r:id="rId12"/>
+    <p:sldId id="266" r:id="rId13"/>
+    <p:sldId id="267" r:id="rId14"/>
+    <p:sldId id="268" r:id="rId15"/>
+    <p:sldId id="269" r:id="rId16"/>
+    <p:sldId id="270" r:id="rId17"/>
+    <p:sldId id="271" r:id="rId18"/>
+    <p:sldId id="272" r:id="rId19"/>
+    <p:sldId id="273" r:id="rId20"/>
+    <p:sldId id="274" r:id="rId21"/>
   </p:sldIdLst>
   <p:sldSz cx="12192000" cy="6858000"/>
   <p:notesSz cx="6858000" cy="12192000"/>
@@ -408,7 +408,7 @@
           <a:p>
             <a:fld id="{F7021451-1387-4CA6-816F-3879F97B5CBC}" type="slidenum">
               <a:rPr lang="en-US"/>
-              <a:t>10</a:t>
+              <a:t>11</a:t>
             </a:fld>
             <a:endParaRPr lang="en-US"/>
           </a:p>
@@ -495,7 +495,7 @@
           <a:p>
             <a:fld id="{F7021451-1387-4CA6-816F-3879F97B5CBC}" type="slidenum">
               <a:rPr lang="en-US"/>
-              <a:t>11</a:t>
+              <a:t>12</a:t>
             </a:fld>
             <a:endParaRPr lang="en-US"/>
           </a:p>
@@ -579,7 +579,7 @@
           <a:p>
             <a:fld id="{F7021451-1387-4CA6-816F-3879F97B5CBC}" type="slidenum">
               <a:rPr lang="en-US"/>
-              <a:t>12</a:t>
+              <a:t>13</a:t>
             </a:fld>
             <a:endParaRPr lang="en-US"/>
           </a:p>
@@ -666,7 +666,7 @@
           <a:p>
             <a:fld id="{F7021451-1387-4CA6-816F-3879F97B5CBC}" type="slidenum">
               <a:rPr lang="en-US"/>
-              <a:t>13</a:t>
+              <a:t>14</a:t>
             </a:fld>
             <a:endParaRPr lang="en-US"/>
           </a:p>
@@ -753,7 +753,7 @@
           <a:p>
             <a:fld id="{F7021451-1387-4CA6-816F-3879F97B5CBC}" type="slidenum">
               <a:rPr lang="en-US"/>
-              <a:t>14</a:t>
+              <a:t>15</a:t>
             </a:fld>
             <a:endParaRPr lang="en-US"/>
           </a:p>
@@ -840,7 +840,7 @@
           <a:p>
             <a:fld id="{F7021451-1387-4CA6-816F-3879F97B5CBC}" type="slidenum">
               <a:rPr lang="en-US"/>
-              <a:t>15</a:t>
+              <a:t>16</a:t>
             </a:fld>
             <a:endParaRPr lang="en-US"/>
           </a:p>
@@ -924,7 +924,7 @@
           <a:p>
             <a:fld id="{F7021451-1387-4CA6-816F-3879F97B5CBC}" type="slidenum">
               <a:rPr lang="en-US"/>
-              <a:t>16</a:t>
+              <a:t>17</a:t>
             </a:fld>
             <a:endParaRPr lang="en-US"/>
           </a:p>
@@ -1011,7 +1011,7 @@
           <a:p>
             <a:fld id="{F7021451-1387-4CA6-816F-3879F97B5CBC}" type="slidenum">
               <a:rPr lang="en-US"/>
-              <a:t>17</a:t>
+              <a:t>18</a:t>
             </a:fld>
             <a:endParaRPr lang="en-US"/>
           </a:p>
@@ -1095,7 +1095,7 @@
           <a:p>
             <a:fld id="{F7021451-1387-4CA6-816F-3879F97B5CBC}" type="slidenum">
               <a:rPr lang="en-US"/>
-              <a:t>18</a:t>
+              <a:t>19</a:t>
             </a:fld>
             <a:endParaRPr lang="en-US"/>
           </a:p>
@@ -1182,7 +1182,7 @@
           <a:p>
             <a:fld id="{F7021451-1387-4CA6-816F-3879F97B5CBC}" type="slidenum">
               <a:rPr lang="en-US"/>
-              <a:t>19</a:t>
+              <a:t>20</a:t>
             </a:fld>
             <a:endParaRPr lang="en-US"/>
           </a:p>
@@ -1443,7 +1443,7 @@
           <a:p>
             <a:fld id="{F7021451-1387-4CA6-816F-3879F97B5CBC}" type="slidenum">
               <a:rPr lang="en-US"/>
-              <a:t>4</a:t>
+              <a:t>5</a:t>
             </a:fld>
             <a:endParaRPr lang="en-US"/>
           </a:p>
@@ -1530,7 +1530,7 @@
           <a:p>
             <a:fld id="{F7021451-1387-4CA6-816F-3879F97B5CBC}" type="slidenum">
               <a:rPr lang="en-US"/>
-              <a:t>5</a:t>
+              <a:t>6</a:t>
             </a:fld>
             <a:endParaRPr lang="en-US"/>
           </a:p>
@@ -1617,7 +1617,7 @@
           <a:p>
             <a:fld id="{F7021451-1387-4CA6-816F-3879F97B5CBC}" type="slidenum">
               <a:rPr lang="en-US"/>
-              <a:t>6</a:t>
+              <a:t>7</a:t>
             </a:fld>
             <a:endParaRPr lang="en-US"/>
           </a:p>
@@ -1704,7 +1704,7 @@
           <a:p>
             <a:fld id="{F7021451-1387-4CA6-816F-3879F97B5CBC}" type="slidenum">
               <a:rPr lang="en-US"/>
-              <a:t>7</a:t>
+              <a:t>8</a:t>
             </a:fld>
             <a:endParaRPr lang="en-US"/>
           </a:p>
@@ -1791,7 +1791,7 @@
           <a:p>
             <a:fld id="{F7021451-1387-4CA6-816F-3879F97B5CBC}" type="slidenum">
               <a:rPr lang="en-US"/>
-              <a:t>8</a:t>
+              <a:t>9</a:t>
             </a:fld>
             <a:endParaRPr lang="en-US"/>
           </a:p>
@@ -1878,7 +1878,7 @@
           <a:p>
             <a:fld id="{F7021451-1387-4CA6-816F-3879F97B5CBC}" type="slidenum">
               <a:rPr lang="en-US"/>
-              <a:t>9</a:t>
+              <a:t>10</a:t>
             </a:fld>
             <a:endParaRPr lang="en-US"/>
           </a:p>
@@ -2629,6 +2629,747 @@
 
 <file path=ppt/slides/slide10.xml><?xml version="1.0" encoding="utf-8"?>
 <p:sld xmlns:a="http://schemas.openxmlformats.org/drawingml/2006/main" xmlns:r="http://schemas.openxmlformats.org/officeDocument/2006/relationships" xmlns:p="http://schemas.openxmlformats.org/presentationml/2006/main">
+  <p:cSld name="Slide 9">
+    <p:bg>
+      <p:bgPr>
+        <a:solidFill>
+          <a:srgbClr val="FFFFFF"/>
+        </a:solidFill>
+        <a:effectLst/>
+      </p:bgPr>
+    </p:bg>
+    <p:spTree>
+      <p:nvGrpSpPr>
+        <p:cNvPr id="1" name=""/>
+        <p:cNvGrpSpPr/>
+        <p:nvPr/>
+      </p:nvGrpSpPr>
+      <p:grpSpPr>
+        <a:xfrm>
+          <a:off x="0" y="0"/>
+          <a:ext cx="0" cy="0"/>
+          <a:chOff x="0" y="0"/>
+          <a:chExt cx="0" cy="0"/>
+        </a:xfrm>
+      </p:grpSpPr>
+      <p:sp>
+        <p:nvSpPr>
+          <p:cNvPr id="2" name="Text 0"/>
+          <p:cNvSpPr txBox="1"/>
+          <p:nvPr/>
+        </p:nvSpPr>
+        <p:spPr>
+          <a:xfrm>
+            <a:off x="566928" y="384048"/>
+            <a:ext cx="11057839" cy="256032"/>
+          </a:xfrm>
+          <a:prstGeom prst="rect">
+            <a:avLst/>
+          </a:prstGeom>
+          <a:noFill/>
+          <a:ln/>
+        </p:spPr>
+        <p:txBody>
+          <a:bodyPr wrap="square" lIns="0" tIns="0" rIns="0" bIns="0" rtlCol="0" anchor="ctr"/>
+          <a:lstStyle/>
+          <a:p>
+            <a:pPr marL="0" indent="0">
+              <a:buNone/>
+            </a:pPr>
+            <a:r>
+              <a:rPr lang="en-US" sz="1050" b="1" kern="0" spc="220" dirty="0">
+                <a:solidFill>
+                  <a:srgbClr val="C62828"/>
+                </a:solidFill>
+                <a:latin typeface="Calibri" pitchFamily="34" charset="0"/>
+                <a:ea typeface="Calibri" pitchFamily="34" charset="-122"/>
+                <a:cs typeface="Calibri" pitchFamily="34" charset="-120"/>
+              </a:rPr>
+              <a:t>ARNE  ·  THE CLAIM, THEN THE LADDER  ·  MODULE 1</a:t>
+            </a:r>
+            <a:endParaRPr lang="en-US" sz="1050" dirty="0"/>
+          </a:p>
+        </p:txBody>
+      </p:sp>
+      <p:sp>
+        <p:nvSpPr>
+          <p:cNvPr id="3" name="Shape 1"/>
+          <p:cNvSpPr/>
+          <p:nvPr/>
+        </p:nvSpPr>
+        <p:spPr>
+          <a:xfrm>
+            <a:off x="566928" y="777240"/>
+            <a:ext cx="566928" cy="566928"/>
+          </a:xfrm>
+          <a:prstGeom prst="ellipse">
+            <a:avLst/>
+          </a:prstGeom>
+          <a:solidFill>
+            <a:srgbClr val="003366"/>
+          </a:solidFill>
+          <a:ln w="12700">
+            <a:solidFill>
+              <a:srgbClr val="003366"/>
+            </a:solidFill>
+            <a:prstDash val="solid"/>
+          </a:ln>
+        </p:spPr>
+        <p:txBody>
+          <a:bodyPr/>
+          <a:lstStyle/>
+          <a:p>
+            <a:endParaRPr lang="en-US"/>
+          </a:p>
+        </p:txBody>
+      </p:sp>
+      <p:sp>
+        <p:nvSpPr>
+          <p:cNvPr id="4" name="Text 2"/>
+          <p:cNvSpPr txBox="1"/>
+          <p:nvPr/>
+        </p:nvSpPr>
+        <p:spPr>
+          <a:xfrm>
+            <a:off x="566928" y="777240"/>
+            <a:ext cx="566928" cy="566928"/>
+          </a:xfrm>
+          <a:prstGeom prst="rect">
+            <a:avLst/>
+          </a:prstGeom>
+          <a:noFill/>
+          <a:ln/>
+        </p:spPr>
+        <p:txBody>
+          <a:bodyPr wrap="square" lIns="0" tIns="0" rIns="0" bIns="0" rtlCol="0" anchor="ctr"/>
+          <a:lstStyle/>
+          <a:p>
+            <a:pPr marL="0" indent="0" algn="ctr">
+              <a:buNone/>
+            </a:pPr>
+            <a:r>
+              <a:rPr lang="en-US" sz="2000" b="1" dirty="0">
+                <a:solidFill>
+                  <a:srgbClr val="FFFFFF"/>
+                </a:solidFill>
+                <a:latin typeface="Calibri" pitchFamily="34" charset="0"/>
+                <a:ea typeface="Calibri" pitchFamily="34" charset="-122"/>
+                <a:cs typeface="Calibri" pitchFamily="34" charset="-120"/>
+              </a:rPr>
+              <a:t>1</a:t>
+            </a:r>
+            <a:endParaRPr lang="en-US" sz="2000" dirty="0"/>
+          </a:p>
+        </p:txBody>
+      </p:sp>
+      <p:sp>
+        <p:nvSpPr>
+          <p:cNvPr id="5" name="Text 3"/>
+          <p:cNvSpPr txBox="1"/>
+          <p:nvPr/>
+        </p:nvSpPr>
+        <p:spPr>
+          <a:xfrm>
+            <a:off x="1344168" y="768096"/>
+            <a:ext cx="7589520" cy="594360"/>
+          </a:xfrm>
+          <a:prstGeom prst="rect">
+            <a:avLst/>
+          </a:prstGeom>
+          <a:noFill/>
+          <a:ln/>
+        </p:spPr>
+        <p:txBody>
+          <a:bodyPr wrap="square" lIns="0" tIns="0" rIns="0" bIns="0" rtlCol="0" anchor="ctr"/>
+          <a:lstStyle/>
+          <a:p>
+            <a:pPr marL="0" indent="0">
+              <a:buNone/>
+            </a:pPr>
+            <a:r>
+              <a:rPr lang="en-US" sz="2800" b="1" dirty="0">
+                <a:solidFill>
+                  <a:srgbClr val="003366"/>
+                </a:solidFill>
+                <a:latin typeface="Calibri" pitchFamily="34" charset="0"/>
+                <a:ea typeface="Calibri" pitchFamily="34" charset="-122"/>
+                <a:cs typeface="Calibri" pitchFamily="34" charset="-120"/>
+              </a:rPr>
+              <a:t>The Query Library</a:t>
+            </a:r>
+            <a:endParaRPr lang="en-US" sz="2800" dirty="0"/>
+          </a:p>
+        </p:txBody>
+      </p:sp>
+      <p:sp>
+        <p:nvSpPr>
+          <p:cNvPr id="6" name="Text 4"/>
+          <p:cNvSpPr txBox="1"/>
+          <p:nvPr/>
+        </p:nvSpPr>
+        <p:spPr>
+          <a:xfrm>
+            <a:off x="8881567" y="841248"/>
+            <a:ext cx="2743200" cy="310896"/>
+          </a:xfrm>
+          <a:prstGeom prst="rect">
+            <a:avLst/>
+          </a:prstGeom>
+          <a:noFill/>
+          <a:ln/>
+        </p:spPr>
+        <p:txBody>
+          <a:bodyPr wrap="square" lIns="0" tIns="0" rIns="0" bIns="0" rtlCol="0" anchor="ctr"/>
+          <a:lstStyle/>
+          <a:p>
+            <a:pPr marL="0" indent="0" algn="r">
+              <a:buNone/>
+            </a:pPr>
+            <a:r>
+              <a:rPr lang="en-US" sz="1100" dirty="0">
+                <a:solidFill>
+                  <a:srgbClr val="6B7280"/>
+                </a:solidFill>
+                <a:latin typeface="Courier New" pitchFamily="34" charset="0"/>
+                <a:ea typeface="Courier New" pitchFamily="34" charset="-122"/>
+                <a:cs typeface="Courier New" pitchFamily="34" charset="-120"/>
+              </a:rPr>
+              <a:t>1_querylib/</a:t>
+            </a:r>
+            <a:endParaRPr lang="en-US" sz="1100" dirty="0"/>
+          </a:p>
+        </p:txBody>
+      </p:sp>
+      <p:sp>
+        <p:nvSpPr>
+          <p:cNvPr id="7" name="Shape 5"/>
+          <p:cNvSpPr/>
+          <p:nvPr/>
+        </p:nvSpPr>
+        <p:spPr>
+          <a:xfrm>
+            <a:off x="566928" y="1600200"/>
+            <a:ext cx="11057839" cy="1097280"/>
+          </a:xfrm>
+          <a:prstGeom prst="roundRect">
+            <a:avLst>
+              <a:gd name="adj" fmla="val 4167"/>
+            </a:avLst>
+          </a:prstGeom>
+          <a:solidFill>
+            <a:srgbClr val="003366"/>
+          </a:solidFill>
+          <a:ln w="12700">
+            <a:solidFill>
+              <a:srgbClr val="333333"/>
+            </a:solidFill>
+            <a:prstDash val="solid"/>
+          </a:ln>
+        </p:spPr>
+        <p:txBody>
+          <a:bodyPr/>
+          <a:lstStyle/>
+          <a:p>
+            <a:endParaRPr lang="en-US"/>
+          </a:p>
+        </p:txBody>
+      </p:sp>
+      <p:sp>
+        <p:nvSpPr>
+          <p:cNvPr id="8" name="Text 6"/>
+          <p:cNvSpPr txBox="1"/>
+          <p:nvPr/>
+        </p:nvSpPr>
+        <p:spPr>
+          <a:xfrm>
+            <a:off x="950976" y="1600200"/>
+            <a:ext cx="10289743" cy="1097280"/>
+          </a:xfrm>
+          <a:prstGeom prst="rect">
+            <a:avLst/>
+          </a:prstGeom>
+          <a:noFill/>
+          <a:ln/>
+        </p:spPr>
+        <p:txBody>
+          <a:bodyPr wrap="square" lIns="0" tIns="0" rIns="0" bIns="0" rtlCol="0" anchor="ctr"/>
+          <a:lstStyle/>
+          <a:p>
+            <a:pPr marL="0" indent="0">
+              <a:lnSpc>
+                <a:spcPts val="2400"/>
+              </a:lnSpc>
+              <a:buNone/>
+            </a:pPr>
+            <a:r>
+              <a:rPr lang="en-US" sz="1650" dirty="0">
+                <a:solidFill>
+                  <a:srgbClr val="FFFFFF"/>
+                </a:solidFill>
+                <a:latin typeface="Cambria" pitchFamily="34" charset="0"/>
+                <a:ea typeface="Cambria" pitchFamily="34" charset="-122"/>
+                <a:cs typeface="Cambria" pitchFamily="34" charset="-120"/>
+              </a:rPr>
+              <a:t>“A client walks in and asks: who in Europe is working on solid-state batteries?”</a:t>
+            </a:r>
+            <a:endParaRPr lang="en-US" sz="1650" dirty="0"/>
+          </a:p>
+        </p:txBody>
+      </p:sp>
+      <p:sp>
+        <p:nvSpPr>
+          <p:cNvPr id="9" name="Text 7"/>
+          <p:cNvSpPr txBox="1"/>
+          <p:nvPr/>
+        </p:nvSpPr>
+        <p:spPr>
+          <a:xfrm>
+            <a:off x="566928" y="2926080"/>
+            <a:ext cx="11057839" cy="274320"/>
+          </a:xfrm>
+          <a:prstGeom prst="rect">
+            <a:avLst/>
+          </a:prstGeom>
+          <a:noFill/>
+          <a:ln/>
+        </p:spPr>
+        <p:txBody>
+          <a:bodyPr wrap="square" lIns="0" tIns="0" rIns="0" bIns="0" rtlCol="0" anchor="ctr"/>
+          <a:lstStyle/>
+          <a:p>
+            <a:pPr marL="0" indent="0">
+              <a:buNone/>
+            </a:pPr>
+            <a:r>
+              <a:rPr lang="en-US" sz="1100" b="1" kern="0" spc="200" dirty="0">
+                <a:solidFill>
+                  <a:srgbClr val="C62828"/>
+                </a:solidFill>
+                <a:latin typeface="Calibri" pitchFamily="34" charset="0"/>
+                <a:ea typeface="Calibri" pitchFamily="34" charset="-122"/>
+                <a:cs typeface="Calibri" pitchFamily="34" charset="-120"/>
+              </a:rPr>
+              <a:t>WHY THE OBVIOUS ANSWER FAILS</a:t>
+            </a:r>
+            <a:endParaRPr lang="en-US" sz="1100" dirty="0"/>
+          </a:p>
+        </p:txBody>
+      </p:sp>
+      <p:sp>
+        <p:nvSpPr>
+          <p:cNvPr id="10" name="Shape 8"/>
+          <p:cNvSpPr/>
+          <p:nvPr/>
+        </p:nvSpPr>
+        <p:spPr>
+          <a:xfrm>
+            <a:off x="566928" y="3291840"/>
+            <a:ext cx="3472586" cy="1783080"/>
+          </a:xfrm>
+          <a:prstGeom prst="roundRect">
+            <a:avLst>
+              <a:gd name="adj" fmla="val 2564"/>
+            </a:avLst>
+          </a:prstGeom>
+          <a:solidFill>
+            <a:srgbClr val="EEF2F7"/>
+          </a:solidFill>
+          <a:ln w="12700">
+            <a:solidFill>
+              <a:srgbClr val="DCE3EB"/>
+            </a:solidFill>
+            <a:prstDash val="solid"/>
+          </a:ln>
+        </p:spPr>
+        <p:txBody>
+          <a:bodyPr/>
+          <a:lstStyle/>
+          <a:p>
+            <a:endParaRPr lang="en-US"/>
+          </a:p>
+        </p:txBody>
+      </p:sp>
+      <p:sp>
+        <p:nvSpPr>
+          <p:cNvPr id="11" name="Text 9"/>
+          <p:cNvSpPr txBox="1"/>
+          <p:nvPr/>
+        </p:nvSpPr>
+        <p:spPr>
+          <a:xfrm>
+            <a:off x="841248" y="3493008"/>
+            <a:ext cx="2923946" cy="1371600"/>
+          </a:xfrm>
+          <a:prstGeom prst="rect">
+            <a:avLst/>
+          </a:prstGeom>
+          <a:noFill/>
+          <a:ln/>
+        </p:spPr>
+        <p:txBody>
+          <a:bodyPr wrap="square" lIns="0" tIns="0" rIns="0" bIns="0" rtlCol="0" anchor="ctr"/>
+          <a:lstStyle/>
+          <a:p>
+            <a:pPr marL="0" indent="0">
+              <a:lnSpc>
+                <a:spcPts val="1900"/>
+              </a:lnSpc>
+              <a:buNone/>
+            </a:pPr>
+            <a:r>
+              <a:rPr lang="en-US" sz="1300" dirty="0">
+                <a:solidFill>
+                  <a:srgbClr val="3D4451"/>
+                </a:solidFill>
+                <a:latin typeface="Calibri" pitchFamily="34" charset="0"/>
+                <a:ea typeface="Calibri" pitchFamily="34" charset="-122"/>
+                <a:cs typeface="Calibri" pitchFamily="34" charset="-120"/>
+              </a:rPr>
+              <a:t>The first answer was always a keyword search. It is not wrong — it is simply the weakest instrument you have.</a:t>
+            </a:r>
+            <a:endParaRPr lang="en-US" sz="1300" dirty="0"/>
+          </a:p>
+        </p:txBody>
+      </p:sp>
+      <p:sp>
+        <p:nvSpPr>
+          <p:cNvPr id="12" name="Shape 10"/>
+          <p:cNvSpPr/>
+          <p:nvPr/>
+        </p:nvSpPr>
+        <p:spPr>
+          <a:xfrm>
+            <a:off x="4359554" y="3291840"/>
+            <a:ext cx="3472586" cy="1783080"/>
+          </a:xfrm>
+          <a:prstGeom prst="roundRect">
+            <a:avLst>
+              <a:gd name="adj" fmla="val 2564"/>
+            </a:avLst>
+          </a:prstGeom>
+          <a:solidFill>
+            <a:srgbClr val="EEF2F7"/>
+          </a:solidFill>
+          <a:ln w="12700">
+            <a:solidFill>
+              <a:srgbClr val="DCE3EB"/>
+            </a:solidFill>
+            <a:prstDash val="solid"/>
+          </a:ln>
+        </p:spPr>
+        <p:txBody>
+          <a:bodyPr/>
+          <a:lstStyle/>
+          <a:p>
+            <a:endParaRPr lang="en-US"/>
+          </a:p>
+        </p:txBody>
+      </p:sp>
+      <p:sp>
+        <p:nvSpPr>
+          <p:cNvPr id="13" name="Text 11"/>
+          <p:cNvSpPr txBox="1"/>
+          <p:nvPr/>
+        </p:nvSpPr>
+        <p:spPr>
+          <a:xfrm>
+            <a:off x="4633874" y="3493008"/>
+            <a:ext cx="2923946" cy="1371600"/>
+          </a:xfrm>
+          <a:prstGeom prst="rect">
+            <a:avLst/>
+          </a:prstGeom>
+          <a:noFill/>
+          <a:ln/>
+        </p:spPr>
+        <p:txBody>
+          <a:bodyPr wrap="square" lIns="0" tIns="0" rIns="0" bIns="0" rtlCol="0" anchor="ctr"/>
+          <a:lstStyle/>
+          <a:p>
+            <a:pPr marL="0" indent="0">
+              <a:lnSpc>
+                <a:spcPts val="1900"/>
+              </a:lnSpc>
+              <a:buNone/>
+            </a:pPr>
+            <a:r>
+              <a:rPr lang="en-US" sz="1300" dirty="0">
+                <a:solidFill>
+                  <a:srgbClr val="3D4451"/>
+                </a:solidFill>
+                <a:latin typeface="Calibri" pitchFamily="34" charset="0"/>
+                <a:ea typeface="Calibri" pitchFamily="34" charset="-122"/>
+                <a:cs typeface="Calibri" pitchFamily="34" charset="-120"/>
+              </a:rPr>
+              <a:t>Keywords miss everything phrased differently, and catch everything that merely mentions the term in passing.</a:t>
+            </a:r>
+            <a:endParaRPr lang="en-US" sz="1300" dirty="0"/>
+          </a:p>
+        </p:txBody>
+      </p:sp>
+      <p:sp>
+        <p:nvSpPr>
+          <p:cNvPr id="14" name="Shape 12"/>
+          <p:cNvSpPr/>
+          <p:nvPr/>
+        </p:nvSpPr>
+        <p:spPr>
+          <a:xfrm>
+            <a:off x="8152181" y="3291840"/>
+            <a:ext cx="3472586" cy="1783080"/>
+          </a:xfrm>
+          <a:prstGeom prst="roundRect">
+            <a:avLst>
+              <a:gd name="adj" fmla="val 2564"/>
+            </a:avLst>
+          </a:prstGeom>
+          <a:solidFill>
+            <a:srgbClr val="EEF2F7"/>
+          </a:solidFill>
+          <a:ln w="12700">
+            <a:solidFill>
+              <a:srgbClr val="DCE3EB"/>
+            </a:solidFill>
+            <a:prstDash val="solid"/>
+          </a:ln>
+        </p:spPr>
+        <p:txBody>
+          <a:bodyPr/>
+          <a:lstStyle/>
+          <a:p>
+            <a:endParaRPr lang="en-US"/>
+          </a:p>
+        </p:txBody>
+      </p:sp>
+      <p:sp>
+        <p:nvSpPr>
+          <p:cNvPr id="15" name="Text 13"/>
+          <p:cNvSpPr txBox="1"/>
+          <p:nvPr/>
+        </p:nvSpPr>
+        <p:spPr>
+          <a:xfrm>
+            <a:off x="8426501" y="3493008"/>
+            <a:ext cx="2923946" cy="1371600"/>
+          </a:xfrm>
+          <a:prstGeom prst="rect">
+            <a:avLst/>
+          </a:prstGeom>
+          <a:noFill/>
+          <a:ln/>
+        </p:spPr>
+        <p:txBody>
+          <a:bodyPr wrap="square" lIns="0" tIns="0" rIns="0" bIns="0" rtlCol="0" anchor="ctr"/>
+          <a:lstStyle/>
+          <a:p>
+            <a:pPr marL="0" indent="0">
+              <a:lnSpc>
+                <a:spcPts val="1900"/>
+              </a:lnSpc>
+              <a:buNone/>
+            </a:pPr>
+            <a:r>
+              <a:rPr lang="en-US" sz="1300" dirty="0">
+                <a:solidFill>
+                  <a:srgbClr val="3D4451"/>
+                </a:solidFill>
+                <a:latin typeface="Calibri" pitchFamily="34" charset="0"/>
+                <a:ea typeface="Calibri" pitchFamily="34" charset="-122"/>
+                <a:cs typeface="Calibri" pitchFamily="34" charset="-120"/>
+              </a:rPr>
+              <a:t>Neither problem is visible in the result. You get a list, and no way to show that it is complete.</a:t>
+            </a:r>
+            <a:endParaRPr lang="en-US" sz="1300" dirty="0"/>
+          </a:p>
+        </p:txBody>
+      </p:sp>
+      <p:sp>
+        <p:nvSpPr>
+          <p:cNvPr id="16" name="Shape 14"/>
+          <p:cNvSpPr/>
+          <p:nvPr/>
+        </p:nvSpPr>
+        <p:spPr>
+          <a:xfrm>
+            <a:off x="566928" y="5303520"/>
+            <a:ext cx="11057839" cy="749808"/>
+          </a:xfrm>
+          <a:prstGeom prst="roundRect">
+            <a:avLst>
+              <a:gd name="adj" fmla="val 6098"/>
+            </a:avLst>
+          </a:prstGeom>
+          <a:solidFill>
+            <a:srgbClr val="FFFFFF"/>
+          </a:solidFill>
+          <a:ln w="15875">
+            <a:solidFill>
+              <a:srgbClr val="C62828"/>
+            </a:solidFill>
+            <a:prstDash val="solid"/>
+          </a:ln>
+        </p:spPr>
+        <p:txBody>
+          <a:bodyPr/>
+          <a:lstStyle/>
+          <a:p>
+            <a:endParaRPr lang="en-US"/>
+          </a:p>
+        </p:txBody>
+      </p:sp>
+      <p:sp>
+        <p:nvSpPr>
+          <p:cNvPr id="17" name="Text 15"/>
+          <p:cNvSpPr txBox="1"/>
+          <p:nvPr/>
+        </p:nvSpPr>
+        <p:spPr>
+          <a:xfrm>
+            <a:off x="914400" y="5303520"/>
+            <a:ext cx="1234440" cy="749808"/>
+          </a:xfrm>
+          <a:prstGeom prst="rect">
+            <a:avLst/>
+          </a:prstGeom>
+          <a:noFill/>
+          <a:ln/>
+        </p:spPr>
+        <p:txBody>
+          <a:bodyPr wrap="square" lIns="0" tIns="0" rIns="0" bIns="0" rtlCol="0" anchor="ctr"/>
+          <a:lstStyle/>
+          <a:p>
+            <a:pPr marL="0" indent="0">
+              <a:lnSpc>
+                <a:spcPts val="1400"/>
+              </a:lnSpc>
+              <a:buNone/>
+            </a:pPr>
+            <a:r>
+              <a:rPr lang="en-US" sz="1050" b="1" kern="0" spc="160" dirty="0">
+                <a:solidFill>
+                  <a:srgbClr val="C62828"/>
+                </a:solidFill>
+                <a:latin typeface="Calibri" pitchFamily="34" charset="0"/>
+                <a:ea typeface="Calibri" pitchFamily="34" charset="-122"/>
+                <a:cs typeface="Calibri" pitchFamily="34" charset="-120"/>
+              </a:rPr>
+              <a:t>LIVE IN TIP</a:t>
+            </a:r>
+            <a:endParaRPr lang="en-US" sz="1050" dirty="0"/>
+          </a:p>
+          <a:p>
+            <a:pPr marL="0" indent="0">
+              <a:lnSpc>
+                <a:spcPts val="1400"/>
+              </a:lnSpc>
+              <a:buNone/>
+            </a:pPr>
+            <a:r>
+              <a:rPr lang="en-US" sz="1050" b="1" kern="0" spc="160" dirty="0">
+                <a:solidFill>
+                  <a:srgbClr val="C62828"/>
+                </a:solidFill>
+                <a:latin typeface="Calibri" pitchFamily="34" charset="0"/>
+                <a:ea typeface="Calibri" pitchFamily="34" charset="-122"/>
+                <a:cs typeface="Calibri" pitchFamily="34" charset="-120"/>
+              </a:rPr>
+              <a:t>NEXT</a:t>
+            </a:r>
+            <a:endParaRPr lang="en-US" sz="1050" dirty="0"/>
+          </a:p>
+        </p:txBody>
+      </p:sp>
+      <p:sp>
+        <p:nvSpPr>
+          <p:cNvPr id="18" name="Text 16"/>
+          <p:cNvSpPr txBox="1"/>
+          <p:nvPr/>
+        </p:nvSpPr>
+        <p:spPr>
+          <a:xfrm>
+            <a:off x="2350008" y="5303520"/>
+            <a:ext cx="8908999" cy="749808"/>
+          </a:xfrm>
+          <a:prstGeom prst="rect">
+            <a:avLst/>
+          </a:prstGeom>
+          <a:noFill/>
+          <a:ln/>
+        </p:spPr>
+        <p:txBody>
+          <a:bodyPr wrap="square" lIns="0" tIns="0" rIns="0" bIns="0" rtlCol="0" anchor="ctr"/>
+          <a:lstStyle/>
+          <a:p>
+            <a:pPr marL="0" indent="0">
+              <a:lnSpc>
+                <a:spcPts val="1900"/>
+              </a:lnSpc>
+              <a:buNone/>
+            </a:pPr>
+            <a:r>
+              <a:rPr lang="en-US" sz="1300" dirty="0">
+                <a:solidFill>
+                  <a:srgbClr val="3D4451"/>
+                </a:solidFill>
+                <a:latin typeface="Calibri" pitchFamily="34" charset="0"/>
+                <a:ea typeface="Calibri" pitchFamily="34" charset="-122"/>
+                <a:cs typeface="Calibri" pitchFamily="34" charset="-120"/>
+              </a:rPr>
+              <a:t>One query from the library run against PATSTAT Global, then the same query with a single parameter changed.</a:t>
+            </a:r>
+            <a:endParaRPr lang="en-US" sz="1300" dirty="0"/>
+          </a:p>
+        </p:txBody>
+      </p:sp>
+      <p:sp>
+        <p:nvSpPr>
+          <p:cNvPr id="20" name="Text 17"/>
+          <p:cNvSpPr txBox="1"/>
+          <p:nvPr/>
+        </p:nvSpPr>
+        <p:spPr>
+          <a:xfrm>
+            <a:off x="566928" y="6382512"/>
+            <a:ext cx="5486400" cy="274320"/>
+          </a:xfrm>
+          <a:prstGeom prst="rect">
+            <a:avLst/>
+          </a:prstGeom>
+          <a:noFill/>
+          <a:ln/>
+        </p:spPr>
+        <p:txBody>
+          <a:bodyPr wrap="square" lIns="0" tIns="0" rIns="0" bIns="0" rtlCol="0" anchor="ctr"/>
+          <a:lstStyle/>
+          <a:p>
+            <a:pPr marL="0" indent="0">
+              <a:buNone/>
+            </a:pPr>
+            <a:r>
+              <a:rPr lang="en-US" sz="900" kern="0" spc="100" dirty="0">
+                <a:solidFill>
+                  <a:srgbClr val="6B7280"/>
+                </a:solidFill>
+                <a:latin typeface="Calibri" pitchFamily="34" charset="0"/>
+                <a:ea typeface="Calibri" pitchFamily="34" charset="-122"/>
+                <a:cs typeface="Calibri" pitchFamily="34" charset="-120"/>
+              </a:rPr>
+              <a:t>TIP4PATLIBS  ·  10 / 20</a:t>
+            </a:r>
+            <a:endParaRPr lang="en-US" sz="900" dirty="0"/>
+          </a:p>
+        </p:txBody>
+      </p:sp>
+    </p:spTree>
+  </p:cSld>
+  <p:clrMapOvr>
+    <a:masterClrMapping/>
+  </p:clrMapOvr>
+</p:sld>
+</file>
+
+<file path=ppt/slides/slide11.xml><?xml version="1.0" encoding="utf-8"?>
+<p:sld xmlns:a="http://schemas.openxmlformats.org/drawingml/2006/main" xmlns:r="http://schemas.openxmlformats.org/officeDocument/2006/relationships" xmlns:p="http://schemas.openxmlformats.org/presentationml/2006/main">
   <p:cSld name="Slide 10">
     <p:bg>
       <p:bgPr>
@@ -3185,7 +3926,7 @@
 </p:sld>
 </file>
 
-<file path=ppt/slides/slide11.xml><?xml version="1.0" encoding="utf-8"?>
+<file path=ppt/slides/slide12.xml><?xml version="1.0" encoding="utf-8"?>
 <p:sld xmlns:a="http://schemas.openxmlformats.org/drawingml/2006/main" xmlns:r="http://schemas.openxmlformats.org/officeDocument/2006/relationships" xmlns:p="http://schemas.openxmlformats.org/presentationml/2006/main">
   <p:cSld name="Slide 11">
     <p:bg>
@@ -3926,7 +4667,7 @@
 </p:sld>
 </file>
 
-<file path=ppt/slides/slide12.xml><?xml version="1.0" encoding="utf-8"?>
+<file path=ppt/slides/slide13.xml><?xml version="1.0" encoding="utf-8"?>
 <p:sld xmlns:a="http://schemas.openxmlformats.org/drawingml/2006/main" xmlns:r="http://schemas.openxmlformats.org/officeDocument/2006/relationships" xmlns:p="http://schemas.openxmlformats.org/presentationml/2006/main">
   <p:cSld name="Slide 12">
     <p:bg>
@@ -4484,7 +5225,7 @@
 </p:sld>
 </file>
 
-<file path=ppt/slides/slide13.xml><?xml version="1.0" encoding="utf-8"?>
+<file path=ppt/slides/slide14.xml><?xml version="1.0" encoding="utf-8"?>
 <p:sld xmlns:a="http://schemas.openxmlformats.org/drawingml/2006/main" xmlns:r="http://schemas.openxmlformats.org/officeDocument/2006/relationships" xmlns:p="http://schemas.openxmlformats.org/presentationml/2006/main">
   <p:cSld name="Slide 13">
     <p:bg>
@@ -5225,7 +5966,7 @@
 </p:sld>
 </file>
 
-<file path=ppt/slides/slide14.xml><?xml version="1.0" encoding="utf-8"?>
+<file path=ppt/slides/slide15.xml><?xml version="1.0" encoding="utf-8"?>
 <p:sld xmlns:a="http://schemas.openxmlformats.org/drawingml/2006/main" xmlns:r="http://schemas.openxmlformats.org/officeDocument/2006/relationships" xmlns:p="http://schemas.openxmlformats.org/presentationml/2006/main">
   <p:cSld name="Slide 14">
     <p:bg>
@@ -5783,7 +6524,7 @@
 </p:sld>
 </file>
 
-<file path=ppt/slides/slide15.xml><?xml version="1.0" encoding="utf-8"?>
+<file path=ppt/slides/slide16.xml><?xml version="1.0" encoding="utf-8"?>
 <p:sld xmlns:a="http://schemas.openxmlformats.org/drawingml/2006/main" xmlns:r="http://schemas.openxmlformats.org/officeDocument/2006/relationships" xmlns:p="http://schemas.openxmlformats.org/presentationml/2006/main">
   <p:cSld name="Slide 15">
     <p:bg>
@@ -6563,7 +7304,7 @@
 </p:sld>
 </file>
 
-<file path=ppt/slides/slide16.xml><?xml version="1.0" encoding="utf-8"?>
+<file path=ppt/slides/slide17.xml><?xml version="1.0" encoding="utf-8"?>
 <p:sld xmlns:a="http://schemas.openxmlformats.org/drawingml/2006/main" xmlns:r="http://schemas.openxmlformats.org/officeDocument/2006/relationships" xmlns:p="http://schemas.openxmlformats.org/presentationml/2006/main">
   <p:cSld name="Slide 16">
     <p:bg>
@@ -7121,7 +7862,7 @@
 </p:sld>
 </file>
 
-<file path=ppt/slides/slide17.xml><?xml version="1.0" encoding="utf-8"?>
+<file path=ppt/slides/slide18.xml><?xml version="1.0" encoding="utf-8"?>
 <p:sld xmlns:a="http://schemas.openxmlformats.org/drawingml/2006/main" xmlns:r="http://schemas.openxmlformats.org/officeDocument/2006/relationships" xmlns:p="http://schemas.openxmlformats.org/presentationml/2006/main">
   <p:cSld name="Slide 17">
     <p:bg>
@@ -7901,7 +8642,7 @@
 </p:sld>
 </file>
 
-<file path=ppt/slides/slide18.xml><?xml version="1.0" encoding="utf-8"?>
+<file path=ppt/slides/slide19.xml><?xml version="1.0" encoding="utf-8"?>
 <p:sld xmlns:a="http://schemas.openxmlformats.org/drawingml/2006/main" xmlns:r="http://schemas.openxmlformats.org/officeDocument/2006/relationships" xmlns:p="http://schemas.openxmlformats.org/presentationml/2006/main">
   <p:cSld name="Slide 18">
     <p:bg>
@@ -8448,993 +9189,6 @@
               <a:t>TIP4PATLIBS  ·  19 / 20</a:t>
             </a:r>
             <a:endParaRPr lang="en-US" sz="900" dirty="0"/>
-          </a:p>
-        </p:txBody>
-      </p:sp>
-    </p:spTree>
-  </p:cSld>
-  <p:clrMapOvr>
-    <a:masterClrMapping/>
-  </p:clrMapOvr>
-</p:sld>
-</file>
-
-<file path=ppt/slides/slide19.xml><?xml version="1.0" encoding="utf-8"?>
-<p:sld xmlns:a="http://schemas.openxmlformats.org/drawingml/2006/main" xmlns:r="http://schemas.openxmlformats.org/officeDocument/2006/relationships" xmlns:p="http://schemas.openxmlformats.org/presentationml/2006/main">
-  <p:cSld name="Slide 19">
-    <p:bg>
-      <p:bgPr>
-        <a:solidFill>
-          <a:srgbClr val="0A1628"/>
-        </a:solidFill>
-        <a:effectLst/>
-      </p:bgPr>
-    </p:bg>
-    <p:spTree>
-      <p:nvGrpSpPr>
-        <p:cNvPr id="1" name=""/>
-        <p:cNvGrpSpPr/>
-        <p:nvPr/>
-      </p:nvGrpSpPr>
-      <p:grpSpPr>
-        <a:xfrm>
-          <a:off x="0" y="0"/>
-          <a:ext cx="0" cy="0"/>
-          <a:chOff x="0" y="0"/>
-          <a:chExt cx="0" cy="0"/>
-        </a:xfrm>
-      </p:grpSpPr>
-      <p:sp>
-        <p:nvSpPr>
-          <p:cNvPr id="2" name="Shape 0"/>
-          <p:cNvSpPr/>
-          <p:nvPr/>
-        </p:nvSpPr>
-        <p:spPr>
-          <a:xfrm>
-            <a:off x="0" y="0"/>
-            <a:ext cx="12191695" cy="6858000"/>
-          </a:xfrm>
-          <a:prstGeom prst="rect">
-            <a:avLst/>
-          </a:prstGeom>
-          <a:solidFill>
-            <a:srgbClr val="003366">
-              <a:alpha val="70000"/>
-            </a:srgbClr>
-          </a:solidFill>
-          <a:ln w="12700">
-            <a:solidFill>
-              <a:srgbClr val="333333"/>
-            </a:solidFill>
-            <a:prstDash val="solid"/>
-          </a:ln>
-        </p:spPr>
-        <p:txBody>
-          <a:bodyPr/>
-          <a:lstStyle/>
-          <a:p>
-            <a:endParaRPr lang="en-US"/>
-          </a:p>
-        </p:txBody>
-      </p:sp>
-      <p:sp>
-        <p:nvSpPr>
-          <p:cNvPr id="3" name="Text 1"/>
-          <p:cNvSpPr txBox="1"/>
-          <p:nvPr/>
-        </p:nvSpPr>
-        <p:spPr>
-          <a:xfrm>
-            <a:off x="566928" y="384048"/>
-            <a:ext cx="11057839" cy="256032"/>
-          </a:xfrm>
-          <a:prstGeom prst="rect">
-            <a:avLst/>
-          </a:prstGeom>
-          <a:noFill/>
-          <a:ln/>
-        </p:spPr>
-        <p:txBody>
-          <a:bodyPr wrap="square" lIns="0" tIns="0" rIns="0" bIns="0" rtlCol="0" anchor="ctr"/>
-          <a:lstStyle/>
-          <a:p>
-            <a:pPr marL="0" indent="0">
-              <a:buNone/>
-            </a:pPr>
-            <a:r>
-              <a:rPr lang="en-US" sz="1050" b="1" kern="0" spc="220" dirty="0">
-                <a:solidFill>
-                  <a:srgbClr val="9EC7E3"/>
-                </a:solidFill>
-                <a:latin typeface="Calibri" pitchFamily="34" charset="0"/>
-                <a:ea typeface="Calibri" pitchFamily="34" charset="-122"/>
-                <a:cs typeface="Calibri" pitchFamily="34" charset="-120"/>
-              </a:rPr>
-              <a:t>WHAT YOU LEAVE WITH</a:t>
-            </a:r>
-            <a:endParaRPr lang="en-US" sz="1050" dirty="0"/>
-          </a:p>
-        </p:txBody>
-      </p:sp>
-      <p:sp>
-        <p:nvSpPr>
-          <p:cNvPr id="4" name="Text 2"/>
-          <p:cNvSpPr txBox="1"/>
-          <p:nvPr/>
-        </p:nvSpPr>
-        <p:spPr>
-          <a:xfrm>
-            <a:off x="566928" y="804672"/>
-            <a:ext cx="11057839" cy="640080"/>
-          </a:xfrm>
-          <a:prstGeom prst="rect">
-            <a:avLst/>
-          </a:prstGeom>
-          <a:noFill/>
-          <a:ln/>
-        </p:spPr>
-        <p:txBody>
-          <a:bodyPr wrap="square" lIns="0" tIns="0" rIns="0" bIns="0" rtlCol="0" anchor="ctr"/>
-          <a:lstStyle/>
-          <a:p>
-            <a:pPr marL="0" indent="0">
-              <a:buNone/>
-            </a:pPr>
-            <a:r>
-              <a:rPr lang="en-US" sz="3600" b="1" dirty="0">
-                <a:solidFill>
-                  <a:srgbClr val="FFFFFF"/>
-                </a:solidFill>
-                <a:latin typeface="Calibri" pitchFamily="34" charset="0"/>
-                <a:ea typeface="Calibri" pitchFamily="34" charset="-122"/>
-                <a:cs typeface="Calibri" pitchFamily="34" charset="-120"/>
-              </a:rPr>
-              <a:t>The demo is the repository.</a:t>
-            </a:r>
-            <a:endParaRPr lang="en-US" sz="3600" dirty="0"/>
-          </a:p>
-        </p:txBody>
-      </p:sp>
-      <p:sp>
-        <p:nvSpPr>
-          <p:cNvPr id="5" name="Shape 3"/>
-          <p:cNvSpPr/>
-          <p:nvPr/>
-        </p:nvSpPr>
-        <p:spPr>
-          <a:xfrm>
-            <a:off x="566928" y="1691640"/>
-            <a:ext cx="384048" cy="384048"/>
-          </a:xfrm>
-          <a:prstGeom prst="ellipse">
-            <a:avLst/>
-          </a:prstGeom>
-          <a:solidFill>
-            <a:srgbClr val="C62828"/>
-          </a:solidFill>
-          <a:ln w="12700">
-            <a:solidFill>
-              <a:srgbClr val="C62828"/>
-            </a:solidFill>
-            <a:prstDash val="solid"/>
-          </a:ln>
-        </p:spPr>
-        <p:txBody>
-          <a:bodyPr/>
-          <a:lstStyle/>
-          <a:p>
-            <a:endParaRPr lang="en-US"/>
-          </a:p>
-        </p:txBody>
-      </p:sp>
-      <p:sp>
-        <p:nvSpPr>
-          <p:cNvPr id="6" name="Text 4"/>
-          <p:cNvSpPr txBox="1"/>
-          <p:nvPr/>
-        </p:nvSpPr>
-        <p:spPr>
-          <a:xfrm>
-            <a:off x="566928" y="1691640"/>
-            <a:ext cx="384048" cy="384048"/>
-          </a:xfrm>
-          <a:prstGeom prst="rect">
-            <a:avLst/>
-          </a:prstGeom>
-          <a:noFill/>
-          <a:ln/>
-        </p:spPr>
-        <p:txBody>
-          <a:bodyPr wrap="square" lIns="0" tIns="0" rIns="0" bIns="0" rtlCol="0" anchor="ctr"/>
-          <a:lstStyle/>
-          <a:p>
-            <a:pPr marL="0" indent="0" algn="ctr">
-              <a:buNone/>
-            </a:pPr>
-            <a:r>
-              <a:rPr lang="en-US" sz="1300" b="1" dirty="0">
-                <a:solidFill>
-                  <a:srgbClr val="FFFFFF"/>
-                </a:solidFill>
-                <a:latin typeface="Calibri" pitchFamily="34" charset="0"/>
-                <a:ea typeface="Calibri" pitchFamily="34" charset="-122"/>
-                <a:cs typeface="Calibri" pitchFamily="34" charset="-120"/>
-              </a:rPr>
-              <a:t>1</a:t>
-            </a:r>
-            <a:endParaRPr lang="en-US" sz="1300" dirty="0"/>
-          </a:p>
-        </p:txBody>
-      </p:sp>
-      <p:sp>
-        <p:nvSpPr>
-          <p:cNvPr id="7" name="Text 5"/>
-          <p:cNvSpPr txBox="1"/>
-          <p:nvPr/>
-        </p:nvSpPr>
-        <p:spPr>
-          <a:xfrm>
-            <a:off x="1188720" y="1636776"/>
-            <a:ext cx="8055864" cy="292608"/>
-          </a:xfrm>
-          <a:prstGeom prst="rect">
-            <a:avLst/>
-          </a:prstGeom>
-          <a:noFill/>
-          <a:ln/>
-        </p:spPr>
-        <p:txBody>
-          <a:bodyPr wrap="square" lIns="0" tIns="0" rIns="0" bIns="0" rtlCol="0" anchor="ctr"/>
-          <a:lstStyle/>
-          <a:p>
-            <a:pPr marL="0" indent="0">
-              <a:buNone/>
-            </a:pPr>
-            <a:r>
-              <a:rPr lang="en-US" sz="1550" b="1" dirty="0">
-                <a:solidFill>
-                  <a:srgbClr val="FFFFFF"/>
-                </a:solidFill>
-                <a:latin typeface="Calibri" pitchFamily="34" charset="0"/>
-                <a:ea typeface="Calibri" pitchFamily="34" charset="-122"/>
-                <a:cs typeface="Calibri" pitchFamily="34" charset="-120"/>
-              </a:rPr>
-              <a:t>A working environment on TIP that survives the restart</a:t>
-            </a:r>
-            <a:endParaRPr lang="en-US" sz="1550" dirty="0"/>
-          </a:p>
-        </p:txBody>
-      </p:sp>
-      <p:sp>
-        <p:nvSpPr>
-          <p:cNvPr id="8" name="Text 6"/>
-          <p:cNvSpPr txBox="1"/>
-          <p:nvPr/>
-        </p:nvSpPr>
-        <p:spPr>
-          <a:xfrm>
-            <a:off x="1188720" y="1947672"/>
-            <a:ext cx="8055864" cy="292608"/>
-          </a:xfrm>
-          <a:prstGeom prst="rect">
-            <a:avLst/>
-          </a:prstGeom>
-          <a:noFill/>
-          <a:ln/>
-        </p:spPr>
-        <p:txBody>
-          <a:bodyPr wrap="square" lIns="0" tIns="0" rIns="0" bIns="0" rtlCol="0" anchor="ctr"/>
-          <a:lstStyle/>
-          <a:p>
-            <a:pPr marL="0" indent="0">
-              <a:buNone/>
-            </a:pPr>
-            <a:r>
-              <a:rPr lang="en-US" sz="1300" dirty="0">
-                <a:solidFill>
-                  <a:srgbClr val="9EC7E3"/>
-                </a:solidFill>
-                <a:latin typeface="Calibri" pitchFamily="34" charset="0"/>
-                <a:ea typeface="Calibri" pitchFamily="34" charset="-122"/>
-                <a:cs typeface="Calibri" pitchFamily="34" charset="-120"/>
-              </a:rPr>
-              <a:t>free, hosted, with current PATSTAT behind it</a:t>
-            </a:r>
-            <a:endParaRPr lang="en-US" sz="1300" dirty="0"/>
-          </a:p>
-        </p:txBody>
-      </p:sp>
-      <p:sp>
-        <p:nvSpPr>
-          <p:cNvPr id="9" name="Shape 7"/>
-          <p:cNvSpPr/>
-          <p:nvPr/>
-        </p:nvSpPr>
-        <p:spPr>
-          <a:xfrm>
-            <a:off x="566928" y="2532888"/>
-            <a:ext cx="384048" cy="384048"/>
-          </a:xfrm>
-          <a:prstGeom prst="ellipse">
-            <a:avLst/>
-          </a:prstGeom>
-          <a:solidFill>
-            <a:srgbClr val="C62828"/>
-          </a:solidFill>
-          <a:ln w="12700">
-            <a:solidFill>
-              <a:srgbClr val="C62828"/>
-            </a:solidFill>
-            <a:prstDash val="solid"/>
-          </a:ln>
-        </p:spPr>
-        <p:txBody>
-          <a:bodyPr/>
-          <a:lstStyle/>
-          <a:p>
-            <a:endParaRPr lang="en-US"/>
-          </a:p>
-        </p:txBody>
-      </p:sp>
-      <p:sp>
-        <p:nvSpPr>
-          <p:cNvPr id="10" name="Text 8"/>
-          <p:cNvSpPr txBox="1"/>
-          <p:nvPr/>
-        </p:nvSpPr>
-        <p:spPr>
-          <a:xfrm>
-            <a:off x="566928" y="2532888"/>
-            <a:ext cx="384048" cy="384048"/>
-          </a:xfrm>
-          <a:prstGeom prst="rect">
-            <a:avLst/>
-          </a:prstGeom>
-          <a:noFill/>
-          <a:ln/>
-        </p:spPr>
-        <p:txBody>
-          <a:bodyPr wrap="square" lIns="0" tIns="0" rIns="0" bIns="0" rtlCol="0" anchor="ctr"/>
-          <a:lstStyle/>
-          <a:p>
-            <a:pPr marL="0" indent="0" algn="ctr">
-              <a:buNone/>
-            </a:pPr>
-            <a:r>
-              <a:rPr lang="en-US" sz="1300" b="1" dirty="0">
-                <a:solidFill>
-                  <a:srgbClr val="FFFFFF"/>
-                </a:solidFill>
-                <a:latin typeface="Calibri" pitchFamily="34" charset="0"/>
-                <a:ea typeface="Calibri" pitchFamily="34" charset="-122"/>
-                <a:cs typeface="Calibri" pitchFamily="34" charset="-120"/>
-              </a:rPr>
-              <a:t>2</a:t>
-            </a:r>
-            <a:endParaRPr lang="en-US" sz="1300" dirty="0"/>
-          </a:p>
-        </p:txBody>
-      </p:sp>
-      <p:sp>
-        <p:nvSpPr>
-          <p:cNvPr id="11" name="Text 9"/>
-          <p:cNvSpPr txBox="1"/>
-          <p:nvPr/>
-        </p:nvSpPr>
-        <p:spPr>
-          <a:xfrm>
-            <a:off x="1188720" y="2478024"/>
-            <a:ext cx="8055864" cy="292608"/>
-          </a:xfrm>
-          <a:prstGeom prst="rect">
-            <a:avLst/>
-          </a:prstGeom>
-          <a:noFill/>
-          <a:ln/>
-        </p:spPr>
-        <p:txBody>
-          <a:bodyPr wrap="square" lIns="0" tIns="0" rIns="0" bIns="0" rtlCol="0" anchor="ctr"/>
-          <a:lstStyle/>
-          <a:p>
-            <a:pPr marL="0" indent="0">
-              <a:buNone/>
-            </a:pPr>
-            <a:r>
-              <a:rPr lang="en-US" sz="1550" b="1" dirty="0">
-                <a:solidFill>
-                  <a:srgbClr val="FFFFFF"/>
-                </a:solidFill>
-                <a:latin typeface="Calibri" pitchFamily="34" charset="0"/>
-                <a:ea typeface="Calibri" pitchFamily="34" charset="-122"/>
-                <a:cs typeface="Calibri" pitchFamily="34" charset="-120"/>
-              </a:rPr>
-              <a:t>Three working examples, in rising order of ambition</a:t>
-            </a:r>
-            <a:endParaRPr lang="en-US" sz="1550" dirty="0"/>
-          </a:p>
-        </p:txBody>
-      </p:sp>
-      <p:sp>
-        <p:nvSpPr>
-          <p:cNvPr id="12" name="Text 10"/>
-          <p:cNvSpPr txBox="1"/>
-          <p:nvPr/>
-        </p:nvSpPr>
-        <p:spPr>
-          <a:xfrm>
-            <a:off x="1188720" y="2788920"/>
-            <a:ext cx="8055864" cy="292608"/>
-          </a:xfrm>
-          <a:prstGeom prst="rect">
-            <a:avLst/>
-          </a:prstGeom>
-          <a:noFill/>
-          <a:ln/>
-        </p:spPr>
-        <p:txBody>
-          <a:bodyPr wrap="square" lIns="0" tIns="0" rIns="0" bIns="0" rtlCol="0" anchor="ctr"/>
-          <a:lstStyle/>
-          <a:p>
-            <a:pPr marL="0" indent="0">
-              <a:buNone/>
-            </a:pPr>
-            <a:r>
-              <a:rPr lang="en-US" sz="1300" dirty="0">
-                <a:solidFill>
-                  <a:srgbClr val="9EC7E3"/>
-                </a:solidFill>
-                <a:latin typeface="Calibri" pitchFamily="34" charset="0"/>
-                <a:ea typeface="Calibri" pitchFamily="34" charset="-122"/>
-                <a:cs typeface="Calibri" pitchFamily="34" charset="-120"/>
-              </a:rPr>
-              <a:t>a ready question · the same query as an app · a named shortlist for your own region</a:t>
-            </a:r>
-            <a:endParaRPr lang="en-US" sz="1300" dirty="0"/>
-          </a:p>
-        </p:txBody>
-      </p:sp>
-      <p:sp>
-        <p:nvSpPr>
-          <p:cNvPr id="13" name="Shape 11"/>
-          <p:cNvSpPr/>
-          <p:nvPr/>
-        </p:nvSpPr>
-        <p:spPr>
-          <a:xfrm>
-            <a:off x="566928" y="3374136"/>
-            <a:ext cx="384048" cy="384048"/>
-          </a:xfrm>
-          <a:prstGeom prst="ellipse">
-            <a:avLst/>
-          </a:prstGeom>
-          <a:solidFill>
-            <a:srgbClr val="C62828"/>
-          </a:solidFill>
-          <a:ln w="12700">
-            <a:solidFill>
-              <a:srgbClr val="C62828"/>
-            </a:solidFill>
-            <a:prstDash val="solid"/>
-          </a:ln>
-        </p:spPr>
-        <p:txBody>
-          <a:bodyPr/>
-          <a:lstStyle/>
-          <a:p>
-            <a:endParaRPr lang="en-US"/>
-          </a:p>
-        </p:txBody>
-      </p:sp>
-      <p:sp>
-        <p:nvSpPr>
-          <p:cNvPr id="14" name="Text 12"/>
-          <p:cNvSpPr txBox="1"/>
-          <p:nvPr/>
-        </p:nvSpPr>
-        <p:spPr>
-          <a:xfrm>
-            <a:off x="566928" y="3374136"/>
-            <a:ext cx="384048" cy="384048"/>
-          </a:xfrm>
-          <a:prstGeom prst="rect">
-            <a:avLst/>
-          </a:prstGeom>
-          <a:noFill/>
-          <a:ln/>
-        </p:spPr>
-        <p:txBody>
-          <a:bodyPr wrap="square" lIns="0" tIns="0" rIns="0" bIns="0" rtlCol="0" anchor="ctr"/>
-          <a:lstStyle/>
-          <a:p>
-            <a:pPr marL="0" indent="0" algn="ctr">
-              <a:buNone/>
-            </a:pPr>
-            <a:r>
-              <a:rPr lang="en-US" sz="1300" b="1" dirty="0">
-                <a:solidFill>
-                  <a:srgbClr val="FFFFFF"/>
-                </a:solidFill>
-                <a:latin typeface="Calibri" pitchFamily="34" charset="0"/>
-                <a:ea typeface="Calibri" pitchFamily="34" charset="-122"/>
-                <a:cs typeface="Calibri" pitchFamily="34" charset="-120"/>
-              </a:rPr>
-              <a:t>3</a:t>
-            </a:r>
-            <a:endParaRPr lang="en-US" sz="1300" dirty="0"/>
-          </a:p>
-        </p:txBody>
-      </p:sp>
-      <p:sp>
-        <p:nvSpPr>
-          <p:cNvPr id="15" name="Text 13"/>
-          <p:cNvSpPr txBox="1"/>
-          <p:nvPr/>
-        </p:nvSpPr>
-        <p:spPr>
-          <a:xfrm>
-            <a:off x="1188720" y="3319272"/>
-            <a:ext cx="8055864" cy="292608"/>
-          </a:xfrm>
-          <a:prstGeom prst="rect">
-            <a:avLst/>
-          </a:prstGeom>
-          <a:noFill/>
-          <a:ln/>
-        </p:spPr>
-        <p:txBody>
-          <a:bodyPr wrap="square" lIns="0" tIns="0" rIns="0" bIns="0" rtlCol="0" anchor="ctr"/>
-          <a:lstStyle/>
-          <a:p>
-            <a:pPr marL="0" indent="0">
-              <a:buNone/>
-            </a:pPr>
-            <a:r>
-              <a:rPr lang="en-US" sz="1550" b="1" dirty="0">
-                <a:solidFill>
-                  <a:srgbClr val="FFFFFF"/>
-                </a:solidFill>
-                <a:latin typeface="Calibri" pitchFamily="34" charset="0"/>
-                <a:ea typeface="Calibri" pitchFamily="34" charset="-122"/>
-                <a:cs typeface="Calibri" pitchFamily="34" charset="-120"/>
-              </a:rPr>
-              <a:t>Two use cases built the same way</a:t>
-            </a:r>
-            <a:endParaRPr lang="en-US" sz="1550" dirty="0"/>
-          </a:p>
-        </p:txBody>
-      </p:sp>
-      <p:sp>
-        <p:nvSpPr>
-          <p:cNvPr id="16" name="Text 14"/>
-          <p:cNvSpPr txBox="1"/>
-          <p:nvPr/>
-        </p:nvSpPr>
-        <p:spPr>
-          <a:xfrm>
-            <a:off x="1188720" y="3630168"/>
-            <a:ext cx="8055864" cy="292608"/>
-          </a:xfrm>
-          <a:prstGeom prst="rect">
-            <a:avLst/>
-          </a:prstGeom>
-          <a:noFill/>
-          <a:ln/>
-        </p:spPr>
-        <p:txBody>
-          <a:bodyPr wrap="square" lIns="0" tIns="0" rIns="0" bIns="0" rtlCol="0" anchor="ctr"/>
-          <a:lstStyle/>
-          <a:p>
-            <a:pPr marL="0" indent="0">
-              <a:buNone/>
-            </a:pPr>
-            <a:r>
-              <a:rPr lang="en-US" sz="1300" dirty="0">
-                <a:solidFill>
-                  <a:srgbClr val="9EC7E3"/>
-                </a:solidFill>
-                <a:latin typeface="Calibri" pitchFamily="34" charset="0"/>
-                <a:ea typeface="Calibri" pitchFamily="34" charset="-122"/>
-                <a:cs typeface="Calibri" pitchFamily="34" charset="-120"/>
-              </a:rPr>
-              <a:t>a landscape report, and a patent valuation</a:t>
-            </a:r>
-            <a:endParaRPr lang="en-US" sz="1300" dirty="0"/>
-          </a:p>
-        </p:txBody>
-      </p:sp>
-      <p:sp>
-        <p:nvSpPr>
-          <p:cNvPr id="17" name="Shape 15"/>
-          <p:cNvSpPr/>
-          <p:nvPr/>
-        </p:nvSpPr>
-        <p:spPr>
-          <a:xfrm>
-            <a:off x="566928" y="4215384"/>
-            <a:ext cx="384048" cy="384048"/>
-          </a:xfrm>
-          <a:prstGeom prst="ellipse">
-            <a:avLst/>
-          </a:prstGeom>
-          <a:solidFill>
-            <a:srgbClr val="C62828"/>
-          </a:solidFill>
-          <a:ln w="12700">
-            <a:solidFill>
-              <a:srgbClr val="C62828"/>
-            </a:solidFill>
-            <a:prstDash val="solid"/>
-          </a:ln>
-        </p:spPr>
-        <p:txBody>
-          <a:bodyPr/>
-          <a:lstStyle/>
-          <a:p>
-            <a:endParaRPr lang="en-US"/>
-          </a:p>
-        </p:txBody>
-      </p:sp>
-      <p:sp>
-        <p:nvSpPr>
-          <p:cNvPr id="18" name="Text 16"/>
-          <p:cNvSpPr txBox="1"/>
-          <p:nvPr/>
-        </p:nvSpPr>
-        <p:spPr>
-          <a:xfrm>
-            <a:off x="566928" y="4215384"/>
-            <a:ext cx="384048" cy="384048"/>
-          </a:xfrm>
-          <a:prstGeom prst="rect">
-            <a:avLst/>
-          </a:prstGeom>
-          <a:noFill/>
-          <a:ln/>
-        </p:spPr>
-        <p:txBody>
-          <a:bodyPr wrap="square" lIns="0" tIns="0" rIns="0" bIns="0" rtlCol="0" anchor="ctr"/>
-          <a:lstStyle/>
-          <a:p>
-            <a:pPr marL="0" indent="0" algn="ctr">
-              <a:buNone/>
-            </a:pPr>
-            <a:r>
-              <a:rPr lang="en-US" sz="1300" b="1" dirty="0">
-                <a:solidFill>
-                  <a:srgbClr val="FFFFFF"/>
-                </a:solidFill>
-                <a:latin typeface="Calibri" pitchFamily="34" charset="0"/>
-                <a:ea typeface="Calibri" pitchFamily="34" charset="-122"/>
-                <a:cs typeface="Calibri" pitchFamily="34" charset="-120"/>
-              </a:rPr>
-              <a:t>4</a:t>
-            </a:r>
-            <a:endParaRPr lang="en-US" sz="1300" dirty="0"/>
-          </a:p>
-        </p:txBody>
-      </p:sp>
-      <p:sp>
-        <p:nvSpPr>
-          <p:cNvPr id="19" name="Text 17"/>
-          <p:cNvSpPr txBox="1"/>
-          <p:nvPr/>
-        </p:nvSpPr>
-        <p:spPr>
-          <a:xfrm>
-            <a:off x="1188720" y="4160520"/>
-            <a:ext cx="8055864" cy="292608"/>
-          </a:xfrm>
-          <a:prstGeom prst="rect">
-            <a:avLst/>
-          </a:prstGeom>
-          <a:noFill/>
-          <a:ln/>
-        </p:spPr>
-        <p:txBody>
-          <a:bodyPr wrap="square" lIns="0" tIns="0" rIns="0" bIns="0" rtlCol="0" anchor="ctr"/>
-          <a:lstStyle/>
-          <a:p>
-            <a:pPr marL="0" indent="0">
-              <a:buNone/>
-            </a:pPr>
-            <a:r>
-              <a:rPr lang="en-US" sz="1550" b="1" dirty="0">
-                <a:solidFill>
-                  <a:srgbClr val="FFFFFF"/>
-                </a:solidFill>
-                <a:latin typeface="Calibri" pitchFamily="34" charset="0"/>
-                <a:ea typeface="Calibri" pitchFamily="34" charset="-122"/>
-                <a:cs typeface="Calibri" pitchFamily="34" charset="-120"/>
-              </a:rPr>
-              <a:t>And in every one of them, the part no tool does for you</a:t>
-            </a:r>
-            <a:endParaRPr lang="en-US" sz="1550" dirty="0"/>
-          </a:p>
-        </p:txBody>
-      </p:sp>
-      <p:sp>
-        <p:nvSpPr>
-          <p:cNvPr id="20" name="Text 18"/>
-          <p:cNvSpPr txBox="1"/>
-          <p:nvPr/>
-        </p:nvSpPr>
-        <p:spPr>
-          <a:xfrm>
-            <a:off x="1188720" y="4471416"/>
-            <a:ext cx="8055864" cy="292608"/>
-          </a:xfrm>
-          <a:prstGeom prst="rect">
-            <a:avLst/>
-          </a:prstGeom>
-          <a:noFill/>
-          <a:ln/>
-        </p:spPr>
-        <p:txBody>
-          <a:bodyPr wrap="square" lIns="0" tIns="0" rIns="0" bIns="0" rtlCol="0" anchor="ctr"/>
-          <a:lstStyle/>
-          <a:p>
-            <a:pPr marL="0" indent="0">
-              <a:buNone/>
-            </a:pPr>
-            <a:r>
-              <a:rPr lang="en-US" sz="1300" dirty="0">
-                <a:solidFill>
-                  <a:srgbClr val="9EC7E3"/>
-                </a:solidFill>
-                <a:latin typeface="Calibri" pitchFamily="34" charset="0"/>
-                <a:ea typeface="Calibri" pitchFamily="34" charset="-122"/>
-                <a:cs typeface="Calibri" pitchFamily="34" charset="-120"/>
-              </a:rPr>
-              <a:t>deciding what to ask, and judging whether the answer holds</a:t>
-            </a:r>
-            <a:endParaRPr lang="en-US" sz="1300" dirty="0"/>
-          </a:p>
-        </p:txBody>
-      </p:sp>
-      <p:sp>
-        <p:nvSpPr>
-          <p:cNvPr id="21" name="Shape 19"/>
-          <p:cNvSpPr/>
-          <p:nvPr/>
-        </p:nvSpPr>
-        <p:spPr>
-          <a:xfrm>
-            <a:off x="566928" y="5193792"/>
-            <a:ext cx="11057839" cy="960120"/>
-          </a:xfrm>
-          <a:prstGeom prst="roundRect">
-            <a:avLst>
-              <a:gd name="adj" fmla="val 4762"/>
-            </a:avLst>
-          </a:prstGeom>
-          <a:solidFill>
-            <a:srgbClr val="FFFFFF">
-              <a:alpha val="10000"/>
-            </a:srgbClr>
-          </a:solidFill>
-          <a:ln w="9525">
-            <a:solidFill>
-              <a:srgbClr val="9EC7E3">
-                <a:alpha val="45000"/>
-              </a:srgbClr>
-            </a:solidFill>
-            <a:prstDash val="solid"/>
-          </a:ln>
-        </p:spPr>
-        <p:txBody>
-          <a:bodyPr/>
-          <a:lstStyle/>
-          <a:p>
-            <a:endParaRPr lang="en-US"/>
-          </a:p>
-        </p:txBody>
-      </p:sp>
-      <p:sp>
-        <p:nvSpPr>
-          <p:cNvPr id="22" name="Text 20"/>
-          <p:cNvSpPr txBox="1"/>
-          <p:nvPr/>
-        </p:nvSpPr>
-        <p:spPr>
-          <a:xfrm>
-            <a:off x="932688" y="5193792"/>
-            <a:ext cx="10326319" cy="960120"/>
-          </a:xfrm>
-          <a:prstGeom prst="rect">
-            <a:avLst/>
-          </a:prstGeom>
-          <a:noFill/>
-          <a:ln/>
-        </p:spPr>
-        <p:txBody>
-          <a:bodyPr wrap="square" lIns="0" tIns="0" rIns="0" bIns="0" rtlCol="0" anchor="ctr"/>
-          <a:lstStyle/>
-          <a:p>
-            <a:pPr marL="0" indent="0">
-              <a:lnSpc>
-                <a:spcPts val="2200"/>
-              </a:lnSpc>
-              <a:buNone/>
-            </a:pPr>
-            <a:r>
-              <a:rPr lang="en-US" sz="1350" dirty="0">
-                <a:solidFill>
-                  <a:srgbClr val="9EC7E3"/>
-                </a:solidFill>
-                <a:latin typeface="Calibri" pitchFamily="34" charset="0"/>
-                <a:ea typeface="Calibri" pitchFamily="34" charset="-122"/>
-                <a:cs typeface="Calibri" pitchFamily="34" charset="-120"/>
-              </a:rPr>
-              <a:t>Seven handouts — the full 45-minute version of every block you just saw — in </a:t>
-            </a:r>
-            <a:r>
-              <a:rPr lang="en-US" sz="1350" dirty="0">
-                <a:solidFill>
-                  <a:srgbClr val="FFFFFF"/>
-                </a:solidFill>
-                <a:latin typeface="Courier New" pitchFamily="34" charset="0"/>
-                <a:ea typeface="Courier New" pitchFamily="34" charset="-122"/>
-                <a:cs typeface="Courier New" pitchFamily="34" charset="-120"/>
-              </a:rPr>
-              <a:t>9_misc/handouts/</a:t>
-            </a:r>
-            <a:endParaRPr lang="en-US" sz="1350" dirty="0"/>
-          </a:p>
-          <a:p>
-            <a:pPr marL="0" indent="0">
-              <a:lnSpc>
-                <a:spcPts val="2200"/>
-              </a:lnSpc>
-              <a:buNone/>
-            </a:pPr>
-            <a:r>
-              <a:rPr lang="en-US" sz="1350" dirty="0">
-                <a:solidFill>
-                  <a:srgbClr val="FFFFFF"/>
-                </a:solidFill>
-                <a:latin typeface="Courier New" pitchFamily="34" charset="0"/>
-                <a:ea typeface="Courier New" pitchFamily="34" charset="-122"/>
-                <a:cs typeface="Courier New" pitchFamily="34" charset="-120"/>
-              </a:rPr>
-              <a:t>github.com/mtcberlin/epo-tip4patlibs</a:t>
-            </a:r>
-            <a:endParaRPr lang="en-US" sz="1350" dirty="0"/>
-          </a:p>
-        </p:txBody>
-      </p:sp>
-      <p:sp>
-        <p:nvSpPr>
-          <p:cNvPr id="23" name="Text 21"/>
-          <p:cNvSpPr txBox="1"/>
-          <p:nvPr/>
-        </p:nvSpPr>
-        <p:spPr>
-          <a:xfrm>
-            <a:off x="4309567" y="6382512"/>
-            <a:ext cx="7315200" cy="274320"/>
-          </a:xfrm>
-          <a:prstGeom prst="rect">
-            <a:avLst/>
-          </a:prstGeom>
-          <a:noFill/>
-          <a:ln/>
-        </p:spPr>
-        <p:txBody>
-          <a:bodyPr wrap="square" lIns="0" tIns="0" rIns="0" bIns="0" rtlCol="0" anchor="ctr"/>
-          <a:lstStyle/>
-          <a:p>
-            <a:pPr marL="0" indent="0" algn="r">
-              <a:buNone/>
-            </a:pPr>
-            <a:r>
-              <a:rPr lang="en-US" sz="1150" dirty="0">
-                <a:solidFill>
-                  <a:srgbClr val="7E96AE"/>
-                </a:solidFill>
-                <a:latin typeface="Calibri" pitchFamily="34" charset="0"/>
-                <a:ea typeface="Calibri" pitchFamily="34" charset="-122"/>
-                <a:cs typeface="Calibri" pitchFamily="34" charset="-120"/>
-              </a:rPr>
-              <a:t>Arne Krüger · mtc.berlin      ·      Riccardo Priore · Centro PATLIB, AREA Science Park</a:t>
-            </a:r>
-            <a:endParaRPr lang="en-US" sz="1150" dirty="0"/>
-          </a:p>
-        </p:txBody>
-      </p:sp>
-      <p:sp>
-        <p:nvSpPr>
-          <p:cNvPr id="25" name="Text 22"/>
-          <p:cNvSpPr txBox="1"/>
-          <p:nvPr/>
-        </p:nvSpPr>
-        <p:spPr>
-          <a:xfrm>
-            <a:off x="566928" y="6382512"/>
-            <a:ext cx="5486400" cy="274320"/>
-          </a:xfrm>
-          <a:prstGeom prst="rect">
-            <a:avLst/>
-          </a:prstGeom>
-          <a:noFill/>
-          <a:ln/>
-        </p:spPr>
-        <p:txBody>
-          <a:bodyPr wrap="square" lIns="0" tIns="0" rIns="0" bIns="0" rtlCol="0" anchor="ctr"/>
-          <a:lstStyle/>
-          <a:p>
-            <a:pPr marL="0" indent="0">
-              <a:buNone/>
-            </a:pPr>
-            <a:r>
-              <a:rPr lang="en-US" sz="900" kern="0" spc="100" dirty="0">
-                <a:solidFill>
-                  <a:srgbClr val="7E96AE"/>
-                </a:solidFill>
-                <a:latin typeface="Calibri" pitchFamily="34" charset="0"/>
-                <a:ea typeface="Calibri" pitchFamily="34" charset="-122"/>
-                <a:cs typeface="Calibri" pitchFamily="34" charset="-120"/>
-              </a:rPr>
-              <a:t>TIP4PATLIBS  ·  20 / 20</a:t>
-            </a:r>
-            <a:endParaRPr lang="en-US" sz="900" dirty="0"/>
-          </a:p>
-        </p:txBody>
-      </p:sp>
-      <p:pic>
-        <p:nvPicPr>
-          <p:cNvPr id="26" name="LinkedIn QR" descr="QR code: linkedin.com/in/herrkrueger"/>
-          <p:cNvPicPr>
-            <a:picLocks noChangeAspect="1"/>
-          </p:cNvPicPr>
-          <p:nvPr/>
-        </p:nvPicPr>
-        <p:blipFill>
-          <a:blip r:embed="rId3"/>
-          <a:stretch>
-            <a:fillRect/>
-          </a:stretch>
-        </p:blipFill>
-        <p:spPr>
-          <a:xfrm>
-            <a:off x="9518904" y="1691640"/>
-            <a:ext cx="2103120" cy="2103120"/>
-          </a:xfrm>
-          <a:prstGeom prst="rect">
-            <a:avLst/>
-          </a:prstGeom>
-        </p:spPr>
-      </p:pic>
-      <p:sp>
-        <p:nvSpPr>
-          <p:cNvPr id="27" name="LinkedIn caption"/>
-          <p:cNvSpPr txBox="1"/>
-          <p:nvPr/>
-        </p:nvSpPr>
-        <p:spPr>
-          <a:xfrm>
-            <a:off x="9518904" y="3886200"/>
-            <a:ext cx="2103120" cy="274320"/>
-          </a:xfrm>
-          <a:prstGeom prst="rect">
-            <a:avLst/>
-          </a:prstGeom>
-          <a:noFill/>
-        </p:spPr>
-        <p:txBody>
-          <a:bodyPr wrap="square" lIns="0" tIns="0" rIns="0" bIns="0" rtlCol="0" anchor="t"/>
-          <a:lstStyle/>
-          <a:p>
-            <a:pPr algn="ctr"/>
-            <a:r>
-              <a:rPr lang="en-US" sz="1100" dirty="0">
-                <a:solidFill>
-                  <a:srgbClr val="9EC7E3"/>
-                </a:solidFill>
-                <a:latin typeface="Calibri"/>
-              </a:rPr>
-              <a:t>Arne Krüger on LinkedIn</a:t>
-            </a:r>
           </a:p>
         </p:txBody>
       </p:sp>
@@ -10124,11 +9878,11 @@
 
 <file path=ppt/slides/slide20.xml><?xml version="1.0" encoding="utf-8"?>
 <p:sld xmlns:a="http://schemas.openxmlformats.org/drawingml/2006/main" xmlns:r="http://schemas.openxmlformats.org/officeDocument/2006/relationships" xmlns:p="http://schemas.openxmlformats.org/presentationml/2006/main">
-  <p:cSld name="Slide 3">
+  <p:cSld name="Slide 19">
     <p:bg>
       <p:bgPr>
         <a:solidFill>
-          <a:srgbClr val="FFFFFF"/>
+          <a:srgbClr val="0A1628"/>
         </a:solidFill>
         <a:effectLst/>
       </p:bgPr>
@@ -10149,165 +9903,26 @@
       </p:grpSpPr>
       <p:sp>
         <p:nvSpPr>
-          <p:cNvPr id="2" name="Text 0"/>
-          <p:cNvSpPr txBox="1"/>
-          <p:nvPr/>
-        </p:nvSpPr>
-        <p:spPr>
-          <a:xfrm>
-            <a:off x="566928" y="384048"/>
-            <a:ext cx="11057839" cy="256032"/>
-          </a:xfrm>
-          <a:prstGeom prst="rect">
-            <a:avLst/>
-          </a:prstGeom>
-          <a:noFill/>
-          <a:ln/>
-        </p:spPr>
-        <p:txBody>
-          <a:bodyPr wrap="square" lIns="0" tIns="0" rIns="0" bIns="0" rtlCol="0" anchor="ctr"/>
-          <a:lstStyle/>
-          <a:p>
-            <a:pPr marL="0" indent="0">
-              <a:buNone/>
-            </a:pPr>
-            <a:r>
-              <a:rPr lang="en-US" sz="1050" b="1" kern="0" spc="220" dirty="0">
-                <a:solidFill>
-                  <a:srgbClr val="C62828"/>
-                </a:solidFill>
-                <a:latin typeface="Calibri" pitchFamily="34" charset="0"/>
-                <a:ea typeface="Calibri" pitchFamily="34" charset="-122"/>
-                <a:cs typeface="Calibri" pitchFamily="34" charset="-120"/>
-              </a:rPr>
-              <a:t>BRING IT INTO YOUR OWN TIP</a:t>
-            </a:r>
-          </a:p>
-        </p:txBody>
-      </p:sp>
-      <p:sp>
-        <p:nvSpPr>
-          <p:cNvPr id="3" name="Text 1"/>
-          <p:cNvSpPr txBox="1"/>
-          <p:nvPr/>
-        </p:nvSpPr>
-        <p:spPr>
-          <a:xfrm>
-            <a:off x="566928" y="777240"/>
-            <a:ext cx="8778240" cy="1143000"/>
-          </a:xfrm>
-          <a:prstGeom prst="rect">
-            <a:avLst/>
-          </a:prstGeom>
-          <a:noFill/>
-          <a:ln/>
-        </p:spPr>
-        <p:txBody>
-          <a:bodyPr wrap="square" lIns="0" tIns="0" rIns="0" bIns="0" rtlCol="0" anchor="ctr"/>
-          <a:lstStyle/>
-          <a:p>
-            <a:pPr marL="0" indent="0">
-              <a:lnSpc>
-                <a:spcPts val="4000"/>
-              </a:lnSpc>
-              <a:buNone/>
-            </a:pPr>
-            <a:r>
-              <a:rPr lang="en-US" sz="3200" dirty="0">
-                <a:solidFill>
-                  <a:srgbClr val="003366"/>
-                </a:solidFill>
-                <a:latin typeface="Calibri" pitchFamily="34" charset="0"/>
-                <a:ea typeface="Calibri" pitchFamily="34" charset="-122"/>
-                <a:cs typeface="Calibri" pitchFamily="34" charset="-120"/>
-              </a:rPr>
-              <a:t>One command.</a:t>
-            </a:r>
-          </a:p>
-          <a:p>
-            <a:pPr marL="0" indent="0">
-              <a:lnSpc>
-                <a:spcPts val="4000"/>
-              </a:lnSpc>
-              <a:buNone/>
-            </a:pPr>
-            <a:r>
-              <a:rPr lang="en-US" sz="3200" dirty="0">
-                <a:solidFill>
-                  <a:srgbClr val="003366"/>
-                </a:solidFill>
-                <a:latin typeface="Calibri" pitchFamily="34" charset="0"/>
-                <a:ea typeface="Calibri" pitchFamily="34" charset="-122"/>
-                <a:cs typeface="Calibri" pitchFamily="34" charset="-120"/>
-              </a:rPr>
-              <a:t>Then you have everything.</a:t>
-            </a:r>
-          </a:p>
-        </p:txBody>
-      </p:sp>
-      <p:sp>
-        <p:nvSpPr>
-          <p:cNvPr id="4" name="Text 2"/>
-          <p:cNvSpPr txBox="1"/>
-          <p:nvPr/>
-        </p:nvSpPr>
-        <p:spPr>
-          <a:xfrm>
-            <a:off x="566928" y="2029968"/>
-            <a:ext cx="9509760" cy="411480"/>
-          </a:xfrm>
-          <a:prstGeom prst="rect">
-            <a:avLst/>
-          </a:prstGeom>
-          <a:noFill/>
-          <a:ln/>
-        </p:spPr>
-        <p:txBody>
-          <a:bodyPr wrap="square" lIns="0" tIns="0" rIns="0" bIns="0" rtlCol="0" anchor="ctr"/>
-          <a:lstStyle/>
-          <a:p>
-            <a:pPr marL="0" indent="0">
-              <a:lnSpc>
-                <a:spcPts val="2300"/>
-              </a:lnSpc>
-              <a:buNone/>
-            </a:pPr>
-            <a:r>
-              <a:rPr lang="en-US" sz="1500" dirty="0">
-                <a:solidFill>
-                  <a:srgbClr val="3D4451"/>
-                </a:solidFill>
-                <a:latin typeface="Calibri" pitchFamily="34" charset="0"/>
-                <a:ea typeface="Calibri" pitchFamily="34" charset="-122"/>
-                <a:cs typeface="Calibri" pitchFamily="34" charset="-120"/>
-              </a:rPr>
-              <a:t>Open TIP, start a terminal (File → New → Terminal) and run this one line:</a:t>
-            </a:r>
-          </a:p>
-        </p:txBody>
-      </p:sp>
-      <p:sp>
-        <p:nvSpPr>
-          <p:cNvPr id="5" name="Shape 3"/>
+          <p:cNvPr id="2" name="Shape 0"/>
           <p:cNvSpPr/>
           <p:nvPr/>
         </p:nvSpPr>
         <p:spPr>
           <a:xfrm>
-            <a:off x="566927" y="3977640"/>
-            <a:ext cx="3472586" cy="1975104"/>
-          </a:xfrm>
-          <a:prstGeom prst="roundRect">
-            <a:avLst>
-              <a:gd name="adj" fmla="val 1838"/>
-            </a:avLst>
+            <a:off x="0" y="0"/>
+            <a:ext cx="12191695" cy="6858000"/>
+          </a:xfrm>
+          <a:prstGeom prst="rect">
+            <a:avLst/>
           </a:prstGeom>
           <a:solidFill>
-            <a:srgbClr val="EEF2F7"/>
+            <a:srgbClr val="003366">
+              <a:alpha val="70000"/>
+            </a:srgbClr>
           </a:solidFill>
           <a:ln w="12700">
             <a:solidFill>
-              <a:srgbClr val="DCE3EB"/>
+              <a:srgbClr val="333333"/>
             </a:solidFill>
             <a:prstDash val="solid"/>
           </a:ln>
@@ -10322,108 +9937,102 @@
       </p:sp>
       <p:sp>
         <p:nvSpPr>
-          <p:cNvPr id="6" name="Text 4"/>
-          <p:cNvSpPr txBox="1"/>
-          <p:nvPr/>
-        </p:nvSpPr>
-        <p:spPr>
-          <a:xfrm>
-            <a:off x="841248" y="4123944"/>
-            <a:ext cx="2923946" cy="548640"/>
-          </a:xfrm>
-          <a:prstGeom prst="rect">
-            <a:avLst/>
-          </a:prstGeom>
-          <a:noFill/>
-          <a:ln/>
-        </p:spPr>
-        <p:txBody>
-          <a:bodyPr wrap="square" lIns="0" tIns="0" rIns="0" bIns="0" rtlCol="0" anchor="ctr"/>
-          <a:lstStyle/>
-          <a:p>
-            <a:pPr marL="0" indent="0">
-              <a:lnSpc>
-                <a:spcPts val="2000"/>
-              </a:lnSpc>
-              <a:buNone/>
-            </a:pPr>
-            <a:r>
-              <a:rPr lang="en-US" sz="1500" b="1" dirty="0">
-                <a:solidFill>
-                  <a:srgbClr val="003366"/>
-                </a:solidFill>
-                <a:latin typeface="Calibri" pitchFamily="34" charset="0"/>
-                <a:ea typeface="Calibri" pitchFamily="34" charset="-122"/>
-                <a:cs typeface="Calibri" pitchFamily="34" charset="-120"/>
-              </a:rPr>
-              <a:t>The five modules</a:t>
-            </a:r>
-          </a:p>
-        </p:txBody>
-      </p:sp>
-      <p:sp>
-        <p:nvSpPr>
-          <p:cNvPr id="7" name="Text 5"/>
-          <p:cNvSpPr txBox="1"/>
-          <p:nvPr/>
-        </p:nvSpPr>
-        <p:spPr>
-          <a:xfrm>
-            <a:off x="841248" y="4526280"/>
-            <a:ext cx="2923946" cy="1280160"/>
-          </a:xfrm>
-          <a:prstGeom prst="rect">
-            <a:avLst/>
-          </a:prstGeom>
-          <a:noFill/>
-          <a:ln/>
-        </p:spPr>
-        <p:txBody>
-          <a:bodyPr wrap="square" lIns="0" tIns="0" rIns="0" bIns="0" rtlCol="0" anchor="ctr"/>
-          <a:lstStyle/>
-          <a:p>
-            <a:pPr marL="0" indent="0">
-              <a:lnSpc>
-                <a:spcPts val="1800"/>
-              </a:lnSpc>
-              <a:buNone/>
-            </a:pPr>
-            <a:r>
-              <a:rPr lang="en-US" sz="1250" dirty="0">
-                <a:solidFill>
-                  <a:srgbClr val="3D4451"/>
-                </a:solidFill>
-                <a:latin typeface="Calibri" pitchFamily="34" charset="0"/>
-                <a:ea typeface="Calibri" pitchFamily="34" charset="-122"/>
-                <a:cs typeface="Calibri" pitchFamily="34" charset="-120"/>
-              </a:rPr>
-              <a:t>Cloned into ~/epo-tip4patlibs, executed, with the code folded away. Open a folder and read.</a:t>
-            </a:r>
-          </a:p>
-        </p:txBody>
-      </p:sp>
-      <p:sp>
-        <p:nvSpPr>
-          <p:cNvPr id="8" name="Shape 6"/>
+          <p:cNvPr id="3" name="Text 1"/>
+          <p:cNvSpPr txBox="1"/>
+          <p:nvPr/>
+        </p:nvSpPr>
+        <p:spPr>
+          <a:xfrm>
+            <a:off x="566928" y="384048"/>
+            <a:ext cx="11057839" cy="256032"/>
+          </a:xfrm>
+          <a:prstGeom prst="rect">
+            <a:avLst/>
+          </a:prstGeom>
+          <a:noFill/>
+          <a:ln/>
+        </p:spPr>
+        <p:txBody>
+          <a:bodyPr wrap="square" lIns="0" tIns="0" rIns="0" bIns="0" rtlCol="0" anchor="ctr"/>
+          <a:lstStyle/>
+          <a:p>
+            <a:pPr marL="0" indent="0">
+              <a:buNone/>
+            </a:pPr>
+            <a:r>
+              <a:rPr lang="en-US" sz="1050" b="1" kern="0" spc="220" dirty="0">
+                <a:solidFill>
+                  <a:srgbClr val="9EC7E3"/>
+                </a:solidFill>
+                <a:latin typeface="Calibri" pitchFamily="34" charset="0"/>
+                <a:ea typeface="Calibri" pitchFamily="34" charset="-122"/>
+                <a:cs typeface="Calibri" pitchFamily="34" charset="-120"/>
+              </a:rPr>
+              <a:t>WHAT YOU LEAVE WITH</a:t>
+            </a:r>
+            <a:endParaRPr lang="en-US" sz="1050" dirty="0"/>
+          </a:p>
+        </p:txBody>
+      </p:sp>
+      <p:sp>
+        <p:nvSpPr>
+          <p:cNvPr id="4" name="Text 2"/>
+          <p:cNvSpPr txBox="1"/>
+          <p:nvPr/>
+        </p:nvSpPr>
+        <p:spPr>
+          <a:xfrm>
+            <a:off x="566928" y="804672"/>
+            <a:ext cx="11057839" cy="640080"/>
+          </a:xfrm>
+          <a:prstGeom prst="rect">
+            <a:avLst/>
+          </a:prstGeom>
+          <a:noFill/>
+          <a:ln/>
+        </p:spPr>
+        <p:txBody>
+          <a:bodyPr wrap="square" lIns="0" tIns="0" rIns="0" bIns="0" rtlCol="0" anchor="ctr"/>
+          <a:lstStyle/>
+          <a:p>
+            <a:pPr marL="0" indent="0">
+              <a:buNone/>
+            </a:pPr>
+            <a:r>
+              <a:rPr lang="en-US" sz="3600" b="1" dirty="0">
+                <a:solidFill>
+                  <a:srgbClr val="FFFFFF"/>
+                </a:solidFill>
+                <a:latin typeface="Calibri" pitchFamily="34" charset="0"/>
+                <a:ea typeface="Calibri" pitchFamily="34" charset="-122"/>
+                <a:cs typeface="Calibri" pitchFamily="34" charset="-120"/>
+              </a:rPr>
+              <a:t>The demo is the repository.</a:t>
+            </a:r>
+            <a:endParaRPr lang="en-US" sz="3600" dirty="0"/>
+          </a:p>
+        </p:txBody>
+      </p:sp>
+      <p:sp>
+        <p:nvSpPr>
+          <p:cNvPr id="5" name="Shape 3"/>
           <p:cNvSpPr/>
           <p:nvPr/>
         </p:nvSpPr>
         <p:spPr>
           <a:xfrm>
-            <a:off x="4359554" y="3977640"/>
-            <a:ext cx="3472586" cy="1975104"/>
-          </a:xfrm>
-          <a:prstGeom prst="roundRect">
-            <a:avLst>
-              <a:gd name="adj" fmla="val 1838"/>
-            </a:avLst>
+            <a:off x="566928" y="1691640"/>
+            <a:ext cx="384048" cy="384048"/>
+          </a:xfrm>
+          <a:prstGeom prst="ellipse">
+            <a:avLst/>
           </a:prstGeom>
           <a:solidFill>
-            <a:srgbClr val="EEF2F7"/>
+            <a:srgbClr val="C62828"/>
           </a:solidFill>
           <a:ln w="12700">
             <a:solidFill>
-              <a:srgbClr val="DCE3EB"/>
+              <a:srgbClr val="C62828"/>
             </a:solidFill>
             <a:prstDash val="solid"/>
           </a:ln>
@@ -10438,108 +10047,141 @@
       </p:sp>
       <p:sp>
         <p:nvSpPr>
-          <p:cNvPr id="9" name="Text 7"/>
-          <p:cNvSpPr txBox="1"/>
-          <p:nvPr/>
-        </p:nvSpPr>
-        <p:spPr>
-          <a:xfrm>
-            <a:off x="4636008" y="4123944"/>
-            <a:ext cx="2923946" cy="548640"/>
-          </a:xfrm>
-          <a:prstGeom prst="rect">
-            <a:avLst/>
-          </a:prstGeom>
-          <a:noFill/>
-          <a:ln/>
-        </p:spPr>
-        <p:txBody>
-          <a:bodyPr wrap="square" lIns="0" tIns="0" rIns="0" bIns="0" rtlCol="0" anchor="ctr"/>
-          <a:lstStyle/>
-          <a:p>
-            <a:pPr marL="0" indent="0">
-              <a:lnSpc>
-                <a:spcPts val="2000"/>
-              </a:lnSpc>
-              <a:buNone/>
-            </a:pPr>
-            <a:r>
-              <a:rPr lang="en-US" sz="1500" b="1" dirty="0">
-                <a:solidFill>
-                  <a:srgbClr val="003366"/>
-                </a:solidFill>
-                <a:latin typeface="Calibri" pitchFamily="34" charset="0"/>
-                <a:ea typeface="Calibri" pitchFamily="34" charset="-122"/>
-                <a:cs typeface="Calibri" pitchFamily="34" charset="-120"/>
-              </a:rPr>
-              <a:t>An assistant on standby</a:t>
-            </a:r>
-          </a:p>
-        </p:txBody>
-      </p:sp>
-      <p:sp>
-        <p:nvSpPr>
-          <p:cNvPr id="10" name="Text 8"/>
-          <p:cNvSpPr txBox="1"/>
-          <p:nvPr/>
-        </p:nvSpPr>
-        <p:spPr>
-          <a:xfrm>
-            <a:off x="4636008" y="4526280"/>
-            <a:ext cx="2923946" cy="1280160"/>
-          </a:xfrm>
-          <a:prstGeom prst="rect">
-            <a:avLst/>
-          </a:prstGeom>
-          <a:noFill/>
-          <a:ln/>
-        </p:spPr>
-        <p:txBody>
-          <a:bodyPr wrap="square" lIns="0" tIns="0" rIns="0" bIns="0" rtlCol="0" anchor="ctr"/>
-          <a:lstStyle/>
-          <a:p>
-            <a:pPr marL="0" indent="0">
-              <a:lnSpc>
-                <a:spcPts val="1800"/>
-              </a:lnSpc>
-              <a:buNone/>
-            </a:pPr>
-            <a:r>
-              <a:rPr lang="en-US" sz="1250" dirty="0">
-                <a:solidFill>
-                  <a:srgbClr val="3D4451"/>
-                </a:solidFill>
-                <a:latin typeface="Calibri" pitchFamily="34" charset="0"/>
-                <a:ea typeface="Calibri" pitchFamily="34" charset="-122"/>
-                <a:cs typeface="Calibri" pitchFamily="34" charset="-120"/>
-              </a:rPr>
-              <a:t>Installed and waiting. Sign in only when you want to change a notebook or build your own analysis.</a:t>
-            </a:r>
-          </a:p>
-        </p:txBody>
-      </p:sp>
-      <p:sp>
-        <p:nvSpPr>
-          <p:cNvPr id="11" name="Shape 9"/>
+          <p:cNvPr id="6" name="Text 4"/>
+          <p:cNvSpPr txBox="1"/>
+          <p:nvPr/>
+        </p:nvSpPr>
+        <p:spPr>
+          <a:xfrm>
+            <a:off x="566928" y="1691640"/>
+            <a:ext cx="384048" cy="384048"/>
+          </a:xfrm>
+          <a:prstGeom prst="rect">
+            <a:avLst/>
+          </a:prstGeom>
+          <a:noFill/>
+          <a:ln/>
+        </p:spPr>
+        <p:txBody>
+          <a:bodyPr wrap="square" lIns="0" tIns="0" rIns="0" bIns="0" rtlCol="0" anchor="ctr"/>
+          <a:lstStyle/>
+          <a:p>
+            <a:pPr marL="0" indent="0" algn="ctr">
+              <a:buNone/>
+            </a:pPr>
+            <a:r>
+              <a:rPr lang="en-US" sz="1300" b="1" dirty="0">
+                <a:solidFill>
+                  <a:srgbClr val="FFFFFF"/>
+                </a:solidFill>
+                <a:latin typeface="Calibri" pitchFamily="34" charset="0"/>
+                <a:ea typeface="Calibri" pitchFamily="34" charset="-122"/>
+                <a:cs typeface="Calibri" pitchFamily="34" charset="-120"/>
+              </a:rPr>
+              <a:t>1</a:t>
+            </a:r>
+            <a:endParaRPr lang="en-US" sz="1300" dirty="0"/>
+          </a:p>
+        </p:txBody>
+      </p:sp>
+      <p:sp>
+        <p:nvSpPr>
+          <p:cNvPr id="7" name="Text 5"/>
+          <p:cNvSpPr txBox="1"/>
+          <p:nvPr/>
+        </p:nvSpPr>
+        <p:spPr>
+          <a:xfrm>
+            <a:off x="1188720" y="1636776"/>
+            <a:ext cx="8055864" cy="292608"/>
+          </a:xfrm>
+          <a:prstGeom prst="rect">
+            <a:avLst/>
+          </a:prstGeom>
+          <a:noFill/>
+          <a:ln/>
+        </p:spPr>
+        <p:txBody>
+          <a:bodyPr wrap="square" lIns="0" tIns="0" rIns="0" bIns="0" rtlCol="0" anchor="ctr"/>
+          <a:lstStyle/>
+          <a:p>
+            <a:pPr marL="0" indent="0">
+              <a:buNone/>
+            </a:pPr>
+            <a:r>
+              <a:rPr lang="en-US" sz="1550" b="1" dirty="0">
+                <a:solidFill>
+                  <a:srgbClr val="FFFFFF"/>
+                </a:solidFill>
+                <a:latin typeface="Calibri" pitchFamily="34" charset="0"/>
+                <a:ea typeface="Calibri" pitchFamily="34" charset="-122"/>
+                <a:cs typeface="Calibri" pitchFamily="34" charset="-120"/>
+              </a:rPr>
+              <a:t>A working environment on TIP that survives the restart</a:t>
+            </a:r>
+            <a:endParaRPr lang="en-US" sz="1550" dirty="0"/>
+          </a:p>
+        </p:txBody>
+      </p:sp>
+      <p:sp>
+        <p:nvSpPr>
+          <p:cNvPr id="8" name="Text 6"/>
+          <p:cNvSpPr txBox="1"/>
+          <p:nvPr/>
+        </p:nvSpPr>
+        <p:spPr>
+          <a:xfrm>
+            <a:off x="1188720" y="1947672"/>
+            <a:ext cx="8055864" cy="292608"/>
+          </a:xfrm>
+          <a:prstGeom prst="rect">
+            <a:avLst/>
+          </a:prstGeom>
+          <a:noFill/>
+          <a:ln/>
+        </p:spPr>
+        <p:txBody>
+          <a:bodyPr wrap="square" lIns="0" tIns="0" rIns="0" bIns="0" rtlCol="0" anchor="ctr"/>
+          <a:lstStyle/>
+          <a:p>
+            <a:pPr marL="0" indent="0">
+              <a:buNone/>
+            </a:pPr>
+            <a:r>
+              <a:rPr lang="en-US" sz="1300" dirty="0">
+                <a:solidFill>
+                  <a:srgbClr val="9EC7E3"/>
+                </a:solidFill>
+                <a:latin typeface="Calibri" pitchFamily="34" charset="0"/>
+                <a:ea typeface="Calibri" pitchFamily="34" charset="-122"/>
+                <a:cs typeface="Calibri" pitchFamily="34" charset="-120"/>
+              </a:rPr>
+              <a:t>free, hosted, with current PATSTAT behind it</a:t>
+            </a:r>
+            <a:endParaRPr lang="en-US" sz="1300" dirty="0"/>
+          </a:p>
+        </p:txBody>
+      </p:sp>
+      <p:sp>
+        <p:nvSpPr>
+          <p:cNvPr id="9" name="Shape 7"/>
           <p:cNvSpPr/>
           <p:nvPr/>
         </p:nvSpPr>
         <p:spPr>
           <a:xfrm>
-            <a:off x="8152181" y="3977640"/>
-            <a:ext cx="3472586" cy="1975104"/>
-          </a:xfrm>
-          <a:prstGeom prst="roundRect">
-            <a:avLst>
-              <a:gd name="adj" fmla="val 1838"/>
-            </a:avLst>
+            <a:off x="566928" y="2532888"/>
+            <a:ext cx="384048" cy="384048"/>
+          </a:xfrm>
+          <a:prstGeom prst="ellipse">
+            <a:avLst/>
           </a:prstGeom>
           <a:solidFill>
-            <a:srgbClr val="EEF2F7"/>
+            <a:srgbClr val="C62828"/>
           </a:solidFill>
           <a:ln w="12700">
             <a:solidFill>
-              <a:srgbClr val="DCE3EB"/>
+              <a:srgbClr val="C62828"/>
             </a:solidFill>
             <a:prstDash val="solid"/>
           </a:ln>
@@ -10554,14 +10196,467 @@
       </p:sp>
       <p:sp>
         <p:nvSpPr>
+          <p:cNvPr id="10" name="Text 8"/>
+          <p:cNvSpPr txBox="1"/>
+          <p:nvPr/>
+        </p:nvSpPr>
+        <p:spPr>
+          <a:xfrm>
+            <a:off x="566928" y="2532888"/>
+            <a:ext cx="384048" cy="384048"/>
+          </a:xfrm>
+          <a:prstGeom prst="rect">
+            <a:avLst/>
+          </a:prstGeom>
+          <a:noFill/>
+          <a:ln/>
+        </p:spPr>
+        <p:txBody>
+          <a:bodyPr wrap="square" lIns="0" tIns="0" rIns="0" bIns="0" rtlCol="0" anchor="ctr"/>
+          <a:lstStyle/>
+          <a:p>
+            <a:pPr marL="0" indent="0" algn="ctr">
+              <a:buNone/>
+            </a:pPr>
+            <a:r>
+              <a:rPr lang="en-US" sz="1300" b="1" dirty="0">
+                <a:solidFill>
+                  <a:srgbClr val="FFFFFF"/>
+                </a:solidFill>
+                <a:latin typeface="Calibri" pitchFamily="34" charset="0"/>
+                <a:ea typeface="Calibri" pitchFamily="34" charset="-122"/>
+                <a:cs typeface="Calibri" pitchFamily="34" charset="-120"/>
+              </a:rPr>
+              <a:t>2</a:t>
+            </a:r>
+            <a:endParaRPr lang="en-US" sz="1300" dirty="0"/>
+          </a:p>
+        </p:txBody>
+      </p:sp>
+      <p:sp>
+        <p:nvSpPr>
+          <p:cNvPr id="11" name="Text 9"/>
+          <p:cNvSpPr txBox="1"/>
+          <p:nvPr/>
+        </p:nvSpPr>
+        <p:spPr>
+          <a:xfrm>
+            <a:off x="1188720" y="2478024"/>
+            <a:ext cx="8055864" cy="292608"/>
+          </a:xfrm>
+          <a:prstGeom prst="rect">
+            <a:avLst/>
+          </a:prstGeom>
+          <a:noFill/>
+          <a:ln/>
+        </p:spPr>
+        <p:txBody>
+          <a:bodyPr wrap="square" lIns="0" tIns="0" rIns="0" bIns="0" rtlCol="0" anchor="ctr"/>
+          <a:lstStyle/>
+          <a:p>
+            <a:pPr marL="0" indent="0">
+              <a:buNone/>
+            </a:pPr>
+            <a:r>
+              <a:rPr lang="en-US" sz="1550" b="1" dirty="0">
+                <a:solidFill>
+                  <a:srgbClr val="FFFFFF"/>
+                </a:solidFill>
+                <a:latin typeface="Calibri" pitchFamily="34" charset="0"/>
+                <a:ea typeface="Calibri" pitchFamily="34" charset="-122"/>
+                <a:cs typeface="Calibri" pitchFamily="34" charset="-120"/>
+              </a:rPr>
+              <a:t>Three working examples, in rising order of ambition</a:t>
+            </a:r>
+            <a:endParaRPr lang="en-US" sz="1550" dirty="0"/>
+          </a:p>
+        </p:txBody>
+      </p:sp>
+      <p:sp>
+        <p:nvSpPr>
           <p:cNvPr id="12" name="Text 10"/>
           <p:cNvSpPr txBox="1"/>
           <p:nvPr/>
         </p:nvSpPr>
         <p:spPr>
           <a:xfrm>
-            <a:off x="8430768" y="4123944"/>
-            <a:ext cx="2923946" cy="548640"/>
+            <a:off x="1188720" y="2788920"/>
+            <a:ext cx="8055864" cy="292608"/>
+          </a:xfrm>
+          <a:prstGeom prst="rect">
+            <a:avLst/>
+          </a:prstGeom>
+          <a:noFill/>
+          <a:ln/>
+        </p:spPr>
+        <p:txBody>
+          <a:bodyPr wrap="square" lIns="0" tIns="0" rIns="0" bIns="0" rtlCol="0" anchor="ctr"/>
+          <a:lstStyle/>
+          <a:p>
+            <a:pPr marL="0" indent="0">
+              <a:buNone/>
+            </a:pPr>
+            <a:r>
+              <a:rPr lang="en-US" sz="1300" dirty="0">
+                <a:solidFill>
+                  <a:srgbClr val="9EC7E3"/>
+                </a:solidFill>
+                <a:latin typeface="Calibri" pitchFamily="34" charset="0"/>
+                <a:ea typeface="Calibri" pitchFamily="34" charset="-122"/>
+                <a:cs typeface="Calibri" pitchFamily="34" charset="-120"/>
+              </a:rPr>
+              <a:t>a ready question · the same query as an app · a named shortlist for your own region</a:t>
+            </a:r>
+            <a:endParaRPr lang="en-US" sz="1300" dirty="0"/>
+          </a:p>
+        </p:txBody>
+      </p:sp>
+      <p:sp>
+        <p:nvSpPr>
+          <p:cNvPr id="13" name="Shape 11"/>
+          <p:cNvSpPr/>
+          <p:nvPr/>
+        </p:nvSpPr>
+        <p:spPr>
+          <a:xfrm>
+            <a:off x="566928" y="3374136"/>
+            <a:ext cx="384048" cy="384048"/>
+          </a:xfrm>
+          <a:prstGeom prst="ellipse">
+            <a:avLst/>
+          </a:prstGeom>
+          <a:solidFill>
+            <a:srgbClr val="C62828"/>
+          </a:solidFill>
+          <a:ln w="12700">
+            <a:solidFill>
+              <a:srgbClr val="C62828"/>
+            </a:solidFill>
+            <a:prstDash val="solid"/>
+          </a:ln>
+        </p:spPr>
+        <p:txBody>
+          <a:bodyPr/>
+          <a:lstStyle/>
+          <a:p>
+            <a:endParaRPr lang="en-US"/>
+          </a:p>
+        </p:txBody>
+      </p:sp>
+      <p:sp>
+        <p:nvSpPr>
+          <p:cNvPr id="14" name="Text 12"/>
+          <p:cNvSpPr txBox="1"/>
+          <p:nvPr/>
+        </p:nvSpPr>
+        <p:spPr>
+          <a:xfrm>
+            <a:off x="566928" y="3374136"/>
+            <a:ext cx="384048" cy="384048"/>
+          </a:xfrm>
+          <a:prstGeom prst="rect">
+            <a:avLst/>
+          </a:prstGeom>
+          <a:noFill/>
+          <a:ln/>
+        </p:spPr>
+        <p:txBody>
+          <a:bodyPr wrap="square" lIns="0" tIns="0" rIns="0" bIns="0" rtlCol="0" anchor="ctr"/>
+          <a:lstStyle/>
+          <a:p>
+            <a:pPr marL="0" indent="0" algn="ctr">
+              <a:buNone/>
+            </a:pPr>
+            <a:r>
+              <a:rPr lang="en-US" sz="1300" b="1" dirty="0">
+                <a:solidFill>
+                  <a:srgbClr val="FFFFFF"/>
+                </a:solidFill>
+                <a:latin typeface="Calibri" pitchFamily="34" charset="0"/>
+                <a:ea typeface="Calibri" pitchFamily="34" charset="-122"/>
+                <a:cs typeface="Calibri" pitchFamily="34" charset="-120"/>
+              </a:rPr>
+              <a:t>3</a:t>
+            </a:r>
+            <a:endParaRPr lang="en-US" sz="1300" dirty="0"/>
+          </a:p>
+        </p:txBody>
+      </p:sp>
+      <p:sp>
+        <p:nvSpPr>
+          <p:cNvPr id="15" name="Text 13"/>
+          <p:cNvSpPr txBox="1"/>
+          <p:nvPr/>
+        </p:nvSpPr>
+        <p:spPr>
+          <a:xfrm>
+            <a:off x="1188720" y="3319272"/>
+            <a:ext cx="8055864" cy="292608"/>
+          </a:xfrm>
+          <a:prstGeom prst="rect">
+            <a:avLst/>
+          </a:prstGeom>
+          <a:noFill/>
+          <a:ln/>
+        </p:spPr>
+        <p:txBody>
+          <a:bodyPr wrap="square" lIns="0" tIns="0" rIns="0" bIns="0" rtlCol="0" anchor="ctr"/>
+          <a:lstStyle/>
+          <a:p>
+            <a:pPr marL="0" indent="0">
+              <a:buNone/>
+            </a:pPr>
+            <a:r>
+              <a:rPr lang="en-US" sz="1550" b="1" dirty="0">
+                <a:solidFill>
+                  <a:srgbClr val="FFFFFF"/>
+                </a:solidFill>
+                <a:latin typeface="Calibri" pitchFamily="34" charset="0"/>
+                <a:ea typeface="Calibri" pitchFamily="34" charset="-122"/>
+                <a:cs typeface="Calibri" pitchFamily="34" charset="-120"/>
+              </a:rPr>
+              <a:t>Two use cases built the same way</a:t>
+            </a:r>
+            <a:endParaRPr lang="en-US" sz="1550" dirty="0"/>
+          </a:p>
+        </p:txBody>
+      </p:sp>
+      <p:sp>
+        <p:nvSpPr>
+          <p:cNvPr id="16" name="Text 14"/>
+          <p:cNvSpPr txBox="1"/>
+          <p:nvPr/>
+        </p:nvSpPr>
+        <p:spPr>
+          <a:xfrm>
+            <a:off x="1188720" y="3630168"/>
+            <a:ext cx="8055864" cy="292608"/>
+          </a:xfrm>
+          <a:prstGeom prst="rect">
+            <a:avLst/>
+          </a:prstGeom>
+          <a:noFill/>
+          <a:ln/>
+        </p:spPr>
+        <p:txBody>
+          <a:bodyPr wrap="square" lIns="0" tIns="0" rIns="0" bIns="0" rtlCol="0" anchor="ctr"/>
+          <a:lstStyle/>
+          <a:p>
+            <a:pPr marL="0" indent="0">
+              <a:buNone/>
+            </a:pPr>
+            <a:r>
+              <a:rPr lang="en-US" sz="1300" dirty="0">
+                <a:solidFill>
+                  <a:srgbClr val="9EC7E3"/>
+                </a:solidFill>
+                <a:latin typeface="Calibri" pitchFamily="34" charset="0"/>
+                <a:ea typeface="Calibri" pitchFamily="34" charset="-122"/>
+                <a:cs typeface="Calibri" pitchFamily="34" charset="-120"/>
+              </a:rPr>
+              <a:t>a landscape report, and a patent valuation</a:t>
+            </a:r>
+            <a:endParaRPr lang="en-US" sz="1300" dirty="0"/>
+          </a:p>
+        </p:txBody>
+      </p:sp>
+      <p:sp>
+        <p:nvSpPr>
+          <p:cNvPr id="17" name="Shape 15"/>
+          <p:cNvSpPr/>
+          <p:nvPr/>
+        </p:nvSpPr>
+        <p:spPr>
+          <a:xfrm>
+            <a:off x="566928" y="4215384"/>
+            <a:ext cx="384048" cy="384048"/>
+          </a:xfrm>
+          <a:prstGeom prst="ellipse">
+            <a:avLst/>
+          </a:prstGeom>
+          <a:solidFill>
+            <a:srgbClr val="C62828"/>
+          </a:solidFill>
+          <a:ln w="12700">
+            <a:solidFill>
+              <a:srgbClr val="C62828"/>
+            </a:solidFill>
+            <a:prstDash val="solid"/>
+          </a:ln>
+        </p:spPr>
+        <p:txBody>
+          <a:bodyPr/>
+          <a:lstStyle/>
+          <a:p>
+            <a:endParaRPr lang="en-US"/>
+          </a:p>
+        </p:txBody>
+      </p:sp>
+      <p:sp>
+        <p:nvSpPr>
+          <p:cNvPr id="18" name="Text 16"/>
+          <p:cNvSpPr txBox="1"/>
+          <p:nvPr/>
+        </p:nvSpPr>
+        <p:spPr>
+          <a:xfrm>
+            <a:off x="566928" y="4215384"/>
+            <a:ext cx="384048" cy="384048"/>
+          </a:xfrm>
+          <a:prstGeom prst="rect">
+            <a:avLst/>
+          </a:prstGeom>
+          <a:noFill/>
+          <a:ln/>
+        </p:spPr>
+        <p:txBody>
+          <a:bodyPr wrap="square" lIns="0" tIns="0" rIns="0" bIns="0" rtlCol="0" anchor="ctr"/>
+          <a:lstStyle/>
+          <a:p>
+            <a:pPr marL="0" indent="0" algn="ctr">
+              <a:buNone/>
+            </a:pPr>
+            <a:r>
+              <a:rPr lang="en-US" sz="1300" b="1" dirty="0">
+                <a:solidFill>
+                  <a:srgbClr val="FFFFFF"/>
+                </a:solidFill>
+                <a:latin typeface="Calibri" pitchFamily="34" charset="0"/>
+                <a:ea typeface="Calibri" pitchFamily="34" charset="-122"/>
+                <a:cs typeface="Calibri" pitchFamily="34" charset="-120"/>
+              </a:rPr>
+              <a:t>4</a:t>
+            </a:r>
+            <a:endParaRPr lang="en-US" sz="1300" dirty="0"/>
+          </a:p>
+        </p:txBody>
+      </p:sp>
+      <p:sp>
+        <p:nvSpPr>
+          <p:cNvPr id="19" name="Text 17"/>
+          <p:cNvSpPr txBox="1"/>
+          <p:nvPr/>
+        </p:nvSpPr>
+        <p:spPr>
+          <a:xfrm>
+            <a:off x="1188720" y="4160520"/>
+            <a:ext cx="8055864" cy="292608"/>
+          </a:xfrm>
+          <a:prstGeom prst="rect">
+            <a:avLst/>
+          </a:prstGeom>
+          <a:noFill/>
+          <a:ln/>
+        </p:spPr>
+        <p:txBody>
+          <a:bodyPr wrap="square" lIns="0" tIns="0" rIns="0" bIns="0" rtlCol="0" anchor="ctr"/>
+          <a:lstStyle/>
+          <a:p>
+            <a:pPr marL="0" indent="0">
+              <a:buNone/>
+            </a:pPr>
+            <a:r>
+              <a:rPr lang="en-US" sz="1550" b="1" dirty="0">
+                <a:solidFill>
+                  <a:srgbClr val="FFFFFF"/>
+                </a:solidFill>
+                <a:latin typeface="Calibri" pitchFamily="34" charset="0"/>
+                <a:ea typeface="Calibri" pitchFamily="34" charset="-122"/>
+                <a:cs typeface="Calibri" pitchFamily="34" charset="-120"/>
+              </a:rPr>
+              <a:t>And in every one of them, the part no tool does for you</a:t>
+            </a:r>
+            <a:endParaRPr lang="en-US" sz="1550" dirty="0"/>
+          </a:p>
+        </p:txBody>
+      </p:sp>
+      <p:sp>
+        <p:nvSpPr>
+          <p:cNvPr id="20" name="Text 18"/>
+          <p:cNvSpPr txBox="1"/>
+          <p:nvPr/>
+        </p:nvSpPr>
+        <p:spPr>
+          <a:xfrm>
+            <a:off x="1188720" y="4471416"/>
+            <a:ext cx="8055864" cy="292608"/>
+          </a:xfrm>
+          <a:prstGeom prst="rect">
+            <a:avLst/>
+          </a:prstGeom>
+          <a:noFill/>
+          <a:ln/>
+        </p:spPr>
+        <p:txBody>
+          <a:bodyPr wrap="square" lIns="0" tIns="0" rIns="0" bIns="0" rtlCol="0" anchor="ctr"/>
+          <a:lstStyle/>
+          <a:p>
+            <a:pPr marL="0" indent="0">
+              <a:buNone/>
+            </a:pPr>
+            <a:r>
+              <a:rPr lang="en-US" sz="1300" dirty="0">
+                <a:solidFill>
+                  <a:srgbClr val="9EC7E3"/>
+                </a:solidFill>
+                <a:latin typeface="Calibri" pitchFamily="34" charset="0"/>
+                <a:ea typeface="Calibri" pitchFamily="34" charset="-122"/>
+                <a:cs typeface="Calibri" pitchFamily="34" charset="-120"/>
+              </a:rPr>
+              <a:t>deciding what to ask, and judging whether the answer holds</a:t>
+            </a:r>
+            <a:endParaRPr lang="en-US" sz="1300" dirty="0"/>
+          </a:p>
+        </p:txBody>
+      </p:sp>
+      <p:sp>
+        <p:nvSpPr>
+          <p:cNvPr id="21" name="Shape 19"/>
+          <p:cNvSpPr/>
+          <p:nvPr/>
+        </p:nvSpPr>
+        <p:spPr>
+          <a:xfrm>
+            <a:off x="566928" y="5193792"/>
+            <a:ext cx="11057839" cy="960120"/>
+          </a:xfrm>
+          <a:prstGeom prst="roundRect">
+            <a:avLst>
+              <a:gd name="adj" fmla="val 4762"/>
+            </a:avLst>
+          </a:prstGeom>
+          <a:solidFill>
+            <a:srgbClr val="FFFFFF">
+              <a:alpha val="10000"/>
+            </a:srgbClr>
+          </a:solidFill>
+          <a:ln w="9525">
+            <a:solidFill>
+              <a:srgbClr val="9EC7E3">
+                <a:alpha val="45000"/>
+              </a:srgbClr>
+            </a:solidFill>
+            <a:prstDash val="solid"/>
+          </a:ln>
+        </p:spPr>
+        <p:txBody>
+          <a:bodyPr/>
+          <a:lstStyle/>
+          <a:p>
+            <a:endParaRPr lang="en-US"/>
+          </a:p>
+        </p:txBody>
+      </p:sp>
+      <p:sp>
+        <p:nvSpPr>
+          <p:cNvPr id="22" name="Text 20"/>
+          <p:cNvSpPr txBox="1"/>
+          <p:nvPr/>
+        </p:nvSpPr>
+        <p:spPr>
+          <a:xfrm>
+            <a:off x="932688" y="5193792"/>
+            <a:ext cx="10326319" cy="960120"/>
           </a:xfrm>
           <a:prstGeom prst="rect">
             <a:avLst/>
@@ -10575,68 +10670,98 @@
           <a:p>
             <a:pPr marL="0" indent="0">
               <a:lnSpc>
-                <a:spcPts val="2000"/>
+                <a:spcPts val="2200"/>
               </a:lnSpc>
               <a:buNone/>
             </a:pPr>
             <a:r>
-              <a:rPr lang="en-US" sz="1500" b="1" dirty="0">
-                <a:solidFill>
-                  <a:srgbClr val="003366"/>
-                </a:solidFill>
-                <a:latin typeface="Calibri" pitchFamily="34" charset="0"/>
-                <a:ea typeface="Calibri" pitchFamily="34" charset="-122"/>
-                <a:cs typeface="Calibri" pitchFamily="34" charset="-120"/>
-              </a:rPr>
-              <a:t>It survives the rebuild</a:t>
-            </a:r>
-          </a:p>
-        </p:txBody>
-      </p:sp>
-      <p:sp>
-        <p:nvSpPr>
-          <p:cNvPr id="13" name="Text 11"/>
-          <p:cNvSpPr txBox="1"/>
-          <p:nvPr/>
-        </p:nvSpPr>
-        <p:spPr>
-          <a:xfrm>
-            <a:off x="8430768" y="4526280"/>
-            <a:ext cx="2923946" cy="1280160"/>
-          </a:xfrm>
-          <a:prstGeom prst="rect">
-            <a:avLst/>
-          </a:prstGeom>
-          <a:noFill/>
-          <a:ln/>
-        </p:spPr>
-        <p:txBody>
-          <a:bodyPr wrap="square" lIns="0" tIns="0" rIns="0" bIns="0" rtlCol="0" anchor="ctr"/>
-          <a:lstStyle/>
+              <a:rPr lang="en-US" sz="1350" dirty="0">
+                <a:solidFill>
+                  <a:srgbClr val="9EC7E3"/>
+                </a:solidFill>
+                <a:latin typeface="Calibri" pitchFamily="34" charset="0"/>
+                <a:ea typeface="Calibri" pitchFamily="34" charset="-122"/>
+                <a:cs typeface="Calibri" pitchFamily="34" charset="-120"/>
+              </a:rPr>
+              <a:t>Seven handouts — the full 45-minute version of every block you just saw — in </a:t>
+            </a:r>
+            <a:r>
+              <a:rPr lang="en-US" sz="1350" dirty="0">
+                <a:solidFill>
+                  <a:srgbClr val="FFFFFF"/>
+                </a:solidFill>
+                <a:latin typeface="Courier New" pitchFamily="34" charset="0"/>
+                <a:ea typeface="Courier New" pitchFamily="34" charset="-122"/>
+                <a:cs typeface="Courier New" pitchFamily="34" charset="-120"/>
+              </a:rPr>
+              <a:t>9_misc/handouts/</a:t>
+            </a:r>
+            <a:endParaRPr lang="en-US" sz="1350" dirty="0"/>
+          </a:p>
           <a:p>
             <a:pPr marL="0" indent="0">
               <a:lnSpc>
-                <a:spcPts val="1800"/>
+                <a:spcPts val="2200"/>
               </a:lnSpc>
               <a:buNone/>
             </a:pPr>
             <a:r>
-              <a:rPr lang="en-US" sz="1250" dirty="0">
-                <a:solidFill>
-                  <a:srgbClr val="3D4451"/>
-                </a:solidFill>
-                <a:latin typeface="Calibri" pitchFamily="34" charset="0"/>
-                <a:ea typeface="Calibri" pitchFamily="34" charset="-122"/>
-                <a:cs typeface="Calibri" pitchFamily="34" charset="-120"/>
-              </a:rPr>
-              <a:t>TIP rebuilds your machine without warning. Run the same line again: it repairs the setup and updates the material.</a:t>
-            </a:r>
-          </a:p>
-        </p:txBody>
-      </p:sp>
-      <p:sp>
-        <p:nvSpPr>
-          <p:cNvPr id="15" name="Text 12"/>
+              <a:rPr lang="en-US" sz="1350" dirty="0">
+                <a:solidFill>
+                  <a:srgbClr val="FFFFFF"/>
+                </a:solidFill>
+                <a:latin typeface="Courier New" pitchFamily="34" charset="0"/>
+                <a:ea typeface="Courier New" pitchFamily="34" charset="-122"/>
+                <a:cs typeface="Courier New" pitchFamily="34" charset="-120"/>
+              </a:rPr>
+              <a:t>github.com/mtcberlin/epo-tip4patlibs</a:t>
+            </a:r>
+            <a:endParaRPr lang="en-US" sz="1350" dirty="0"/>
+          </a:p>
+        </p:txBody>
+      </p:sp>
+      <p:sp>
+        <p:nvSpPr>
+          <p:cNvPr id="23" name="Text 21"/>
+          <p:cNvSpPr txBox="1"/>
+          <p:nvPr/>
+        </p:nvSpPr>
+        <p:spPr>
+          <a:xfrm>
+            <a:off x="4309567" y="6382512"/>
+            <a:ext cx="7315200" cy="274320"/>
+          </a:xfrm>
+          <a:prstGeom prst="rect">
+            <a:avLst/>
+          </a:prstGeom>
+          <a:noFill/>
+          <a:ln/>
+        </p:spPr>
+        <p:txBody>
+          <a:bodyPr wrap="square" lIns="0" tIns="0" rIns="0" bIns="0" rtlCol="0" anchor="ctr"/>
+          <a:lstStyle/>
+          <a:p>
+            <a:pPr marL="0" indent="0" algn="r">
+              <a:buNone/>
+            </a:pPr>
+            <a:r>
+              <a:rPr lang="en-US" sz="1150" dirty="0">
+                <a:solidFill>
+                  <a:srgbClr val="7E96AE"/>
+                </a:solidFill>
+                <a:latin typeface="Calibri" pitchFamily="34" charset="0"/>
+                <a:ea typeface="Calibri" pitchFamily="34" charset="-122"/>
+                <a:cs typeface="Calibri" pitchFamily="34" charset="-120"/>
+              </a:rPr>
+              <a:t>Arne Krüger · mtc.berlin      ·      Riccardo Priore · Centro PATLIB, AREA Science Park</a:t>
+            </a:r>
+            <a:endParaRPr lang="en-US" sz="1150" dirty="0"/>
+          </a:p>
+        </p:txBody>
+      </p:sp>
+      <p:sp>
+        <p:nvSpPr>
+          <p:cNvPr id="25" name="Text 22"/>
           <p:cNvSpPr txBox="1"/>
           <p:nvPr/>
         </p:nvSpPr>
@@ -10661,107 +10786,71 @@
             <a:r>
               <a:rPr lang="en-US" sz="900" kern="0" spc="100" dirty="0">
                 <a:solidFill>
-                  <a:srgbClr val="6B7280"/>
-                </a:solidFill>
-                <a:latin typeface="Calibri" pitchFamily="34" charset="0"/>
-                <a:ea typeface="Calibri" pitchFamily="34" charset="-122"/>
-                <a:cs typeface="Calibri" pitchFamily="34" charset="-120"/>
-              </a:rPr>
-              <a:t>TIP4PATLIBS  ·  4 / 20</a:t>
+                  <a:srgbClr val="7E96AE"/>
+                </a:solidFill>
+                <a:latin typeface="Calibri" pitchFamily="34" charset="0"/>
+                <a:ea typeface="Calibri" pitchFamily="34" charset="-122"/>
+                <a:cs typeface="Calibri" pitchFamily="34" charset="-120"/>
+              </a:rPr>
+              <a:t>TIP4PATLIBS  ·  20 / 20</a:t>
             </a:r>
             <a:endParaRPr lang="en-US" sz="900" dirty="0"/>
           </a:p>
         </p:txBody>
       </p:sp>
-      <p:sp>
-        <p:nvSpPr>
-          <p:cNvPr id="14" name="Shape 3">
-            <a:extLst>
-              <a:ext uri="{FF2B5EF4-FFF2-40B4-BE49-F238E27FC236}">
-                <a16:creationId xmlns:a16="http://schemas.microsoft.com/office/drawing/2014/main" id="{A0AACD00-ADAE-9FDE-77F7-AA4FDB75AC10}"/>
-              </a:ext>
-            </a:extLst>
-          </p:cNvPr>
-          <p:cNvSpPr/>
-          <p:nvPr/>
-        </p:nvSpPr>
-        <p:spPr>
-          <a:xfrm>
-            <a:off x="566927" y="2606040"/>
-            <a:ext cx="11057840" cy="1051560"/>
-          </a:xfrm>
-          <a:prstGeom prst="roundRect">
-            <a:avLst>
-              <a:gd name="adj" fmla="val 1838"/>
-            </a:avLst>
-          </a:prstGeom>
-          <a:solidFill>
-            <a:srgbClr val="0A1628"/>
-          </a:solidFill>
-          <a:ln>
-            <a:noFill/>
-          </a:ln>
-        </p:spPr>
-        <p:txBody>
-          <a:bodyPr/>
-          <a:lstStyle/>
-          <a:p>
-            <a:endParaRPr lang="en-US"/>
-          </a:p>
-        </p:txBody>
-      </p:sp>
-      <p:sp>
-        <p:nvSpPr>
-          <p:cNvPr id="16" name="Text 7">
-            <a:extLst>
-              <a:ext uri="{FF2B5EF4-FFF2-40B4-BE49-F238E27FC236}">
-                <a16:creationId xmlns:a16="http://schemas.microsoft.com/office/drawing/2014/main" id="{92091D59-A65C-7302-1B22-A8FA32AF57A5}"/>
-              </a:ext>
-            </a:extLst>
-          </p:cNvPr>
-          <p:cNvSpPr txBox="1"/>
-          <p:nvPr/>
-        </p:nvSpPr>
-        <p:spPr>
-          <a:xfrm>
-            <a:off x="841248" y="2697480"/>
-            <a:ext cx="10506456" cy="868680"/>
-          </a:xfrm>
-          <a:prstGeom prst="rect">
-            <a:avLst/>
-          </a:prstGeom>
-          <a:noFill/>
-          <a:ln/>
-        </p:spPr>
-        <p:txBody>
-          <a:bodyPr wrap="square" lIns="0" tIns="0" rIns="0" bIns="0" rtlCol="0" anchor="ctr"/>
-          <a:lstStyle/>
-          <a:p>
-            <a:r>
-              <a:rPr lang="en-US" sz="1050" b="1" kern="0" spc="220" dirty="0">
+      <p:pic>
+        <p:nvPicPr>
+          <p:cNvPr id="26" name="LinkedIn QR" descr="QR code: linkedin.com/in/herrkrueger"/>
+          <p:cNvPicPr>
+            <a:picLocks noChangeAspect="1"/>
+          </p:cNvPicPr>
+          <p:nvPr/>
+        </p:nvPicPr>
+        <p:blipFill>
+          <a:blip r:embed="rId3"/>
+          <a:stretch>
+            <a:fillRect/>
+          </a:stretch>
+        </p:blipFill>
+        <p:spPr>
+          <a:xfrm>
+            <a:off x="9518904" y="1691640"/>
+            <a:ext cx="2103120" cy="2103120"/>
+          </a:xfrm>
+          <a:prstGeom prst="rect">
+            <a:avLst/>
+          </a:prstGeom>
+        </p:spPr>
+      </p:pic>
+      <p:sp>
+        <p:nvSpPr>
+          <p:cNvPr id="27" name="LinkedIn caption"/>
+          <p:cNvSpPr txBox="1"/>
+          <p:nvPr/>
+        </p:nvSpPr>
+        <p:spPr>
+          <a:xfrm>
+            <a:off x="9518904" y="3886200"/>
+            <a:ext cx="2103120" cy="274320"/>
+          </a:xfrm>
+          <a:prstGeom prst="rect">
+            <a:avLst/>
+          </a:prstGeom>
+          <a:noFill/>
+        </p:spPr>
+        <p:txBody>
+          <a:bodyPr wrap="square" lIns="0" tIns="0" rIns="0" bIns="0" rtlCol="0" anchor="t"/>
+          <a:lstStyle/>
+          <a:p>
+            <a:pPr algn="ctr"/>
+            <a:r>
+              <a:rPr lang="en-US" sz="1100" dirty="0">
                 <a:solidFill>
                   <a:srgbClr val="9EC7E3"/>
                 </a:solidFill>
                 <a:latin typeface="Calibri"/>
               </a:rPr>
-              <a:t>TIP TERMINAL</a:t>
-            </a:r>
-          </a:p>
-          <a:p>
-            <a:pPr>
-              <a:spcBef>
-                <a:spcPts val="900"/>
-              </a:spcBef>
-            </a:pPr>
-            <a:r>
-              <a:rPr lang="en-US" sz="1400" dirty="0">
-                <a:solidFill>
-                  <a:srgbClr val="FFFFFF"/>
-                </a:solidFill>
-                <a:latin typeface="Courier New"/>
-                <a:cs typeface="Courier New"/>
-              </a:rPr>
-              <a:t>curl -fsSL https://raw.githubusercontent.com/mtcberlin/epo-tip4patlibs/main/install.sh | bash</a:t>
+              <a:t>Arne Krüger on LinkedIn</a:t>
             </a:r>
           </a:p>
         </p:txBody>
@@ -11520,6 +11609,680 @@
 
 <file path=ppt/slides/slide4.xml><?xml version="1.0" encoding="utf-8"?>
 <p:sld xmlns:a="http://schemas.openxmlformats.org/drawingml/2006/main" xmlns:r="http://schemas.openxmlformats.org/officeDocument/2006/relationships" xmlns:p="http://schemas.openxmlformats.org/presentationml/2006/main">
+  <p:cSld name="Slide 3">
+    <p:bg>
+      <p:bgPr>
+        <a:solidFill>
+          <a:srgbClr val="FFFFFF"/>
+        </a:solidFill>
+        <a:effectLst/>
+      </p:bgPr>
+    </p:bg>
+    <p:spTree>
+      <p:nvGrpSpPr>
+        <p:cNvPr id="1" name=""/>
+        <p:cNvGrpSpPr/>
+        <p:nvPr/>
+      </p:nvGrpSpPr>
+      <p:grpSpPr>
+        <a:xfrm>
+          <a:off x="0" y="0"/>
+          <a:ext cx="0" cy="0"/>
+          <a:chOff x="0" y="0"/>
+          <a:chExt cx="0" cy="0"/>
+        </a:xfrm>
+      </p:grpSpPr>
+      <p:sp>
+        <p:nvSpPr>
+          <p:cNvPr id="2" name="Text 0"/>
+          <p:cNvSpPr txBox="1"/>
+          <p:nvPr/>
+        </p:nvSpPr>
+        <p:spPr>
+          <a:xfrm>
+            <a:off x="566928" y="384048"/>
+            <a:ext cx="11057839" cy="256032"/>
+          </a:xfrm>
+          <a:prstGeom prst="rect">
+            <a:avLst/>
+          </a:prstGeom>
+          <a:noFill/>
+          <a:ln/>
+        </p:spPr>
+        <p:txBody>
+          <a:bodyPr wrap="square" lIns="0" tIns="0" rIns="0" bIns="0" rtlCol="0" anchor="ctr"/>
+          <a:lstStyle/>
+          <a:p>
+            <a:pPr marL="0" indent="0">
+              <a:buNone/>
+            </a:pPr>
+            <a:r>
+              <a:rPr lang="en-US" sz="1050" b="1" kern="0" spc="220" dirty="0">
+                <a:solidFill>
+                  <a:srgbClr val="C62828"/>
+                </a:solidFill>
+                <a:latin typeface="Calibri" pitchFamily="34" charset="0"/>
+                <a:ea typeface="Calibri" pitchFamily="34" charset="-122"/>
+                <a:cs typeface="Calibri" pitchFamily="34" charset="-120"/>
+              </a:rPr>
+              <a:t>BRING IT INTO YOUR OWN TIP</a:t>
+            </a:r>
+          </a:p>
+        </p:txBody>
+      </p:sp>
+      <p:sp>
+        <p:nvSpPr>
+          <p:cNvPr id="3" name="Text 1"/>
+          <p:cNvSpPr txBox="1"/>
+          <p:nvPr/>
+        </p:nvSpPr>
+        <p:spPr>
+          <a:xfrm>
+            <a:off x="566928" y="777240"/>
+            <a:ext cx="8778240" cy="1143000"/>
+          </a:xfrm>
+          <a:prstGeom prst="rect">
+            <a:avLst/>
+          </a:prstGeom>
+          <a:noFill/>
+          <a:ln/>
+        </p:spPr>
+        <p:txBody>
+          <a:bodyPr wrap="square" lIns="0" tIns="0" rIns="0" bIns="0" rtlCol="0" anchor="ctr"/>
+          <a:lstStyle/>
+          <a:p>
+            <a:pPr marL="0" indent="0">
+              <a:lnSpc>
+                <a:spcPts val="4000"/>
+              </a:lnSpc>
+              <a:buNone/>
+            </a:pPr>
+            <a:r>
+              <a:rPr lang="en-US" sz="3200" dirty="0">
+                <a:solidFill>
+                  <a:srgbClr val="003366"/>
+                </a:solidFill>
+                <a:latin typeface="Calibri" pitchFamily="34" charset="0"/>
+                <a:ea typeface="Calibri" pitchFamily="34" charset="-122"/>
+                <a:cs typeface="Calibri" pitchFamily="34" charset="-120"/>
+              </a:rPr>
+              <a:t>One command.</a:t>
+            </a:r>
+          </a:p>
+          <a:p>
+            <a:pPr marL="0" indent="0">
+              <a:lnSpc>
+                <a:spcPts val="4000"/>
+              </a:lnSpc>
+              <a:buNone/>
+            </a:pPr>
+            <a:r>
+              <a:rPr lang="en-US" sz="3200" dirty="0">
+                <a:solidFill>
+                  <a:srgbClr val="003366"/>
+                </a:solidFill>
+                <a:latin typeface="Calibri" pitchFamily="34" charset="0"/>
+                <a:ea typeface="Calibri" pitchFamily="34" charset="-122"/>
+                <a:cs typeface="Calibri" pitchFamily="34" charset="-120"/>
+              </a:rPr>
+              <a:t>Then you have everything.</a:t>
+            </a:r>
+          </a:p>
+        </p:txBody>
+      </p:sp>
+      <p:sp>
+        <p:nvSpPr>
+          <p:cNvPr id="4" name="Text 2"/>
+          <p:cNvSpPr txBox="1"/>
+          <p:nvPr/>
+        </p:nvSpPr>
+        <p:spPr>
+          <a:xfrm>
+            <a:off x="566928" y="2029968"/>
+            <a:ext cx="9509760" cy="411480"/>
+          </a:xfrm>
+          <a:prstGeom prst="rect">
+            <a:avLst/>
+          </a:prstGeom>
+          <a:noFill/>
+          <a:ln/>
+        </p:spPr>
+        <p:txBody>
+          <a:bodyPr wrap="square" lIns="0" tIns="0" rIns="0" bIns="0" rtlCol="0" anchor="ctr"/>
+          <a:lstStyle/>
+          <a:p>
+            <a:pPr marL="0" indent="0">
+              <a:lnSpc>
+                <a:spcPts val="2300"/>
+              </a:lnSpc>
+              <a:buNone/>
+            </a:pPr>
+            <a:r>
+              <a:rPr lang="en-US" sz="1500" dirty="0">
+                <a:solidFill>
+                  <a:srgbClr val="3D4451"/>
+                </a:solidFill>
+                <a:latin typeface="Calibri" pitchFamily="34" charset="0"/>
+                <a:ea typeface="Calibri" pitchFamily="34" charset="-122"/>
+                <a:cs typeface="Calibri" pitchFamily="34" charset="-120"/>
+              </a:rPr>
+              <a:t>Open https://</a:t>
+            </a:r>
+            <a:r>
+              <a:rPr lang="en-US" sz="1500" dirty="0" err="1">
+                <a:solidFill>
+                  <a:srgbClr val="3D4451"/>
+                </a:solidFill>
+                <a:latin typeface="Calibri" pitchFamily="34" charset="0"/>
+                <a:ea typeface="Calibri" pitchFamily="34" charset="-122"/>
+                <a:cs typeface="Calibri" pitchFamily="34" charset="-120"/>
+              </a:rPr>
+              <a:t>tip.epo.org</a:t>
+            </a:r>
+            <a:r>
+              <a:rPr lang="en-US" sz="1500" dirty="0">
+                <a:solidFill>
+                  <a:srgbClr val="3D4451"/>
+                </a:solidFill>
+                <a:latin typeface="Calibri" pitchFamily="34" charset="0"/>
+                <a:ea typeface="Calibri" pitchFamily="34" charset="-122"/>
+                <a:cs typeface="Calibri" pitchFamily="34" charset="-120"/>
+              </a:rPr>
+              <a:t>, log in with your EPO account, start a terminal (File → New → Terminal) and run this one line:</a:t>
+            </a:r>
+          </a:p>
+        </p:txBody>
+      </p:sp>
+      <p:sp>
+        <p:nvSpPr>
+          <p:cNvPr id="5" name="Shape 3"/>
+          <p:cNvSpPr/>
+          <p:nvPr/>
+        </p:nvSpPr>
+        <p:spPr>
+          <a:xfrm>
+            <a:off x="566927" y="3977640"/>
+            <a:ext cx="3472586" cy="1975104"/>
+          </a:xfrm>
+          <a:prstGeom prst="roundRect">
+            <a:avLst>
+              <a:gd name="adj" fmla="val 1838"/>
+            </a:avLst>
+          </a:prstGeom>
+          <a:solidFill>
+            <a:srgbClr val="EEF2F7"/>
+          </a:solidFill>
+          <a:ln w="12700">
+            <a:solidFill>
+              <a:srgbClr val="DCE3EB"/>
+            </a:solidFill>
+            <a:prstDash val="solid"/>
+          </a:ln>
+        </p:spPr>
+        <p:txBody>
+          <a:bodyPr/>
+          <a:lstStyle/>
+          <a:p>
+            <a:endParaRPr lang="en-US"/>
+          </a:p>
+        </p:txBody>
+      </p:sp>
+      <p:sp>
+        <p:nvSpPr>
+          <p:cNvPr id="6" name="Text 4"/>
+          <p:cNvSpPr txBox="1"/>
+          <p:nvPr/>
+        </p:nvSpPr>
+        <p:spPr>
+          <a:xfrm>
+            <a:off x="841248" y="4123944"/>
+            <a:ext cx="2923946" cy="548640"/>
+          </a:xfrm>
+          <a:prstGeom prst="rect">
+            <a:avLst/>
+          </a:prstGeom>
+          <a:noFill/>
+          <a:ln/>
+        </p:spPr>
+        <p:txBody>
+          <a:bodyPr wrap="square" lIns="0" tIns="0" rIns="0" bIns="0" rtlCol="0" anchor="ctr"/>
+          <a:lstStyle/>
+          <a:p>
+            <a:pPr marL="0" indent="0">
+              <a:lnSpc>
+                <a:spcPts val="2000"/>
+              </a:lnSpc>
+              <a:buNone/>
+            </a:pPr>
+            <a:r>
+              <a:rPr lang="en-US" sz="1500" b="1" dirty="0">
+                <a:solidFill>
+                  <a:srgbClr val="003366"/>
+                </a:solidFill>
+                <a:latin typeface="Calibri" pitchFamily="34" charset="0"/>
+                <a:ea typeface="Calibri" pitchFamily="34" charset="-122"/>
+                <a:cs typeface="Calibri" pitchFamily="34" charset="-120"/>
+              </a:rPr>
+              <a:t>The five modules</a:t>
+            </a:r>
+          </a:p>
+        </p:txBody>
+      </p:sp>
+      <p:sp>
+        <p:nvSpPr>
+          <p:cNvPr id="7" name="Text 5"/>
+          <p:cNvSpPr txBox="1"/>
+          <p:nvPr/>
+        </p:nvSpPr>
+        <p:spPr>
+          <a:xfrm>
+            <a:off x="841248" y="4526280"/>
+            <a:ext cx="2923946" cy="1280160"/>
+          </a:xfrm>
+          <a:prstGeom prst="rect">
+            <a:avLst/>
+          </a:prstGeom>
+          <a:noFill/>
+          <a:ln/>
+        </p:spPr>
+        <p:txBody>
+          <a:bodyPr wrap="square" lIns="0" tIns="0" rIns="0" bIns="0" rtlCol="0" anchor="ctr"/>
+          <a:lstStyle/>
+          <a:p>
+            <a:pPr marL="0" indent="0">
+              <a:lnSpc>
+                <a:spcPts val="1800"/>
+              </a:lnSpc>
+              <a:buNone/>
+            </a:pPr>
+            <a:r>
+              <a:rPr lang="en-US" sz="1250" dirty="0">
+                <a:solidFill>
+                  <a:srgbClr val="3D4451"/>
+                </a:solidFill>
+                <a:latin typeface="Calibri" pitchFamily="34" charset="0"/>
+                <a:ea typeface="Calibri" pitchFamily="34" charset="-122"/>
+                <a:cs typeface="Calibri" pitchFamily="34" charset="-120"/>
+              </a:rPr>
+              <a:t>Cloned into ~/epo-tip4patlibs, executed, with the code folded away. Open a folder and read.</a:t>
+            </a:r>
+          </a:p>
+        </p:txBody>
+      </p:sp>
+      <p:sp>
+        <p:nvSpPr>
+          <p:cNvPr id="8" name="Shape 6"/>
+          <p:cNvSpPr/>
+          <p:nvPr/>
+        </p:nvSpPr>
+        <p:spPr>
+          <a:xfrm>
+            <a:off x="4359554" y="3977640"/>
+            <a:ext cx="3472586" cy="1975104"/>
+          </a:xfrm>
+          <a:prstGeom prst="roundRect">
+            <a:avLst>
+              <a:gd name="adj" fmla="val 1838"/>
+            </a:avLst>
+          </a:prstGeom>
+          <a:solidFill>
+            <a:srgbClr val="EEF2F7"/>
+          </a:solidFill>
+          <a:ln w="12700">
+            <a:solidFill>
+              <a:srgbClr val="DCE3EB"/>
+            </a:solidFill>
+            <a:prstDash val="solid"/>
+          </a:ln>
+        </p:spPr>
+        <p:txBody>
+          <a:bodyPr/>
+          <a:lstStyle/>
+          <a:p>
+            <a:endParaRPr lang="en-US"/>
+          </a:p>
+        </p:txBody>
+      </p:sp>
+      <p:sp>
+        <p:nvSpPr>
+          <p:cNvPr id="9" name="Text 7"/>
+          <p:cNvSpPr txBox="1"/>
+          <p:nvPr/>
+        </p:nvSpPr>
+        <p:spPr>
+          <a:xfrm>
+            <a:off x="4636008" y="4123944"/>
+            <a:ext cx="2923946" cy="548640"/>
+          </a:xfrm>
+          <a:prstGeom prst="rect">
+            <a:avLst/>
+          </a:prstGeom>
+          <a:noFill/>
+          <a:ln/>
+        </p:spPr>
+        <p:txBody>
+          <a:bodyPr wrap="square" lIns="0" tIns="0" rIns="0" bIns="0" rtlCol="0" anchor="ctr"/>
+          <a:lstStyle/>
+          <a:p>
+            <a:pPr marL="0" indent="0">
+              <a:lnSpc>
+                <a:spcPts val="2000"/>
+              </a:lnSpc>
+              <a:buNone/>
+            </a:pPr>
+            <a:r>
+              <a:rPr lang="en-US" sz="1500" b="1" dirty="0">
+                <a:solidFill>
+                  <a:srgbClr val="003366"/>
+                </a:solidFill>
+                <a:latin typeface="Calibri" pitchFamily="34" charset="0"/>
+                <a:ea typeface="Calibri" pitchFamily="34" charset="-122"/>
+                <a:cs typeface="Calibri" pitchFamily="34" charset="-120"/>
+              </a:rPr>
+              <a:t>An assistant on standby</a:t>
+            </a:r>
+          </a:p>
+        </p:txBody>
+      </p:sp>
+      <p:sp>
+        <p:nvSpPr>
+          <p:cNvPr id="10" name="Text 8"/>
+          <p:cNvSpPr txBox="1"/>
+          <p:nvPr/>
+        </p:nvSpPr>
+        <p:spPr>
+          <a:xfrm>
+            <a:off x="4636008" y="4526280"/>
+            <a:ext cx="2923946" cy="1280160"/>
+          </a:xfrm>
+          <a:prstGeom prst="rect">
+            <a:avLst/>
+          </a:prstGeom>
+          <a:noFill/>
+          <a:ln/>
+        </p:spPr>
+        <p:txBody>
+          <a:bodyPr wrap="square" lIns="0" tIns="0" rIns="0" bIns="0" rtlCol="0" anchor="ctr"/>
+          <a:lstStyle/>
+          <a:p>
+            <a:pPr marL="0" indent="0">
+              <a:lnSpc>
+                <a:spcPts val="1800"/>
+              </a:lnSpc>
+              <a:buNone/>
+            </a:pPr>
+            <a:r>
+              <a:rPr lang="en-US" sz="1250" dirty="0">
+                <a:solidFill>
+                  <a:srgbClr val="3D4451"/>
+                </a:solidFill>
+                <a:latin typeface="Calibri" pitchFamily="34" charset="0"/>
+                <a:ea typeface="Calibri" pitchFamily="34" charset="-122"/>
+                <a:cs typeface="Calibri" pitchFamily="34" charset="-120"/>
+              </a:rPr>
+              <a:t>Installed and waiting. Sign in only when you want to change a notebook or build your own analysis.</a:t>
+            </a:r>
+          </a:p>
+        </p:txBody>
+      </p:sp>
+      <p:sp>
+        <p:nvSpPr>
+          <p:cNvPr id="11" name="Shape 9"/>
+          <p:cNvSpPr/>
+          <p:nvPr/>
+        </p:nvSpPr>
+        <p:spPr>
+          <a:xfrm>
+            <a:off x="8152181" y="3977640"/>
+            <a:ext cx="3472586" cy="1975104"/>
+          </a:xfrm>
+          <a:prstGeom prst="roundRect">
+            <a:avLst>
+              <a:gd name="adj" fmla="val 1838"/>
+            </a:avLst>
+          </a:prstGeom>
+          <a:solidFill>
+            <a:srgbClr val="EEF2F7"/>
+          </a:solidFill>
+          <a:ln w="12700">
+            <a:solidFill>
+              <a:srgbClr val="DCE3EB"/>
+            </a:solidFill>
+            <a:prstDash val="solid"/>
+          </a:ln>
+        </p:spPr>
+        <p:txBody>
+          <a:bodyPr/>
+          <a:lstStyle/>
+          <a:p>
+            <a:endParaRPr lang="en-US"/>
+          </a:p>
+        </p:txBody>
+      </p:sp>
+      <p:sp>
+        <p:nvSpPr>
+          <p:cNvPr id="12" name="Text 10"/>
+          <p:cNvSpPr txBox="1"/>
+          <p:nvPr/>
+        </p:nvSpPr>
+        <p:spPr>
+          <a:xfrm>
+            <a:off x="8430768" y="4123944"/>
+            <a:ext cx="2923946" cy="548640"/>
+          </a:xfrm>
+          <a:prstGeom prst="rect">
+            <a:avLst/>
+          </a:prstGeom>
+          <a:noFill/>
+          <a:ln/>
+        </p:spPr>
+        <p:txBody>
+          <a:bodyPr wrap="square" lIns="0" tIns="0" rIns="0" bIns="0" rtlCol="0" anchor="ctr"/>
+          <a:lstStyle/>
+          <a:p>
+            <a:pPr marL="0" indent="0">
+              <a:lnSpc>
+                <a:spcPts val="2000"/>
+              </a:lnSpc>
+              <a:buNone/>
+            </a:pPr>
+            <a:r>
+              <a:rPr lang="en-US" sz="1500" b="1" dirty="0">
+                <a:solidFill>
+                  <a:srgbClr val="003366"/>
+                </a:solidFill>
+                <a:latin typeface="Calibri" pitchFamily="34" charset="0"/>
+                <a:ea typeface="Calibri" pitchFamily="34" charset="-122"/>
+                <a:cs typeface="Calibri" pitchFamily="34" charset="-120"/>
+              </a:rPr>
+              <a:t>It survives the rebuild</a:t>
+            </a:r>
+          </a:p>
+        </p:txBody>
+      </p:sp>
+      <p:sp>
+        <p:nvSpPr>
+          <p:cNvPr id="13" name="Text 11"/>
+          <p:cNvSpPr txBox="1"/>
+          <p:nvPr/>
+        </p:nvSpPr>
+        <p:spPr>
+          <a:xfrm>
+            <a:off x="8430768" y="4526280"/>
+            <a:ext cx="2923946" cy="1280160"/>
+          </a:xfrm>
+          <a:prstGeom prst="rect">
+            <a:avLst/>
+          </a:prstGeom>
+          <a:noFill/>
+          <a:ln/>
+        </p:spPr>
+        <p:txBody>
+          <a:bodyPr wrap="square" lIns="0" tIns="0" rIns="0" bIns="0" rtlCol="0" anchor="ctr"/>
+          <a:lstStyle/>
+          <a:p>
+            <a:pPr marL="0" indent="0">
+              <a:lnSpc>
+                <a:spcPts val="1800"/>
+              </a:lnSpc>
+              <a:buNone/>
+            </a:pPr>
+            <a:r>
+              <a:rPr lang="en-US" sz="1250" dirty="0">
+                <a:solidFill>
+                  <a:srgbClr val="3D4451"/>
+                </a:solidFill>
+                <a:latin typeface="Calibri" pitchFamily="34" charset="0"/>
+                <a:ea typeface="Calibri" pitchFamily="34" charset="-122"/>
+                <a:cs typeface="Calibri" pitchFamily="34" charset="-120"/>
+              </a:rPr>
+              <a:t>TIP rebuilds your machine without warning. Run the same line again: it repairs the setup and updates the material.</a:t>
+            </a:r>
+          </a:p>
+        </p:txBody>
+      </p:sp>
+      <p:sp>
+        <p:nvSpPr>
+          <p:cNvPr id="15" name="Text 12"/>
+          <p:cNvSpPr txBox="1"/>
+          <p:nvPr/>
+        </p:nvSpPr>
+        <p:spPr>
+          <a:xfrm>
+            <a:off x="566928" y="6382512"/>
+            <a:ext cx="5486400" cy="274320"/>
+          </a:xfrm>
+          <a:prstGeom prst="rect">
+            <a:avLst/>
+          </a:prstGeom>
+          <a:noFill/>
+          <a:ln/>
+        </p:spPr>
+        <p:txBody>
+          <a:bodyPr wrap="square" lIns="0" tIns="0" rIns="0" bIns="0" rtlCol="0" anchor="ctr"/>
+          <a:lstStyle/>
+          <a:p>
+            <a:pPr marL="0" indent="0">
+              <a:buNone/>
+            </a:pPr>
+            <a:r>
+              <a:rPr lang="en-US" sz="900" kern="0" spc="100" dirty="0">
+                <a:solidFill>
+                  <a:srgbClr val="6B7280"/>
+                </a:solidFill>
+                <a:latin typeface="Calibri" pitchFamily="34" charset="0"/>
+                <a:ea typeface="Calibri" pitchFamily="34" charset="-122"/>
+                <a:cs typeface="Calibri" pitchFamily="34" charset="-120"/>
+              </a:rPr>
+              <a:t>TIP4PATLIBS  ·  4 / 20</a:t>
+            </a:r>
+            <a:endParaRPr lang="en-US" sz="900" dirty="0"/>
+          </a:p>
+        </p:txBody>
+      </p:sp>
+      <p:sp>
+        <p:nvSpPr>
+          <p:cNvPr id="14" name="Shape 3">
+            <a:extLst>
+              <a:ext uri="{FF2B5EF4-FFF2-40B4-BE49-F238E27FC236}">
+                <a16:creationId xmlns:a16="http://schemas.microsoft.com/office/drawing/2014/main" id="{A0AACD00-ADAE-9FDE-77F7-AA4FDB75AC10}"/>
+              </a:ext>
+            </a:extLst>
+          </p:cNvPr>
+          <p:cNvSpPr/>
+          <p:nvPr/>
+        </p:nvSpPr>
+        <p:spPr>
+          <a:xfrm>
+            <a:off x="566927" y="2606040"/>
+            <a:ext cx="11057840" cy="1051560"/>
+          </a:xfrm>
+          <a:prstGeom prst="roundRect">
+            <a:avLst>
+              <a:gd name="adj" fmla="val 1838"/>
+            </a:avLst>
+          </a:prstGeom>
+          <a:solidFill>
+            <a:srgbClr val="0A1628"/>
+          </a:solidFill>
+          <a:ln>
+            <a:noFill/>
+          </a:ln>
+        </p:spPr>
+        <p:txBody>
+          <a:bodyPr/>
+          <a:lstStyle/>
+          <a:p>
+            <a:endParaRPr lang="en-US"/>
+          </a:p>
+        </p:txBody>
+      </p:sp>
+      <p:sp>
+        <p:nvSpPr>
+          <p:cNvPr id="16" name="Text 7">
+            <a:extLst>
+              <a:ext uri="{FF2B5EF4-FFF2-40B4-BE49-F238E27FC236}">
+                <a16:creationId xmlns:a16="http://schemas.microsoft.com/office/drawing/2014/main" id="{92091D59-A65C-7302-1B22-A8FA32AF57A5}"/>
+              </a:ext>
+            </a:extLst>
+          </p:cNvPr>
+          <p:cNvSpPr txBox="1"/>
+          <p:nvPr/>
+        </p:nvSpPr>
+        <p:spPr>
+          <a:xfrm>
+            <a:off x="841248" y="2697480"/>
+            <a:ext cx="10506456" cy="868680"/>
+          </a:xfrm>
+          <a:prstGeom prst="rect">
+            <a:avLst/>
+          </a:prstGeom>
+          <a:noFill/>
+          <a:ln/>
+        </p:spPr>
+        <p:txBody>
+          <a:bodyPr wrap="square" lIns="0" tIns="0" rIns="0" bIns="0" rtlCol="0" anchor="ctr"/>
+          <a:lstStyle/>
+          <a:p>
+            <a:r>
+              <a:rPr lang="en-US" sz="1050" b="1" kern="0" spc="220" dirty="0">
+                <a:solidFill>
+                  <a:srgbClr val="9EC7E3"/>
+                </a:solidFill>
+                <a:latin typeface="Calibri"/>
+              </a:rPr>
+              <a:t>TIP TERMINAL</a:t>
+            </a:r>
+          </a:p>
+          <a:p>
+            <a:pPr>
+              <a:spcBef>
+                <a:spcPts val="900"/>
+              </a:spcBef>
+            </a:pPr>
+            <a:r>
+              <a:rPr lang="en-US" sz="2400" dirty="0">
+                <a:solidFill>
+                  <a:srgbClr val="FFFFFF"/>
+                </a:solidFill>
+                <a:latin typeface="Courier New"/>
+                <a:cs typeface="Courier New"/>
+              </a:rPr>
+              <a:t>curl -fsSL https://tip.depa.tech/install | bash</a:t>
+            </a:r>
+          </a:p>
+        </p:txBody>
+      </p:sp>
+    </p:spTree>
+  </p:cSld>
+  <p:clrMapOvr>
+    <a:masterClrMapping/>
+  </p:clrMapOvr>
+</p:sld>
+</file>
+
+<file path=ppt/slides/slide5.xml><?xml version="1.0" encoding="utf-8"?>
+<p:sld xmlns:a="http://schemas.openxmlformats.org/drawingml/2006/main" xmlns:r="http://schemas.openxmlformats.org/officeDocument/2006/relationships" xmlns:p="http://schemas.openxmlformats.org/presentationml/2006/main">
   <p:cSld name="Slide 4">
     <p:bg>
       <p:bgPr>
@@ -12266,7 +13029,7 @@
 </p:sld>
 </file>
 
-<file path=ppt/slides/slide5.xml><?xml version="1.0" encoding="utf-8"?>
+<file path=ppt/slides/slide6.xml><?xml version="1.0" encoding="utf-8"?>
 <p:sld xmlns:a="http://schemas.openxmlformats.org/drawingml/2006/main" xmlns:r="http://schemas.openxmlformats.org/officeDocument/2006/relationships" xmlns:p="http://schemas.openxmlformats.org/presentationml/2006/main">
   <p:cSld name="Slide 5">
     <p:bg>
@@ -12883,7 +13646,7 @@
 </p:sld>
 </file>
 
-<file path=ppt/slides/slide6.xml><?xml version="1.0" encoding="utf-8"?>
+<file path=ppt/slides/slide7.xml><?xml version="1.0" encoding="utf-8"?>
 <p:sld xmlns:a="http://schemas.openxmlformats.org/drawingml/2006/main" xmlns:r="http://schemas.openxmlformats.org/officeDocument/2006/relationships" xmlns:p="http://schemas.openxmlformats.org/presentationml/2006/main">
   <p:cSld name="Slide 6">
     <p:bg>
@@ -14235,7 +14998,7 @@
 </p:sld>
 </file>
 
-<file path=ppt/slides/slide7.xml><?xml version="1.0" encoding="utf-8"?>
+<file path=ppt/slides/slide8.xml><?xml version="1.0" encoding="utf-8"?>
 <p:sld xmlns:a="http://schemas.openxmlformats.org/drawingml/2006/main" xmlns:r="http://schemas.openxmlformats.org/officeDocument/2006/relationships" xmlns:p="http://schemas.openxmlformats.org/presentationml/2006/main">
   <p:cSld name="Slide 7">
     <p:bg>
@@ -14976,7 +15739,7 @@
 </p:sld>
 </file>
 
-<file path=ppt/slides/slide8.xml><?xml version="1.0" encoding="utf-8"?>
+<file path=ppt/slides/slide9.xml><?xml version="1.0" encoding="utf-8"?>
 <p:sld xmlns:a="http://schemas.openxmlformats.org/drawingml/2006/main" xmlns:r="http://schemas.openxmlformats.org/officeDocument/2006/relationships" xmlns:p="http://schemas.openxmlformats.org/presentationml/2006/main">
   <p:cSld name="Slide 8">
     <p:bg>
@@ -15543,747 +16306,6 @@
                 <a:cs typeface="Calibri" pitchFamily="34" charset="-120"/>
               </a:rPr>
               <a:t>TIP4PATLIBS  ·  9 / 20</a:t>
-            </a:r>
-            <a:endParaRPr lang="en-US" sz="900" dirty="0"/>
-          </a:p>
-        </p:txBody>
-      </p:sp>
-    </p:spTree>
-  </p:cSld>
-  <p:clrMapOvr>
-    <a:masterClrMapping/>
-  </p:clrMapOvr>
-</p:sld>
-</file>
-
-<file path=ppt/slides/slide9.xml><?xml version="1.0" encoding="utf-8"?>
-<p:sld xmlns:a="http://schemas.openxmlformats.org/drawingml/2006/main" xmlns:r="http://schemas.openxmlformats.org/officeDocument/2006/relationships" xmlns:p="http://schemas.openxmlformats.org/presentationml/2006/main">
-  <p:cSld name="Slide 9">
-    <p:bg>
-      <p:bgPr>
-        <a:solidFill>
-          <a:srgbClr val="FFFFFF"/>
-        </a:solidFill>
-        <a:effectLst/>
-      </p:bgPr>
-    </p:bg>
-    <p:spTree>
-      <p:nvGrpSpPr>
-        <p:cNvPr id="1" name=""/>
-        <p:cNvGrpSpPr/>
-        <p:nvPr/>
-      </p:nvGrpSpPr>
-      <p:grpSpPr>
-        <a:xfrm>
-          <a:off x="0" y="0"/>
-          <a:ext cx="0" cy="0"/>
-          <a:chOff x="0" y="0"/>
-          <a:chExt cx="0" cy="0"/>
-        </a:xfrm>
-      </p:grpSpPr>
-      <p:sp>
-        <p:nvSpPr>
-          <p:cNvPr id="2" name="Text 0"/>
-          <p:cNvSpPr txBox="1"/>
-          <p:nvPr/>
-        </p:nvSpPr>
-        <p:spPr>
-          <a:xfrm>
-            <a:off x="566928" y="384048"/>
-            <a:ext cx="11057839" cy="256032"/>
-          </a:xfrm>
-          <a:prstGeom prst="rect">
-            <a:avLst/>
-          </a:prstGeom>
-          <a:noFill/>
-          <a:ln/>
-        </p:spPr>
-        <p:txBody>
-          <a:bodyPr wrap="square" lIns="0" tIns="0" rIns="0" bIns="0" rtlCol="0" anchor="ctr"/>
-          <a:lstStyle/>
-          <a:p>
-            <a:pPr marL="0" indent="0">
-              <a:buNone/>
-            </a:pPr>
-            <a:r>
-              <a:rPr lang="en-US" sz="1050" b="1" kern="0" spc="220" dirty="0">
-                <a:solidFill>
-                  <a:srgbClr val="C62828"/>
-                </a:solidFill>
-                <a:latin typeface="Calibri" pitchFamily="34" charset="0"/>
-                <a:ea typeface="Calibri" pitchFamily="34" charset="-122"/>
-                <a:cs typeface="Calibri" pitchFamily="34" charset="-120"/>
-              </a:rPr>
-              <a:t>ARNE  ·  THE CLAIM, THEN THE LADDER  ·  MODULE 1</a:t>
-            </a:r>
-            <a:endParaRPr lang="en-US" sz="1050" dirty="0"/>
-          </a:p>
-        </p:txBody>
-      </p:sp>
-      <p:sp>
-        <p:nvSpPr>
-          <p:cNvPr id="3" name="Shape 1"/>
-          <p:cNvSpPr/>
-          <p:nvPr/>
-        </p:nvSpPr>
-        <p:spPr>
-          <a:xfrm>
-            <a:off x="566928" y="777240"/>
-            <a:ext cx="566928" cy="566928"/>
-          </a:xfrm>
-          <a:prstGeom prst="ellipse">
-            <a:avLst/>
-          </a:prstGeom>
-          <a:solidFill>
-            <a:srgbClr val="003366"/>
-          </a:solidFill>
-          <a:ln w="12700">
-            <a:solidFill>
-              <a:srgbClr val="003366"/>
-            </a:solidFill>
-            <a:prstDash val="solid"/>
-          </a:ln>
-        </p:spPr>
-        <p:txBody>
-          <a:bodyPr/>
-          <a:lstStyle/>
-          <a:p>
-            <a:endParaRPr lang="en-US"/>
-          </a:p>
-        </p:txBody>
-      </p:sp>
-      <p:sp>
-        <p:nvSpPr>
-          <p:cNvPr id="4" name="Text 2"/>
-          <p:cNvSpPr txBox="1"/>
-          <p:nvPr/>
-        </p:nvSpPr>
-        <p:spPr>
-          <a:xfrm>
-            <a:off x="566928" y="777240"/>
-            <a:ext cx="566928" cy="566928"/>
-          </a:xfrm>
-          <a:prstGeom prst="rect">
-            <a:avLst/>
-          </a:prstGeom>
-          <a:noFill/>
-          <a:ln/>
-        </p:spPr>
-        <p:txBody>
-          <a:bodyPr wrap="square" lIns="0" tIns="0" rIns="0" bIns="0" rtlCol="0" anchor="ctr"/>
-          <a:lstStyle/>
-          <a:p>
-            <a:pPr marL="0" indent="0" algn="ctr">
-              <a:buNone/>
-            </a:pPr>
-            <a:r>
-              <a:rPr lang="en-US" sz="2000" b="1" dirty="0">
-                <a:solidFill>
-                  <a:srgbClr val="FFFFFF"/>
-                </a:solidFill>
-                <a:latin typeface="Calibri" pitchFamily="34" charset="0"/>
-                <a:ea typeface="Calibri" pitchFamily="34" charset="-122"/>
-                <a:cs typeface="Calibri" pitchFamily="34" charset="-120"/>
-              </a:rPr>
-              <a:t>1</a:t>
-            </a:r>
-            <a:endParaRPr lang="en-US" sz="2000" dirty="0"/>
-          </a:p>
-        </p:txBody>
-      </p:sp>
-      <p:sp>
-        <p:nvSpPr>
-          <p:cNvPr id="5" name="Text 3"/>
-          <p:cNvSpPr txBox="1"/>
-          <p:nvPr/>
-        </p:nvSpPr>
-        <p:spPr>
-          <a:xfrm>
-            <a:off x="1344168" y="768096"/>
-            <a:ext cx="7589520" cy="594360"/>
-          </a:xfrm>
-          <a:prstGeom prst="rect">
-            <a:avLst/>
-          </a:prstGeom>
-          <a:noFill/>
-          <a:ln/>
-        </p:spPr>
-        <p:txBody>
-          <a:bodyPr wrap="square" lIns="0" tIns="0" rIns="0" bIns="0" rtlCol="0" anchor="ctr"/>
-          <a:lstStyle/>
-          <a:p>
-            <a:pPr marL="0" indent="0">
-              <a:buNone/>
-            </a:pPr>
-            <a:r>
-              <a:rPr lang="en-US" sz="2800" b="1" dirty="0">
-                <a:solidFill>
-                  <a:srgbClr val="003366"/>
-                </a:solidFill>
-                <a:latin typeface="Calibri" pitchFamily="34" charset="0"/>
-                <a:ea typeface="Calibri" pitchFamily="34" charset="-122"/>
-                <a:cs typeface="Calibri" pitchFamily="34" charset="-120"/>
-              </a:rPr>
-              <a:t>The Query Library</a:t>
-            </a:r>
-            <a:endParaRPr lang="en-US" sz="2800" dirty="0"/>
-          </a:p>
-        </p:txBody>
-      </p:sp>
-      <p:sp>
-        <p:nvSpPr>
-          <p:cNvPr id="6" name="Text 4"/>
-          <p:cNvSpPr txBox="1"/>
-          <p:nvPr/>
-        </p:nvSpPr>
-        <p:spPr>
-          <a:xfrm>
-            <a:off x="8881567" y="841248"/>
-            <a:ext cx="2743200" cy="310896"/>
-          </a:xfrm>
-          <a:prstGeom prst="rect">
-            <a:avLst/>
-          </a:prstGeom>
-          <a:noFill/>
-          <a:ln/>
-        </p:spPr>
-        <p:txBody>
-          <a:bodyPr wrap="square" lIns="0" tIns="0" rIns="0" bIns="0" rtlCol="0" anchor="ctr"/>
-          <a:lstStyle/>
-          <a:p>
-            <a:pPr marL="0" indent="0" algn="r">
-              <a:buNone/>
-            </a:pPr>
-            <a:r>
-              <a:rPr lang="en-US" sz="1100" dirty="0">
-                <a:solidFill>
-                  <a:srgbClr val="6B7280"/>
-                </a:solidFill>
-                <a:latin typeface="Courier New" pitchFamily="34" charset="0"/>
-                <a:ea typeface="Courier New" pitchFamily="34" charset="-122"/>
-                <a:cs typeface="Courier New" pitchFamily="34" charset="-120"/>
-              </a:rPr>
-              <a:t>1_querylib/</a:t>
-            </a:r>
-            <a:endParaRPr lang="en-US" sz="1100" dirty="0"/>
-          </a:p>
-        </p:txBody>
-      </p:sp>
-      <p:sp>
-        <p:nvSpPr>
-          <p:cNvPr id="7" name="Shape 5"/>
-          <p:cNvSpPr/>
-          <p:nvPr/>
-        </p:nvSpPr>
-        <p:spPr>
-          <a:xfrm>
-            <a:off x="566928" y="1600200"/>
-            <a:ext cx="11057839" cy="1097280"/>
-          </a:xfrm>
-          <a:prstGeom prst="roundRect">
-            <a:avLst>
-              <a:gd name="adj" fmla="val 4167"/>
-            </a:avLst>
-          </a:prstGeom>
-          <a:solidFill>
-            <a:srgbClr val="003366"/>
-          </a:solidFill>
-          <a:ln w="12700">
-            <a:solidFill>
-              <a:srgbClr val="333333"/>
-            </a:solidFill>
-            <a:prstDash val="solid"/>
-          </a:ln>
-        </p:spPr>
-        <p:txBody>
-          <a:bodyPr/>
-          <a:lstStyle/>
-          <a:p>
-            <a:endParaRPr lang="en-US"/>
-          </a:p>
-        </p:txBody>
-      </p:sp>
-      <p:sp>
-        <p:nvSpPr>
-          <p:cNvPr id="8" name="Text 6"/>
-          <p:cNvSpPr txBox="1"/>
-          <p:nvPr/>
-        </p:nvSpPr>
-        <p:spPr>
-          <a:xfrm>
-            <a:off x="950976" y="1600200"/>
-            <a:ext cx="10289743" cy="1097280"/>
-          </a:xfrm>
-          <a:prstGeom prst="rect">
-            <a:avLst/>
-          </a:prstGeom>
-          <a:noFill/>
-          <a:ln/>
-        </p:spPr>
-        <p:txBody>
-          <a:bodyPr wrap="square" lIns="0" tIns="0" rIns="0" bIns="0" rtlCol="0" anchor="ctr"/>
-          <a:lstStyle/>
-          <a:p>
-            <a:pPr marL="0" indent="0">
-              <a:lnSpc>
-                <a:spcPts val="2400"/>
-              </a:lnSpc>
-              <a:buNone/>
-            </a:pPr>
-            <a:r>
-              <a:rPr lang="en-US" sz="1650" dirty="0">
-                <a:solidFill>
-                  <a:srgbClr val="FFFFFF"/>
-                </a:solidFill>
-                <a:latin typeface="Cambria" pitchFamily="34" charset="0"/>
-                <a:ea typeface="Cambria" pitchFamily="34" charset="-122"/>
-                <a:cs typeface="Cambria" pitchFamily="34" charset="-120"/>
-              </a:rPr>
-              <a:t>“A client walks in and asks: who in Europe is working on solid-state batteries?”</a:t>
-            </a:r>
-            <a:endParaRPr lang="en-US" sz="1650" dirty="0"/>
-          </a:p>
-        </p:txBody>
-      </p:sp>
-      <p:sp>
-        <p:nvSpPr>
-          <p:cNvPr id="9" name="Text 7"/>
-          <p:cNvSpPr txBox="1"/>
-          <p:nvPr/>
-        </p:nvSpPr>
-        <p:spPr>
-          <a:xfrm>
-            <a:off x="566928" y="2926080"/>
-            <a:ext cx="11057839" cy="274320"/>
-          </a:xfrm>
-          <a:prstGeom prst="rect">
-            <a:avLst/>
-          </a:prstGeom>
-          <a:noFill/>
-          <a:ln/>
-        </p:spPr>
-        <p:txBody>
-          <a:bodyPr wrap="square" lIns="0" tIns="0" rIns="0" bIns="0" rtlCol="0" anchor="ctr"/>
-          <a:lstStyle/>
-          <a:p>
-            <a:pPr marL="0" indent="0">
-              <a:buNone/>
-            </a:pPr>
-            <a:r>
-              <a:rPr lang="en-US" sz="1100" b="1" kern="0" spc="200" dirty="0">
-                <a:solidFill>
-                  <a:srgbClr val="C62828"/>
-                </a:solidFill>
-                <a:latin typeface="Calibri" pitchFamily="34" charset="0"/>
-                <a:ea typeface="Calibri" pitchFamily="34" charset="-122"/>
-                <a:cs typeface="Calibri" pitchFamily="34" charset="-120"/>
-              </a:rPr>
-              <a:t>WHY THE OBVIOUS ANSWER FAILS</a:t>
-            </a:r>
-            <a:endParaRPr lang="en-US" sz="1100" dirty="0"/>
-          </a:p>
-        </p:txBody>
-      </p:sp>
-      <p:sp>
-        <p:nvSpPr>
-          <p:cNvPr id="10" name="Shape 8"/>
-          <p:cNvSpPr/>
-          <p:nvPr/>
-        </p:nvSpPr>
-        <p:spPr>
-          <a:xfrm>
-            <a:off x="566928" y="3291840"/>
-            <a:ext cx="3472586" cy="1783080"/>
-          </a:xfrm>
-          <a:prstGeom prst="roundRect">
-            <a:avLst>
-              <a:gd name="adj" fmla="val 2564"/>
-            </a:avLst>
-          </a:prstGeom>
-          <a:solidFill>
-            <a:srgbClr val="EEF2F7"/>
-          </a:solidFill>
-          <a:ln w="12700">
-            <a:solidFill>
-              <a:srgbClr val="DCE3EB"/>
-            </a:solidFill>
-            <a:prstDash val="solid"/>
-          </a:ln>
-        </p:spPr>
-        <p:txBody>
-          <a:bodyPr/>
-          <a:lstStyle/>
-          <a:p>
-            <a:endParaRPr lang="en-US"/>
-          </a:p>
-        </p:txBody>
-      </p:sp>
-      <p:sp>
-        <p:nvSpPr>
-          <p:cNvPr id="11" name="Text 9"/>
-          <p:cNvSpPr txBox="1"/>
-          <p:nvPr/>
-        </p:nvSpPr>
-        <p:spPr>
-          <a:xfrm>
-            <a:off x="841248" y="3493008"/>
-            <a:ext cx="2923946" cy="1371600"/>
-          </a:xfrm>
-          <a:prstGeom prst="rect">
-            <a:avLst/>
-          </a:prstGeom>
-          <a:noFill/>
-          <a:ln/>
-        </p:spPr>
-        <p:txBody>
-          <a:bodyPr wrap="square" lIns="0" tIns="0" rIns="0" bIns="0" rtlCol="0" anchor="ctr"/>
-          <a:lstStyle/>
-          <a:p>
-            <a:pPr marL="0" indent="0">
-              <a:lnSpc>
-                <a:spcPts val="1900"/>
-              </a:lnSpc>
-              <a:buNone/>
-            </a:pPr>
-            <a:r>
-              <a:rPr lang="en-US" sz="1300" dirty="0">
-                <a:solidFill>
-                  <a:srgbClr val="3D4451"/>
-                </a:solidFill>
-                <a:latin typeface="Calibri" pitchFamily="34" charset="0"/>
-                <a:ea typeface="Calibri" pitchFamily="34" charset="-122"/>
-                <a:cs typeface="Calibri" pitchFamily="34" charset="-120"/>
-              </a:rPr>
-              <a:t>The first answer was always a keyword search. It is not wrong — it is simply the weakest instrument you have.</a:t>
-            </a:r>
-            <a:endParaRPr lang="en-US" sz="1300" dirty="0"/>
-          </a:p>
-        </p:txBody>
-      </p:sp>
-      <p:sp>
-        <p:nvSpPr>
-          <p:cNvPr id="12" name="Shape 10"/>
-          <p:cNvSpPr/>
-          <p:nvPr/>
-        </p:nvSpPr>
-        <p:spPr>
-          <a:xfrm>
-            <a:off x="4359554" y="3291840"/>
-            <a:ext cx="3472586" cy="1783080"/>
-          </a:xfrm>
-          <a:prstGeom prst="roundRect">
-            <a:avLst>
-              <a:gd name="adj" fmla="val 2564"/>
-            </a:avLst>
-          </a:prstGeom>
-          <a:solidFill>
-            <a:srgbClr val="EEF2F7"/>
-          </a:solidFill>
-          <a:ln w="12700">
-            <a:solidFill>
-              <a:srgbClr val="DCE3EB"/>
-            </a:solidFill>
-            <a:prstDash val="solid"/>
-          </a:ln>
-        </p:spPr>
-        <p:txBody>
-          <a:bodyPr/>
-          <a:lstStyle/>
-          <a:p>
-            <a:endParaRPr lang="en-US"/>
-          </a:p>
-        </p:txBody>
-      </p:sp>
-      <p:sp>
-        <p:nvSpPr>
-          <p:cNvPr id="13" name="Text 11"/>
-          <p:cNvSpPr txBox="1"/>
-          <p:nvPr/>
-        </p:nvSpPr>
-        <p:spPr>
-          <a:xfrm>
-            <a:off x="4633874" y="3493008"/>
-            <a:ext cx="2923946" cy="1371600"/>
-          </a:xfrm>
-          <a:prstGeom prst="rect">
-            <a:avLst/>
-          </a:prstGeom>
-          <a:noFill/>
-          <a:ln/>
-        </p:spPr>
-        <p:txBody>
-          <a:bodyPr wrap="square" lIns="0" tIns="0" rIns="0" bIns="0" rtlCol="0" anchor="ctr"/>
-          <a:lstStyle/>
-          <a:p>
-            <a:pPr marL="0" indent="0">
-              <a:lnSpc>
-                <a:spcPts val="1900"/>
-              </a:lnSpc>
-              <a:buNone/>
-            </a:pPr>
-            <a:r>
-              <a:rPr lang="en-US" sz="1300" dirty="0">
-                <a:solidFill>
-                  <a:srgbClr val="3D4451"/>
-                </a:solidFill>
-                <a:latin typeface="Calibri" pitchFamily="34" charset="0"/>
-                <a:ea typeface="Calibri" pitchFamily="34" charset="-122"/>
-                <a:cs typeface="Calibri" pitchFamily="34" charset="-120"/>
-              </a:rPr>
-              <a:t>Keywords miss everything phrased differently, and catch everything that merely mentions the term in passing.</a:t>
-            </a:r>
-            <a:endParaRPr lang="en-US" sz="1300" dirty="0"/>
-          </a:p>
-        </p:txBody>
-      </p:sp>
-      <p:sp>
-        <p:nvSpPr>
-          <p:cNvPr id="14" name="Shape 12"/>
-          <p:cNvSpPr/>
-          <p:nvPr/>
-        </p:nvSpPr>
-        <p:spPr>
-          <a:xfrm>
-            <a:off x="8152181" y="3291840"/>
-            <a:ext cx="3472586" cy="1783080"/>
-          </a:xfrm>
-          <a:prstGeom prst="roundRect">
-            <a:avLst>
-              <a:gd name="adj" fmla="val 2564"/>
-            </a:avLst>
-          </a:prstGeom>
-          <a:solidFill>
-            <a:srgbClr val="EEF2F7"/>
-          </a:solidFill>
-          <a:ln w="12700">
-            <a:solidFill>
-              <a:srgbClr val="DCE3EB"/>
-            </a:solidFill>
-            <a:prstDash val="solid"/>
-          </a:ln>
-        </p:spPr>
-        <p:txBody>
-          <a:bodyPr/>
-          <a:lstStyle/>
-          <a:p>
-            <a:endParaRPr lang="en-US"/>
-          </a:p>
-        </p:txBody>
-      </p:sp>
-      <p:sp>
-        <p:nvSpPr>
-          <p:cNvPr id="15" name="Text 13"/>
-          <p:cNvSpPr txBox="1"/>
-          <p:nvPr/>
-        </p:nvSpPr>
-        <p:spPr>
-          <a:xfrm>
-            <a:off x="8426501" y="3493008"/>
-            <a:ext cx="2923946" cy="1371600"/>
-          </a:xfrm>
-          <a:prstGeom prst="rect">
-            <a:avLst/>
-          </a:prstGeom>
-          <a:noFill/>
-          <a:ln/>
-        </p:spPr>
-        <p:txBody>
-          <a:bodyPr wrap="square" lIns="0" tIns="0" rIns="0" bIns="0" rtlCol="0" anchor="ctr"/>
-          <a:lstStyle/>
-          <a:p>
-            <a:pPr marL="0" indent="0">
-              <a:lnSpc>
-                <a:spcPts val="1900"/>
-              </a:lnSpc>
-              <a:buNone/>
-            </a:pPr>
-            <a:r>
-              <a:rPr lang="en-US" sz="1300" dirty="0">
-                <a:solidFill>
-                  <a:srgbClr val="3D4451"/>
-                </a:solidFill>
-                <a:latin typeface="Calibri" pitchFamily="34" charset="0"/>
-                <a:ea typeface="Calibri" pitchFamily="34" charset="-122"/>
-                <a:cs typeface="Calibri" pitchFamily="34" charset="-120"/>
-              </a:rPr>
-              <a:t>Neither problem is visible in the result. You get a list, and no way to show that it is complete.</a:t>
-            </a:r>
-            <a:endParaRPr lang="en-US" sz="1300" dirty="0"/>
-          </a:p>
-        </p:txBody>
-      </p:sp>
-      <p:sp>
-        <p:nvSpPr>
-          <p:cNvPr id="16" name="Shape 14"/>
-          <p:cNvSpPr/>
-          <p:nvPr/>
-        </p:nvSpPr>
-        <p:spPr>
-          <a:xfrm>
-            <a:off x="566928" y="5303520"/>
-            <a:ext cx="11057839" cy="749808"/>
-          </a:xfrm>
-          <a:prstGeom prst="roundRect">
-            <a:avLst>
-              <a:gd name="adj" fmla="val 6098"/>
-            </a:avLst>
-          </a:prstGeom>
-          <a:solidFill>
-            <a:srgbClr val="FFFFFF"/>
-          </a:solidFill>
-          <a:ln w="15875">
-            <a:solidFill>
-              <a:srgbClr val="C62828"/>
-            </a:solidFill>
-            <a:prstDash val="solid"/>
-          </a:ln>
-        </p:spPr>
-        <p:txBody>
-          <a:bodyPr/>
-          <a:lstStyle/>
-          <a:p>
-            <a:endParaRPr lang="en-US"/>
-          </a:p>
-        </p:txBody>
-      </p:sp>
-      <p:sp>
-        <p:nvSpPr>
-          <p:cNvPr id="17" name="Text 15"/>
-          <p:cNvSpPr txBox="1"/>
-          <p:nvPr/>
-        </p:nvSpPr>
-        <p:spPr>
-          <a:xfrm>
-            <a:off x="914400" y="5303520"/>
-            <a:ext cx="1234440" cy="749808"/>
-          </a:xfrm>
-          <a:prstGeom prst="rect">
-            <a:avLst/>
-          </a:prstGeom>
-          <a:noFill/>
-          <a:ln/>
-        </p:spPr>
-        <p:txBody>
-          <a:bodyPr wrap="square" lIns="0" tIns="0" rIns="0" bIns="0" rtlCol="0" anchor="ctr"/>
-          <a:lstStyle/>
-          <a:p>
-            <a:pPr marL="0" indent="0">
-              <a:lnSpc>
-                <a:spcPts val="1400"/>
-              </a:lnSpc>
-              <a:buNone/>
-            </a:pPr>
-            <a:r>
-              <a:rPr lang="en-US" sz="1050" b="1" kern="0" spc="160" dirty="0">
-                <a:solidFill>
-                  <a:srgbClr val="C62828"/>
-                </a:solidFill>
-                <a:latin typeface="Calibri" pitchFamily="34" charset="0"/>
-                <a:ea typeface="Calibri" pitchFamily="34" charset="-122"/>
-                <a:cs typeface="Calibri" pitchFamily="34" charset="-120"/>
-              </a:rPr>
-              <a:t>LIVE IN TIP</a:t>
-            </a:r>
-            <a:endParaRPr lang="en-US" sz="1050" dirty="0"/>
-          </a:p>
-          <a:p>
-            <a:pPr marL="0" indent="0">
-              <a:lnSpc>
-                <a:spcPts val="1400"/>
-              </a:lnSpc>
-              <a:buNone/>
-            </a:pPr>
-            <a:r>
-              <a:rPr lang="en-US" sz="1050" b="1" kern="0" spc="160" dirty="0">
-                <a:solidFill>
-                  <a:srgbClr val="C62828"/>
-                </a:solidFill>
-                <a:latin typeface="Calibri" pitchFamily="34" charset="0"/>
-                <a:ea typeface="Calibri" pitchFamily="34" charset="-122"/>
-                <a:cs typeface="Calibri" pitchFamily="34" charset="-120"/>
-              </a:rPr>
-              <a:t>NEXT</a:t>
-            </a:r>
-            <a:endParaRPr lang="en-US" sz="1050" dirty="0"/>
-          </a:p>
-        </p:txBody>
-      </p:sp>
-      <p:sp>
-        <p:nvSpPr>
-          <p:cNvPr id="18" name="Text 16"/>
-          <p:cNvSpPr txBox="1"/>
-          <p:nvPr/>
-        </p:nvSpPr>
-        <p:spPr>
-          <a:xfrm>
-            <a:off x="2350008" y="5303520"/>
-            <a:ext cx="8908999" cy="749808"/>
-          </a:xfrm>
-          <a:prstGeom prst="rect">
-            <a:avLst/>
-          </a:prstGeom>
-          <a:noFill/>
-          <a:ln/>
-        </p:spPr>
-        <p:txBody>
-          <a:bodyPr wrap="square" lIns="0" tIns="0" rIns="0" bIns="0" rtlCol="0" anchor="ctr"/>
-          <a:lstStyle/>
-          <a:p>
-            <a:pPr marL="0" indent="0">
-              <a:lnSpc>
-                <a:spcPts val="1900"/>
-              </a:lnSpc>
-              <a:buNone/>
-            </a:pPr>
-            <a:r>
-              <a:rPr lang="en-US" sz="1300" dirty="0">
-                <a:solidFill>
-                  <a:srgbClr val="3D4451"/>
-                </a:solidFill>
-                <a:latin typeface="Calibri" pitchFamily="34" charset="0"/>
-                <a:ea typeface="Calibri" pitchFamily="34" charset="-122"/>
-                <a:cs typeface="Calibri" pitchFamily="34" charset="-120"/>
-              </a:rPr>
-              <a:t>One query from the library run against PATSTAT Global, then the same query with a single parameter changed.</a:t>
-            </a:r>
-            <a:endParaRPr lang="en-US" sz="1300" dirty="0"/>
-          </a:p>
-        </p:txBody>
-      </p:sp>
-      <p:sp>
-        <p:nvSpPr>
-          <p:cNvPr id="20" name="Text 17"/>
-          <p:cNvSpPr txBox="1"/>
-          <p:nvPr/>
-        </p:nvSpPr>
-        <p:spPr>
-          <a:xfrm>
-            <a:off x="566928" y="6382512"/>
-            <a:ext cx="5486400" cy="274320"/>
-          </a:xfrm>
-          <a:prstGeom prst="rect">
-            <a:avLst/>
-          </a:prstGeom>
-          <a:noFill/>
-          <a:ln/>
-        </p:spPr>
-        <p:txBody>
-          <a:bodyPr wrap="square" lIns="0" tIns="0" rIns="0" bIns="0" rtlCol="0" anchor="ctr"/>
-          <a:lstStyle/>
-          <a:p>
-            <a:pPr marL="0" indent="0">
-              <a:buNone/>
-            </a:pPr>
-            <a:r>
-              <a:rPr lang="en-US" sz="900" kern="0" spc="100" dirty="0">
-                <a:solidFill>
-                  <a:srgbClr val="6B7280"/>
-                </a:solidFill>
-                <a:latin typeface="Calibri" pitchFamily="34" charset="0"/>
-                <a:ea typeface="Calibri" pitchFamily="34" charset="-122"/>
-                <a:cs typeface="Calibri" pitchFamily="34" charset="-120"/>
-              </a:rPr>
-              <a:t>TIP4PATLIBS  ·  10 / 20</a:t>
             </a:r>
             <a:endParaRPr lang="en-US" sz="900" dirty="0"/>
           </a:p>
